--- a/docs/Servidor_CPP_Presentacion_15min.pptx
+++ b/docs/Servidor_CPP_Presentacion_15min.pptx
@@ -4,24 +4,27 @@
   <p:sldMasterIdLst>
     <p:sldMasterId id="2147483648" r:id="rId1"/>
   </p:sldMasterIdLst>
+  <p:notesMasterIdLst>
+    <p:notesMasterId r:id="rId17"/>
+  </p:notesMasterIdLst>
   <p:sldIdLst>
-    <p:sldId id="256" r:id="rId7"/>
-    <p:sldId id="257" r:id="rId9"/>
-    <p:sldId id="258" r:id="rId10"/>
-    <p:sldId id="259" r:id="rId11"/>
-    <p:sldId id="260" r:id="rId12"/>
-    <p:sldId id="261" r:id="rId13"/>
-    <p:sldId id="262" r:id="rId14"/>
-    <p:sldId id="263" r:id="rId15"/>
-    <p:sldId id="264" r:id="rId16"/>
-    <p:sldId id="265" r:id="rId17"/>
-    <p:sldId id="266" r:id="rId18"/>
-    <p:sldId id="267" r:id="rId19"/>
-    <p:sldId id="268" r:id="rId20"/>
-    <p:sldId id="269" r:id="rId21"/>
-    <p:sldId id="270" r:id="rId22"/>
+    <p:sldId id="256" r:id="rId2"/>
+    <p:sldId id="257" r:id="rId3"/>
+    <p:sldId id="258" r:id="rId4"/>
+    <p:sldId id="259" r:id="rId5"/>
+    <p:sldId id="260" r:id="rId6"/>
+    <p:sldId id="261" r:id="rId7"/>
+    <p:sldId id="262" r:id="rId8"/>
+    <p:sldId id="263" r:id="rId9"/>
+    <p:sldId id="264" r:id="rId10"/>
+    <p:sldId id="265" r:id="rId11"/>
+    <p:sldId id="266" r:id="rId12"/>
+    <p:sldId id="267" r:id="rId13"/>
+    <p:sldId id="268" r:id="rId14"/>
+    <p:sldId id="269" r:id="rId15"/>
+    <p:sldId id="270" r:id="rId16"/>
   </p:sldIdLst>
-  <p:sldSz cx="12191695" cy="6858000" type="screen4x3"/>
+  <p:sldSz cx="12192000" cy="6858000"/>
   <p:notesSz cx="6858000" cy="9144000"/>
   <p:defaultTextStyle>
     <a:defPPr>
@@ -118,11 +121,27 @@
       </a:defRPr>
     </a:lvl9pPr>
   </p:defaultTextStyle>
+  <p:extLst>
+    <p:ext uri="{EFAFB233-063F-42B5-8137-9DF3F51BA10A}">
+      <p15:sldGuideLst xmlns:p15="http://schemas.microsoft.com/office/powerpoint/2012/main">
+        <p15:guide id="1" orient="horz" pos="2160">
+          <p15:clr>
+            <a:srgbClr val="A4A3A4"/>
+          </p15:clr>
+        </p15:guide>
+        <p15:guide id="2" pos="2880">
+          <p15:clr>
+            <a:srgbClr val="A4A3A4"/>
+          </p15:clr>
+        </p15:guide>
+      </p15:sldGuideLst>
+    </p:ext>
+  </p:extLst>
 </p:presentation>
 </file>
 
 <file path=ppt/notesMasters/notesMaster1.xml><?xml version="1.0" encoding="utf-8"?>
-<p:notesMaster xmlns:a="http://schemas.openxmlformats.org/drawingml/2006/main" xmlns:p="http://schemas.openxmlformats.org/presentationml/2006/main" xmlns:r="http://schemas.openxmlformats.org/officeDocument/2006/relationships">
+<p:notesMaster xmlns:a="http://schemas.openxmlformats.org/drawingml/2006/main" xmlns:r="http://schemas.openxmlformats.org/officeDocument/2006/relationships" xmlns:p="http://schemas.openxmlformats.org/presentationml/2006/main">
   <p:cSld>
     <p:bg>
       <p:bgRef idx="1001">
@@ -143,241 +162,16 @@
           <a:chExt cx="0" cy="0"/>
         </a:xfrm>
       </p:grpSpPr>
-      <p:sp>
-        <p:nvSpPr>
-          <p:cNvPr id="2" name="Header Placeholder 1"/>
-          <p:cNvSpPr>
-            <a:spLocks noGrp="1"/>
-          </p:cNvSpPr>
-          <p:nvPr>
-            <p:ph type="hdr" sz="quarter"/>
-          </p:nvPr>
-        </p:nvSpPr>
-        <p:spPr>
-          <a:xfrm>
-            <a:off x="0" y="0"/>
-            <a:ext cx="2971800" cy="457200"/>
-          </a:xfrm>
-          <a:prstGeom prst="rect">
-            <a:avLst/>
-          </a:prstGeom>
-        </p:spPr>
-        <p:txBody>
-          <a:bodyPr vert="horz" lIns="91440" tIns="45720" rIns="91440" bIns="45720" rtlCol="0"/>
-          <a:lstStyle>
-            <a:lvl1pPr algn="l">
-              <a:defRPr sz="1200"/>
-            </a:lvl1pPr>
-          </a:lstStyle>
-          <a:p>
-            <a:endParaRPr lang="en-US"/>
-          </a:p>
-        </p:txBody>
-      </p:sp>
-      <p:sp>
-        <p:nvSpPr>
-          <p:cNvPr id="3" name="Date Placeholder 2"/>
-          <p:cNvSpPr>
-            <a:spLocks noGrp="1"/>
-          </p:cNvSpPr>
-          <p:nvPr>
-            <p:ph type="dt" idx="1"/>
-          </p:nvPr>
-        </p:nvSpPr>
-        <p:spPr>
-          <a:xfrm>
-            <a:off x="3884613" y="0"/>
-            <a:ext cx="2971800" cy="457200"/>
-          </a:xfrm>
-          <a:prstGeom prst="rect">
-            <a:avLst/>
-          </a:prstGeom>
-        </p:spPr>
-        <p:txBody>
-          <a:bodyPr vert="horz" lIns="91440" tIns="45720" rIns="91440" bIns="45720" rtlCol="0"/>
-          <a:lstStyle>
-            <a:lvl1pPr algn="r">
-              <a:defRPr sz="1200"/>
-            </a:lvl1pPr>
-          </a:lstStyle>
-          <a:p>
-            <a:fld id="{0F89C1C7-3DCD-1040-A9CF-14679D8B5DDD}" type="datetimeFigureOut">
-              <a:rPr lang="en-US" smtClean="0"/>
-              <a:t>10/17/16</a:t>
-            </a:fld>
-            <a:endParaRPr lang="en-US"/>
-          </a:p>
-        </p:txBody>
-      </p:sp>
-      <p:sp>
-        <p:nvSpPr>
-          <p:cNvPr id="4" name="Slide Image Placeholder 3"/>
-          <p:cNvSpPr>
-            <a:spLocks noGrp="1" noRot="1" noChangeAspect="1"/>
-          </p:cNvSpPr>
-          <p:nvPr>
-            <p:ph type="sldImg" idx="2"/>
-          </p:nvPr>
-        </p:nvSpPr>
-        <p:spPr>
-          <a:xfrm>
-            <a:off x="1143000" y="685800"/>
-            <a:ext cx="4572000" cy="3429000"/>
-          </a:xfrm>
-          <a:prstGeom prst="rect">
-            <a:avLst/>
-          </a:prstGeom>
-          <a:noFill/>
-          <a:ln w="12700">
-            <a:solidFill>
-              <a:prstClr val="black"/>
-            </a:solidFill>
-          </a:ln>
-        </p:spPr>
-        <p:txBody>
-          <a:bodyPr vert="horz" lIns="91440" tIns="45720" rIns="91440" bIns="45720" rtlCol="0" anchor="ctr"/>
-          <a:lstStyle/>
-          <a:p>
-            <a:endParaRPr lang="en-US"/>
-          </a:p>
-        </p:txBody>
-      </p:sp>
-      <p:sp>
-        <p:nvSpPr>
-          <p:cNvPr id="5" name="Notes Placeholder 4"/>
-          <p:cNvSpPr>
-            <a:spLocks noGrp="1"/>
-          </p:cNvSpPr>
-          <p:nvPr>
-            <p:ph type="body" sz="quarter" idx="3"/>
-          </p:nvPr>
-        </p:nvSpPr>
-        <p:spPr>
-          <a:xfrm>
-            <a:off x="685800" y="4343400"/>
-            <a:ext cx="5486400" cy="4114800"/>
-          </a:xfrm>
-          <a:prstGeom prst="rect">
-            <a:avLst/>
-          </a:prstGeom>
-        </p:spPr>
-        <p:txBody>
-          <a:bodyPr vert="horz" lIns="91440" tIns="45720" rIns="91440" bIns="45720" rtlCol="0"/>
-          <a:lstStyle/>
-          <a:p>
-            <a:pPr lvl="0"/>
-            <a:r>
-              <a:rPr lang="en-US" smtClean="0"/>
-              <a:t>Click to edit Master text styles</a:t>
-            </a:r>
-          </a:p>
-          <a:p>
-            <a:pPr lvl="1"/>
-            <a:r>
-              <a:rPr lang="en-US" smtClean="0"/>
-              <a:t>Second level</a:t>
-            </a:r>
-          </a:p>
-          <a:p>
-            <a:pPr lvl="2"/>
-            <a:r>
-              <a:rPr lang="en-US" smtClean="0"/>
-              <a:t>Third level</a:t>
-            </a:r>
-          </a:p>
-          <a:p>
-            <a:pPr lvl="3"/>
-            <a:r>
-              <a:rPr lang="en-US" smtClean="0"/>
-              <a:t>Fourth level</a:t>
-            </a:r>
-          </a:p>
-          <a:p>
-            <a:pPr lvl="4"/>
-            <a:r>
-              <a:rPr lang="en-US" smtClean="0"/>
-              <a:t>Fifth level</a:t>
-            </a:r>
-            <a:endParaRPr lang="en-US"/>
-          </a:p>
-        </p:txBody>
-      </p:sp>
-      <p:sp>
-        <p:nvSpPr>
-          <p:cNvPr id="6" name="Footer Placeholder 5"/>
-          <p:cNvSpPr>
-            <a:spLocks noGrp="1"/>
-          </p:cNvSpPr>
-          <p:nvPr>
-            <p:ph type="ftr" sz="quarter" idx="4"/>
-          </p:nvPr>
-        </p:nvSpPr>
-        <p:spPr>
-          <a:xfrm>
-            <a:off x="0" y="8685213"/>
-            <a:ext cx="2971800" cy="457200"/>
-          </a:xfrm>
-          <a:prstGeom prst="rect">
-            <a:avLst/>
-          </a:prstGeom>
-        </p:spPr>
-        <p:txBody>
-          <a:bodyPr vert="horz" lIns="91440" tIns="45720" rIns="91440" bIns="45720" rtlCol="0" anchor="b"/>
-          <a:lstStyle>
-            <a:lvl1pPr algn="l">
-              <a:defRPr sz="1200"/>
-            </a:lvl1pPr>
-          </a:lstStyle>
-          <a:p>
-            <a:endParaRPr lang="en-US"/>
-          </a:p>
-        </p:txBody>
-      </p:sp>
-      <p:sp>
-        <p:nvSpPr>
-          <p:cNvPr id="7" name="Slide Number Placeholder 6"/>
-          <p:cNvSpPr>
-            <a:spLocks noGrp="1"/>
-          </p:cNvSpPr>
-          <p:nvPr>
-            <p:ph type="sldNum" sz="quarter" idx="5"/>
-          </p:nvPr>
-        </p:nvSpPr>
-        <p:spPr>
-          <a:xfrm>
-            <a:off x="3884613" y="8685213"/>
-            <a:ext cx="2971800" cy="457200"/>
-          </a:xfrm>
-          <a:prstGeom prst="rect">
-            <a:avLst/>
-          </a:prstGeom>
-        </p:spPr>
-        <p:txBody>
-          <a:bodyPr vert="horz" lIns="91440" tIns="45720" rIns="91440" bIns="45720" rtlCol="0" anchor="b"/>
-          <a:lstStyle>
-            <a:lvl1pPr algn="r">
-              <a:defRPr sz="1200"/>
-            </a:lvl1pPr>
-          </a:lstStyle>
-          <a:p>
-            <a:fld id="{BB5E49A5-4136-284D-997B-48E1D791AD67}" type="slidenum">
-              <a:rPr lang="en-US" smtClean="0"/>
-              <a:t>‹#›</a:t>
-            </a:fld>
-            <a:endParaRPr lang="en-US"/>
-          </a:p>
-        </p:txBody>
-      </p:sp>
     </p:spTree>
     <p:extLst>
       <p:ext uri="{BB962C8B-B14F-4D97-AF65-F5344CB8AC3E}">
-        <p14:creationId xmlns:p14="http://schemas.microsoft.com/office/powerpoint/2010/main" val="2623252185"/>
+        <p14:creationId xmlns:p14="http://schemas.microsoft.com/office/powerpoint/2010/main" val="1213019557"/>
       </p:ext>
     </p:extLst>
   </p:cSld>
   <p:clrMap bg1="lt1" tx1="dk1" bg2="lt2" tx2="dk2" accent1="accent1" accent2="accent2" accent3="accent3" accent4="accent4" accent5="accent5" accent6="accent6" hlink="hlink" folHlink="folHlink"/>
   <p:notesStyle>
-    <a:lvl1pPr marL="0" algn="l" defTabSz="457200" rtl="0" eaLnBrk="1" latinLnBrk="0" hangingPunct="1">
+    <a:lvl1pPr marL="0" algn="l" defTabSz="914400" rtl="0" eaLnBrk="1" latinLnBrk="0" hangingPunct="1">
       <a:defRPr sz="1200" kern="1200">
         <a:solidFill>
           <a:schemeClr val="tx1"/>
@@ -387,7 +181,7 @@
         <a:cs typeface="+mn-cs"/>
       </a:defRPr>
     </a:lvl1pPr>
-    <a:lvl2pPr marL="457200" algn="l" defTabSz="457200" rtl="0" eaLnBrk="1" latinLnBrk="0" hangingPunct="1">
+    <a:lvl2pPr marL="457200" algn="l" defTabSz="914400" rtl="0" eaLnBrk="1" latinLnBrk="0" hangingPunct="1">
       <a:defRPr sz="1200" kern="1200">
         <a:solidFill>
           <a:schemeClr val="tx1"/>
@@ -397,7 +191,7 @@
         <a:cs typeface="+mn-cs"/>
       </a:defRPr>
     </a:lvl2pPr>
-    <a:lvl3pPr marL="914400" algn="l" defTabSz="457200" rtl="0" eaLnBrk="1" latinLnBrk="0" hangingPunct="1">
+    <a:lvl3pPr marL="914400" algn="l" defTabSz="914400" rtl="0" eaLnBrk="1" latinLnBrk="0" hangingPunct="1">
       <a:defRPr sz="1200" kern="1200">
         <a:solidFill>
           <a:schemeClr val="tx1"/>
@@ -407,7 +201,7 @@
         <a:cs typeface="+mn-cs"/>
       </a:defRPr>
     </a:lvl3pPr>
-    <a:lvl4pPr marL="1371600" algn="l" defTabSz="457200" rtl="0" eaLnBrk="1" latinLnBrk="0" hangingPunct="1">
+    <a:lvl4pPr marL="1371600" algn="l" defTabSz="914400" rtl="0" eaLnBrk="1" latinLnBrk="0" hangingPunct="1">
       <a:defRPr sz="1200" kern="1200">
         <a:solidFill>
           <a:schemeClr val="tx1"/>
@@ -417,7 +211,7 @@
         <a:cs typeface="+mn-cs"/>
       </a:defRPr>
     </a:lvl4pPr>
-    <a:lvl5pPr marL="1828800" algn="l" defTabSz="457200" rtl="0" eaLnBrk="1" latinLnBrk="0" hangingPunct="1">
+    <a:lvl5pPr marL="1828800" algn="l" defTabSz="914400" rtl="0" eaLnBrk="1" latinLnBrk="0" hangingPunct="1">
       <a:defRPr sz="1200" kern="1200">
         <a:solidFill>
           <a:schemeClr val="tx1"/>
@@ -427,7 +221,7 @@
         <a:cs typeface="+mn-cs"/>
       </a:defRPr>
     </a:lvl5pPr>
-    <a:lvl6pPr marL="2286000" algn="l" defTabSz="457200" rtl="0" eaLnBrk="1" latinLnBrk="0" hangingPunct="1">
+    <a:lvl6pPr marL="2286000" algn="l" defTabSz="914400" rtl="0" eaLnBrk="1" latinLnBrk="0" hangingPunct="1">
       <a:defRPr sz="1200" kern="1200">
         <a:solidFill>
           <a:schemeClr val="tx1"/>
@@ -437,7 +231,7 @@
         <a:cs typeface="+mn-cs"/>
       </a:defRPr>
     </a:lvl6pPr>
-    <a:lvl7pPr marL="2743200" algn="l" defTabSz="457200" rtl="0" eaLnBrk="1" latinLnBrk="0" hangingPunct="1">
+    <a:lvl7pPr marL="2743200" algn="l" defTabSz="914400" rtl="0" eaLnBrk="1" latinLnBrk="0" hangingPunct="1">
       <a:defRPr sz="1200" kern="1200">
         <a:solidFill>
           <a:schemeClr val="tx1"/>
@@ -447,7 +241,7 @@
         <a:cs typeface="+mn-cs"/>
       </a:defRPr>
     </a:lvl7pPr>
-    <a:lvl8pPr marL="3200400" algn="l" defTabSz="457200" rtl="0" eaLnBrk="1" latinLnBrk="0" hangingPunct="1">
+    <a:lvl8pPr marL="3200400" algn="l" defTabSz="914400" rtl="0" eaLnBrk="1" latinLnBrk="0" hangingPunct="1">
       <a:defRPr sz="1200" kern="1200">
         <a:solidFill>
           <a:schemeClr val="tx1"/>
@@ -457,7 +251,7 @@
         <a:cs typeface="+mn-cs"/>
       </a:defRPr>
     </a:lvl8pPr>
-    <a:lvl9pPr marL="3657600" algn="l" defTabSz="457200" rtl="0" eaLnBrk="1" latinLnBrk="0" hangingPunct="1">
+    <a:lvl9pPr marL="3657600" algn="l" defTabSz="914400" rtl="0" eaLnBrk="1" latinLnBrk="0" hangingPunct="1">
       <a:defRPr sz="1200" kern="1200">
         <a:solidFill>
           <a:schemeClr val="tx1"/>
@@ -472,7 +266,7 @@
 </file>
 
 <file path=ppt/notesSlides/notesSlide1.xml><?xml version="1.0" encoding="utf-8"?>
-<p:notes xmlns:a="http://schemas.openxmlformats.org/drawingml/2006/main" xmlns:p="http://schemas.openxmlformats.org/presentationml/2006/main" xmlns:r="http://schemas.openxmlformats.org/officeDocument/2006/relationships">
+<p:notes xmlns:a="http://schemas.openxmlformats.org/drawingml/2006/main" xmlns:r="http://schemas.openxmlformats.org/officeDocument/2006/relationships" xmlns:p="http://schemas.openxmlformats.org/presentationml/2006/main">
   <p:cSld>
     <p:spTree>
       <p:nvGrpSpPr>
@@ -492,7 +286,7 @@
         <p:nvSpPr>
           <p:cNvPr id="2" name="Slide Image Placeholder 1"/>
           <p:cNvSpPr>
-            <a:spLocks noGrp="1"/>
+            <a:spLocks noGrp="1" noRot="1" noChangeAspect="1"/>
           </p:cNvSpPr>
           <p:nvPr>
             <p:ph type="sldImg" idx="2"/>
@@ -507,7 +301,7 @@
             <a:spLocks noGrp="1"/>
           </p:cNvSpPr>
           <p:nvPr>
-            <p:ph type="body" idx="3" sz="quarter"/>
+            <p:ph type="body" sz="quarter" idx="3"/>
           </p:nvPr>
         </p:nvSpPr>
         <p:spPr/>
@@ -519,7 +313,9 @@
               <a:t>TIEMPO: 30 s. Tramo 00:00–00:30.</a:t>
             </a:r>
           </a:p>
-          <a:p/>
+          <a:p>
+            <a:endParaRPr/>
+          </a:p>
           <a:p>
             <a:r>
               <a:t>APERTURA. He elegido este proyecto personal porque puedo recorrer una petición de principio a fin y explicar las decisiones de concurrencia, recursos y verificación. El objetivo no es presentar un producto terminado ni conocimientos de criptografía: es mostrar criterio como desarrollador C/C++.</a:t>
@@ -539,7 +335,7 @@
             <a:spLocks noGrp="1"/>
           </p:cNvSpPr>
           <p:nvPr>
-            <p:ph type="sldNum" idx="5" sz="quarter"/>
+            <p:ph type="sldNum" sz="quarter" idx="5"/>
           </p:nvPr>
         </p:nvSpPr>
         <p:spPr/>
@@ -553,7 +349,7 @@
 </file>
 
 <file path=ppt/notesSlides/notesSlide10.xml><?xml version="1.0" encoding="utf-8"?>
-<p:notes xmlns:a="http://schemas.openxmlformats.org/drawingml/2006/main" xmlns:p="http://schemas.openxmlformats.org/presentationml/2006/main" xmlns:r="http://schemas.openxmlformats.org/officeDocument/2006/relationships">
+<p:notes xmlns:a="http://schemas.openxmlformats.org/drawingml/2006/main" xmlns:r="http://schemas.openxmlformats.org/officeDocument/2006/relationships" xmlns:p="http://schemas.openxmlformats.org/presentationml/2006/main">
   <p:cSld>
     <p:spTree>
       <p:nvGrpSpPr>
@@ -573,7 +369,7 @@
         <p:nvSpPr>
           <p:cNvPr id="2" name="Slide Image Placeholder 1"/>
           <p:cNvSpPr>
-            <a:spLocks noGrp="1"/>
+            <a:spLocks noGrp="1" noRot="1" noChangeAspect="1"/>
           </p:cNvSpPr>
           <p:nvPr>
             <p:ph type="sldImg" idx="2"/>
@@ -588,7 +384,7 @@
             <a:spLocks noGrp="1"/>
           </p:cNvSpPr>
           <p:nvPr>
-            <p:ph type="body" idx="3" sz="quarter"/>
+            <p:ph type="body" sz="quarter" idx="3"/>
           </p:nvPr>
         </p:nvSpPr>
         <p:spPr/>
@@ -600,7 +396,9 @@
               <a:t>TIEMPO: 90 s. Tramo 08:30–10:00.</a:t>
             </a:r>
           </a:p>
-          <a:p/>
+          <a:p>
+            <a:endParaRPr/>
+          </a:p>
           <a:p>
             <a:r>
               <a:t>PREPARACIÓN antes de exponer: ejecutar make; tener tres terminales con nc listas, puerto 9000 libre. Arrancar el comando mostrado. Conectar A y esperar saludo; mantenerlo inactivo. Conectar B: no hay saludo porque espera. Conectar C: cierre por cola llena. En A escribir QUIT; devuelve BYE y B recibe saludo cuando el worker se libera. En B PING devuelve PONG. Por último Ctrl+C en el servidor con B conectado y comprobar terminación.</a:t>
@@ -620,7 +418,7 @@
             <a:spLocks noGrp="1"/>
           </p:cNvSpPr>
           <p:nvPr>
-            <p:ph type="sldNum" idx="5" sz="quarter"/>
+            <p:ph type="sldNum" sz="quarter" idx="5"/>
           </p:nvPr>
         </p:nvSpPr>
         <p:spPr/>
@@ -634,7 +432,7 @@
 </file>
 
 <file path=ppt/notesSlides/notesSlide11.xml><?xml version="1.0" encoding="utf-8"?>
-<p:notes xmlns:a="http://schemas.openxmlformats.org/drawingml/2006/main" xmlns:p="http://schemas.openxmlformats.org/presentationml/2006/main" xmlns:r="http://schemas.openxmlformats.org/officeDocument/2006/relationships">
+<p:notes xmlns:a="http://schemas.openxmlformats.org/drawingml/2006/main" xmlns:r="http://schemas.openxmlformats.org/officeDocument/2006/relationships" xmlns:p="http://schemas.openxmlformats.org/presentationml/2006/main">
   <p:cSld>
     <p:spTree>
       <p:nvGrpSpPr>
@@ -654,7 +452,7 @@
         <p:nvSpPr>
           <p:cNvPr id="2" name="Slide Image Placeholder 1"/>
           <p:cNvSpPr>
-            <a:spLocks noGrp="1"/>
+            <a:spLocks noGrp="1" noRot="1" noChangeAspect="1"/>
           </p:cNvSpPr>
           <p:nvPr>
             <p:ph type="sldImg" idx="2"/>
@@ -669,7 +467,7 @@
             <a:spLocks noGrp="1"/>
           </p:cNvSpPr>
           <p:nvPr>
-            <p:ph type="body" idx="3" sz="quarter"/>
+            <p:ph type="body" sz="quarter" idx="3"/>
           </p:nvPr>
         </p:nvSpPr>
         <p:spPr/>
@@ -681,7 +479,9 @@
               <a:t>TIEMPO: 60 s. Tramo 10:00–11:00.</a:t>
             </a:r>
           </a:p>
-          <a:p/>
+          <a:p>
+            <a:endParaRPr/>
+          </a:p>
           <a:p>
             <a:r>
               <a:t>Separar qué comprobamos de qué no. Los tests C++ del protocolo verifican comandos y errores. Cinco métodos Python prueban la red real: cola llena y reutilización; independencia de dos workers; SIGINT/SIGTERM con activos/pendientes; workers ociosos; desconexión abrupta sin matar al servidor. Los tests del protocolo y del pool pasaron en macOS y Linux mediante Docker. CTest los integra.</a:t>
@@ -701,7 +501,7 @@
             <a:spLocks noGrp="1"/>
           </p:cNvSpPr>
           <p:nvPr>
-            <p:ph type="sldNum" idx="5" sz="quarter"/>
+            <p:ph type="sldNum" sz="quarter" idx="5"/>
           </p:nvPr>
         </p:nvSpPr>
         <p:spPr/>
@@ -715,7 +515,7 @@
 </file>
 
 <file path=ppt/notesSlides/notesSlide12.xml><?xml version="1.0" encoding="utf-8"?>
-<p:notes xmlns:a="http://schemas.openxmlformats.org/drawingml/2006/main" xmlns:p="http://schemas.openxmlformats.org/presentationml/2006/main" xmlns:r="http://schemas.openxmlformats.org/officeDocument/2006/relationships">
+<p:notes xmlns:a="http://schemas.openxmlformats.org/drawingml/2006/main" xmlns:r="http://schemas.openxmlformats.org/officeDocument/2006/relationships" xmlns:p="http://schemas.openxmlformats.org/presentationml/2006/main">
   <p:cSld>
     <p:spTree>
       <p:nvGrpSpPr>
@@ -735,7 +535,7 @@
         <p:nvSpPr>
           <p:cNvPr id="2" name="Slide Image Placeholder 1"/>
           <p:cNvSpPr>
-            <a:spLocks noGrp="1"/>
+            <a:spLocks noGrp="1" noRot="1" noChangeAspect="1"/>
           </p:cNvSpPr>
           <p:nvPr>
             <p:ph type="sldImg" idx="2"/>
@@ -750,7 +550,7 @@
             <a:spLocks noGrp="1"/>
           </p:cNvSpPr>
           <p:nvPr>
-            <p:ph type="body" idx="3" sz="quarter"/>
+            <p:ph type="body" sz="quarter" idx="3"/>
           </p:nvPr>
         </p:nvSpPr>
         <p:spPr/>
@@ -762,7 +562,9 @@
               <a:t>TIEMPO: 45 s. Tramo 11:00–11:45.</a:t>
             </a:r>
           </a:p>
-          <a:p/>
+          <a:p>
+            <a:endParaRPr/>
+          </a:p>
           <a:p>
             <a:r>
               <a:t>Valgrind/Memcheck ejecuta código e informa de accesos inválidos y fugas en caminos recorridos. El ejemplo bug muestra lectura tras delete; fixed usa unique_ptr. No afirmar que el pool completo ya está validado por Valgrind: el comando make valgrind ejecuta los tests del protocolo. Sonar realiza análisis estático del núcleo. Un quality gate aprobado no significa cero issues.</a:t>
@@ -782,7 +584,7 @@
             <a:spLocks noGrp="1"/>
           </p:cNvSpPr>
           <p:nvPr>
-            <p:ph type="sldNum" idx="5" sz="quarter"/>
+            <p:ph type="sldNum" sz="quarter" idx="5"/>
           </p:nvPr>
         </p:nvSpPr>
         <p:spPr/>
@@ -796,7 +598,7 @@
 </file>
 
 <file path=ppt/notesSlides/notesSlide13.xml><?xml version="1.0" encoding="utf-8"?>
-<p:notes xmlns:a="http://schemas.openxmlformats.org/drawingml/2006/main" xmlns:p="http://schemas.openxmlformats.org/presentationml/2006/main" xmlns:r="http://schemas.openxmlformats.org/officeDocument/2006/relationships">
+<p:notes xmlns:a="http://schemas.openxmlformats.org/drawingml/2006/main" xmlns:r="http://schemas.openxmlformats.org/officeDocument/2006/relationships" xmlns:p="http://schemas.openxmlformats.org/presentationml/2006/main">
   <p:cSld>
     <p:spTree>
       <p:nvGrpSpPr>
@@ -816,7 +618,7 @@
         <p:nvSpPr>
           <p:cNvPr id="2" name="Slide Image Placeholder 1"/>
           <p:cNvSpPr>
-            <a:spLocks noGrp="1"/>
+            <a:spLocks noGrp="1" noRot="1" noChangeAspect="1"/>
           </p:cNvSpPr>
           <p:nvPr>
             <p:ph type="sldImg" idx="2"/>
@@ -831,7 +633,7 @@
             <a:spLocks noGrp="1"/>
           </p:cNvSpPr>
           <p:nvPr>
-            <p:ph type="body" idx="3" sz="quarter"/>
+            <p:ph type="body" sz="quarter" idx="3"/>
           </p:nvPr>
         </p:nvSpPr>
         <p:spPr/>
@@ -843,7 +645,9 @@
               <a:t>TIEMPO: 45 s. Tramo 11:45–12:30.</a:t>
             </a:r>
           </a:p>
-          <a:p/>
+          <a:p>
+            <a:endParaRPr/>
+          </a:p>
           <a:p>
             <a:r>
               <a:t>GitHub Actions compila CMake Debug, conservando assert, y ejecuta CTest. El job Sonar en rama principal genera compile_commands.json y espera el quality gate. El token se guarda como secreto. Análisis de src/include; los ejemplos quedan fuera. No hay CD ni despliegue automático.</a:t>
@@ -863,7 +667,7 @@
             <a:spLocks noGrp="1"/>
           </p:cNvSpPr>
           <p:nvPr>
-            <p:ph type="sldNum" idx="5" sz="quarter"/>
+            <p:ph type="sldNum" sz="quarter" idx="5"/>
           </p:nvPr>
         </p:nvSpPr>
         <p:spPr/>
@@ -877,7 +681,7 @@
 </file>
 
 <file path=ppt/notesSlides/notesSlide14.xml><?xml version="1.0" encoding="utf-8"?>
-<p:notes xmlns:a="http://schemas.openxmlformats.org/drawingml/2006/main" xmlns:p="http://schemas.openxmlformats.org/presentationml/2006/main" xmlns:r="http://schemas.openxmlformats.org/officeDocument/2006/relationships">
+<p:notes xmlns:a="http://schemas.openxmlformats.org/drawingml/2006/main" xmlns:r="http://schemas.openxmlformats.org/officeDocument/2006/relationships" xmlns:p="http://schemas.openxmlformats.org/presentationml/2006/main">
   <p:cSld>
     <p:spTree>
       <p:nvGrpSpPr>
@@ -897,7 +701,7 @@
         <p:nvSpPr>
           <p:cNvPr id="2" name="Slide Image Placeholder 1"/>
           <p:cNvSpPr>
-            <a:spLocks noGrp="1"/>
+            <a:spLocks noGrp="1" noRot="1" noChangeAspect="1"/>
           </p:cNvSpPr>
           <p:nvPr>
             <p:ph type="sldImg" idx="2"/>
@@ -912,7 +716,7 @@
             <a:spLocks noGrp="1"/>
           </p:cNvSpPr>
           <p:nvPr>
-            <p:ph type="body" idx="3" sz="quarter"/>
+            <p:ph type="body" sz="quarter" idx="3"/>
           </p:nvPr>
         </p:nvSpPr>
         <p:spPr/>
@@ -924,7 +728,9 @@
               <a:t>TIEMPO: 60 s. Tramo 12:30–13:30.</a:t>
             </a:r>
           </a:p>
-          <a:p/>
+          <a:p>
+            <a:endParaRPr/>
+          </a:p>
           <a:p>
             <a:r>
               <a:t>Ejemplo complementario para demostrar integración C++/sistemas. El cliente libssh2 del Mac sube un JSON al OpenSSH de una VM ARM64 en QEMU, puerto local 2222. La imagen es oficial precompilada de Yocto 5.0.17: no hemos creado una BSP o distribuido una imagen propia. Arranca su kernel y mantiene un disco overlay qcow2. Se verificó la transferencia comparando hashes SHA-256.</a:t>
@@ -944,7 +750,7 @@
             <a:spLocks noGrp="1"/>
           </p:cNvSpPr>
           <p:nvPr>
-            <p:ph type="sldNum" idx="5" sz="quarter"/>
+            <p:ph type="sldNum" sz="quarter" idx="5"/>
           </p:nvPr>
         </p:nvSpPr>
         <p:spPr/>
@@ -958,7 +764,7 @@
 </file>
 
 <file path=ppt/notesSlides/notesSlide15.xml><?xml version="1.0" encoding="utf-8"?>
-<p:notes xmlns:a="http://schemas.openxmlformats.org/drawingml/2006/main" xmlns:p="http://schemas.openxmlformats.org/presentationml/2006/main" xmlns:r="http://schemas.openxmlformats.org/officeDocument/2006/relationships">
+<p:notes xmlns:a="http://schemas.openxmlformats.org/drawingml/2006/main" xmlns:r="http://schemas.openxmlformats.org/officeDocument/2006/relationships" xmlns:p="http://schemas.openxmlformats.org/presentationml/2006/main">
   <p:cSld>
     <p:spTree>
       <p:nvGrpSpPr>
@@ -978,7 +784,7 @@
         <p:nvSpPr>
           <p:cNvPr id="2" name="Slide Image Placeholder 1"/>
           <p:cNvSpPr>
-            <a:spLocks noGrp="1"/>
+            <a:spLocks noGrp="1" noRot="1" noChangeAspect="1"/>
           </p:cNvSpPr>
           <p:nvPr>
             <p:ph type="sldImg" idx="2"/>
@@ -993,7 +799,7 @@
             <a:spLocks noGrp="1"/>
           </p:cNvSpPr>
           <p:nvPr>
-            <p:ph type="body" idx="3" sz="quarter"/>
+            <p:ph type="body" sz="quarter" idx="3"/>
           </p:nvPr>
         </p:nvSpPr>
         <p:spPr/>
@@ -1005,7 +811,9 @@
               <a:t>TIEMPO: 90 s. Tramo 13:30–15:00.</a:t>
             </a:r>
           </a:p>
-          <a:p/>
+          <a:p>
+            <a:endParaRPr/>
+          </a:p>
           <a:p>
             <a:r>
               <a:t>CIERRE. Lo más importante de la evolución no es cambiar un hilo por una cola, sino hacer explícitos admisión, propiedad y terminación. Primero mejoraría RAII de sockets y timeout por cliente; después validación y pruebas de carreras/cobertura/carga. Solo entonces decidiría con mediciones si merece la pena un event loop.</a:t>
@@ -1030,7 +838,7 @@
             <a:spLocks noGrp="1"/>
           </p:cNvSpPr>
           <p:nvPr>
-            <p:ph type="sldNum" idx="5" sz="quarter"/>
+            <p:ph type="sldNum" sz="quarter" idx="5"/>
           </p:nvPr>
         </p:nvSpPr>
         <p:spPr/>
@@ -1044,7 +852,7 @@
 </file>
 
 <file path=ppt/notesSlides/notesSlide2.xml><?xml version="1.0" encoding="utf-8"?>
-<p:notes xmlns:a="http://schemas.openxmlformats.org/drawingml/2006/main" xmlns:p="http://schemas.openxmlformats.org/presentationml/2006/main" xmlns:r="http://schemas.openxmlformats.org/officeDocument/2006/relationships">
+<p:notes xmlns:a="http://schemas.openxmlformats.org/drawingml/2006/main" xmlns:r="http://schemas.openxmlformats.org/officeDocument/2006/relationships" xmlns:p="http://schemas.openxmlformats.org/presentationml/2006/main">
   <p:cSld>
     <p:spTree>
       <p:nvGrpSpPr>
@@ -1064,7 +872,7 @@
         <p:nvSpPr>
           <p:cNvPr id="2" name="Slide Image Placeholder 1"/>
           <p:cNvSpPr>
-            <a:spLocks noGrp="1"/>
+            <a:spLocks noGrp="1" noRot="1" noChangeAspect="1"/>
           </p:cNvSpPr>
           <p:nvPr>
             <p:ph type="sldImg" idx="2"/>
@@ -1079,7 +887,7 @@
             <a:spLocks noGrp="1"/>
           </p:cNvSpPr>
           <p:nvPr>
-            <p:ph type="body" idx="3" sz="quarter"/>
+            <p:ph type="body" sz="quarter" idx="3"/>
           </p:nvPr>
         </p:nvSpPr>
         <p:spPr/>
@@ -1091,7 +899,9 @@
               <a:t>TIEMPO: 45 s. Tramo 00:30–01:15.</a:t>
             </a:r>
           </a:p>
-          <a:p/>
+          <a:p>
+            <a:endParaRPr/>
+          </a:p>
           <a:p>
             <a:r>
               <a:t>PROBLEMA. Atender varios clientes con un protocolo sencillo sin crear recursos sin límite. Restricciones: C++17, sockets POSIX, macOS/Linux y aplicación de consola. Criterios observables: un cliente no bloquea a otro mientras hay un worker disponible; cola llena aplica rechazo; el apagado termina con clientes activos o pendientes.</a:t>
@@ -1111,7 +921,7 @@
             <a:spLocks noGrp="1"/>
           </p:cNvSpPr>
           <p:nvPr>
-            <p:ph type="sldNum" idx="5" sz="quarter"/>
+            <p:ph type="sldNum" sz="quarter" idx="5"/>
           </p:nvPr>
         </p:nvSpPr>
         <p:spPr/>
@@ -1125,7 +935,7 @@
 </file>
 
 <file path=ppt/notesSlides/notesSlide3.xml><?xml version="1.0" encoding="utf-8"?>
-<p:notes xmlns:a="http://schemas.openxmlformats.org/drawingml/2006/main" xmlns:p="http://schemas.openxmlformats.org/presentationml/2006/main" xmlns:r="http://schemas.openxmlformats.org/officeDocument/2006/relationships">
+<p:notes xmlns:a="http://schemas.openxmlformats.org/drawingml/2006/main" xmlns:r="http://schemas.openxmlformats.org/officeDocument/2006/relationships" xmlns:p="http://schemas.openxmlformats.org/presentationml/2006/main">
   <p:cSld>
     <p:spTree>
       <p:nvGrpSpPr>
@@ -1145,7 +955,7 @@
         <p:nvSpPr>
           <p:cNvPr id="2" name="Slide Image Placeholder 1"/>
           <p:cNvSpPr>
-            <a:spLocks noGrp="1"/>
+            <a:spLocks noGrp="1" noRot="1" noChangeAspect="1"/>
           </p:cNvSpPr>
           <p:nvPr>
             <p:ph type="sldImg" idx="2"/>
@@ -1160,7 +970,7 @@
             <a:spLocks noGrp="1"/>
           </p:cNvSpPr>
           <p:nvPr>
-            <p:ph type="body" idx="3" sz="quarter"/>
+            <p:ph type="body" sz="quarter" idx="3"/>
           </p:nvPr>
         </p:nvSpPr>
         <p:spPr/>
@@ -1172,7 +982,9 @@
               <a:t>TIEMPO: 60 s. Tramo 01:15–02:15.</a:t>
             </a:r>
           </a:p>
-          <a:p/>
+          <a:p>
+            <a:endParaRPr/>
+          </a:p>
           <a:p>
             <a:r>
               <a:t>RECORRIDO. main configura host, puerto y pool; TcpServer gestiona sockets y concurrencia. Cada worker llama a handle_client y este delega la línea en LineProtocol. CommandResult devuelve response y close_connection; el resultado vuelve al servidor para enviarlo. La separación permite probar el protocolo sin abrir sockets y cambiar el modelo de concurrencia sin reescribir los comandos.</a:t>
@@ -1192,7 +1004,7 @@
             <a:spLocks noGrp="1"/>
           </p:cNvSpPr>
           <p:nvPr>
-            <p:ph type="sldNum" idx="5" sz="quarter"/>
+            <p:ph type="sldNum" sz="quarter" idx="5"/>
           </p:nvPr>
         </p:nvSpPr>
         <p:spPr/>
@@ -1206,7 +1018,7 @@
 </file>
 
 <file path=ppt/notesSlides/notesSlide4.xml><?xml version="1.0" encoding="utf-8"?>
-<p:notes xmlns:a="http://schemas.openxmlformats.org/drawingml/2006/main" xmlns:p="http://schemas.openxmlformats.org/presentationml/2006/main" xmlns:r="http://schemas.openxmlformats.org/officeDocument/2006/relationships">
+<p:notes xmlns:a="http://schemas.openxmlformats.org/drawingml/2006/main" xmlns:r="http://schemas.openxmlformats.org/officeDocument/2006/relationships" xmlns:p="http://schemas.openxmlformats.org/presentationml/2006/main">
   <p:cSld>
     <p:spTree>
       <p:nvGrpSpPr>
@@ -1226,7 +1038,7 @@
         <p:nvSpPr>
           <p:cNvPr id="2" name="Slide Image Placeholder 1"/>
           <p:cNvSpPr>
-            <a:spLocks noGrp="1"/>
+            <a:spLocks noGrp="1" noRot="1" noChangeAspect="1"/>
           </p:cNvSpPr>
           <p:nvPr>
             <p:ph type="sldImg" idx="2"/>
@@ -1241,7 +1053,7 @@
             <a:spLocks noGrp="1"/>
           </p:cNvSpPr>
           <p:nvPr>
-            <p:ph type="body" idx="3" sz="quarter"/>
+            <p:ph type="body" sz="quarter" idx="3"/>
           </p:nvPr>
         </p:nvSpPr>
         <p:spPr/>
@@ -1250,18 +1062,407 @@
           <a:lstStyle/>
           <a:p>
             <a:r>
-              <a:t>TIEMPO: 45 s. Tramo 02:15–03:00.</a:t>
-            </a:r>
-          </a:p>
-          <a:p/>
-          <a:p>
-            <a:r>
-              <a:t>TCP no conserva fronteras de mensajes. En esta versión, el delimitador es el salto de línea. read_line lee byte a byte y limita la entrada con max_line_bytes=4096. Es didáctico y tiene coste de syscalls; una mejora sería buffering. send_all gestiona envíos parciales; se reintenta EINTR. Se evita SIGPIPE en envío para que una desconexión no termine el proceso.</a:t>
-            </a:r>
-          </a:p>
-          <a:p>
-            <a:r>
-              <a:t>PING/ECHO/TIME/STATS/HELP/QUIT. El JSON es un parser plano propio y limitado, no un parser general. Las respuestas son siempre texto. La evolución sería una biblioteca JSON y una validación más completa.</a:t>
+              <a:rPr dirty="0"/>
+              <a:t>TIEMPO: 45 s. </a:t>
+            </a:r>
+            <a:r>
+              <a:rPr dirty="0" err="1"/>
+              <a:t>Tramo</a:t>
+            </a:r>
+            <a:r>
+              <a:rPr dirty="0"/>
+              <a:t> 02:15–03:00.</a:t>
+            </a:r>
+          </a:p>
+          <a:p>
+            <a:endParaRPr dirty="0"/>
+          </a:p>
+          <a:p>
+            <a:r>
+              <a:rPr dirty="0"/>
+              <a:t>TCP no </a:t>
+            </a:r>
+            <a:r>
+              <a:rPr dirty="0" err="1"/>
+              <a:t>conserva</a:t>
+            </a:r>
+            <a:r>
+              <a:rPr dirty="0"/>
+              <a:t> </a:t>
+            </a:r>
+            <a:r>
+              <a:rPr dirty="0" err="1"/>
+              <a:t>fronteras</a:t>
+            </a:r>
+            <a:r>
+              <a:rPr dirty="0"/>
+              <a:t> de </a:t>
+            </a:r>
+            <a:r>
+              <a:rPr dirty="0" err="1"/>
+              <a:t>mensajes</a:t>
+            </a:r>
+            <a:r>
+              <a:rPr dirty="0"/>
+              <a:t>. En </a:t>
+            </a:r>
+            <a:r>
+              <a:rPr dirty="0" err="1"/>
+              <a:t>esta</a:t>
+            </a:r>
+            <a:r>
+              <a:rPr dirty="0"/>
+              <a:t> </a:t>
+            </a:r>
+            <a:r>
+              <a:rPr dirty="0" err="1"/>
+              <a:t>versión</a:t>
+            </a:r>
+            <a:r>
+              <a:rPr dirty="0"/>
+              <a:t>, </a:t>
+            </a:r>
+            <a:r>
+              <a:rPr dirty="0" err="1"/>
+              <a:t>el</a:t>
+            </a:r>
+            <a:r>
+              <a:rPr dirty="0"/>
+              <a:t> </a:t>
+            </a:r>
+            <a:r>
+              <a:rPr dirty="0" err="1"/>
+              <a:t>delimitador</a:t>
+            </a:r>
+            <a:r>
+              <a:rPr dirty="0"/>
+              <a:t> es </a:t>
+            </a:r>
+            <a:r>
+              <a:rPr dirty="0" err="1"/>
+              <a:t>el</a:t>
+            </a:r>
+            <a:r>
+              <a:rPr dirty="0"/>
+              <a:t> </a:t>
+            </a:r>
+            <a:r>
+              <a:rPr dirty="0" err="1"/>
+              <a:t>salto</a:t>
+            </a:r>
+            <a:r>
+              <a:rPr dirty="0"/>
+              <a:t> de </a:t>
+            </a:r>
+            <a:r>
+              <a:rPr dirty="0" err="1"/>
+              <a:t>línea</a:t>
+            </a:r>
+            <a:r>
+              <a:rPr dirty="0"/>
+              <a:t>. </a:t>
+            </a:r>
+            <a:r>
+              <a:rPr dirty="0" err="1"/>
+              <a:t>read_line</a:t>
+            </a:r>
+            <a:r>
+              <a:rPr dirty="0"/>
+              <a:t> lee byte a byte y </a:t>
+            </a:r>
+            <a:r>
+              <a:rPr dirty="0" err="1"/>
+              <a:t>limita</a:t>
+            </a:r>
+            <a:r>
+              <a:rPr dirty="0"/>
+              <a:t> la entrada con </a:t>
+            </a:r>
+            <a:r>
+              <a:rPr dirty="0" err="1"/>
+              <a:t>max_line_bytes</a:t>
+            </a:r>
+            <a:r>
+              <a:rPr dirty="0"/>
+              <a:t>=4096. Es </a:t>
+            </a:r>
+            <a:r>
+              <a:rPr dirty="0" err="1"/>
+              <a:t>didáctico</a:t>
+            </a:r>
+            <a:r>
+              <a:rPr dirty="0"/>
+              <a:t> y </a:t>
+            </a:r>
+            <a:r>
+              <a:rPr dirty="0" err="1"/>
+              <a:t>tiene</a:t>
+            </a:r>
+            <a:r>
+              <a:rPr dirty="0"/>
+              <a:t> </a:t>
+            </a:r>
+            <a:r>
+              <a:rPr dirty="0" err="1"/>
+              <a:t>coste</a:t>
+            </a:r>
+            <a:r>
+              <a:rPr dirty="0"/>
+              <a:t> de </a:t>
+            </a:r>
+            <a:r>
+              <a:rPr dirty="0" err="1"/>
+              <a:t>syscalls</a:t>
+            </a:r>
+            <a:r>
+              <a:rPr dirty="0"/>
+              <a:t>; </a:t>
+            </a:r>
+            <a:r>
+              <a:rPr dirty="0" err="1"/>
+              <a:t>una</a:t>
+            </a:r>
+            <a:r>
+              <a:rPr dirty="0"/>
+              <a:t> </a:t>
+            </a:r>
+            <a:r>
+              <a:rPr dirty="0" err="1"/>
+              <a:t>mejora</a:t>
+            </a:r>
+            <a:r>
+              <a:rPr dirty="0"/>
+              <a:t> </a:t>
+            </a:r>
+            <a:r>
+              <a:rPr dirty="0" err="1"/>
+              <a:t>sería</a:t>
+            </a:r>
+            <a:r>
+              <a:rPr dirty="0"/>
+              <a:t> buffering. </a:t>
+            </a:r>
+            <a:r>
+              <a:rPr dirty="0" err="1"/>
+              <a:t>send_all</a:t>
+            </a:r>
+            <a:r>
+              <a:rPr dirty="0"/>
+              <a:t> </a:t>
+            </a:r>
+            <a:r>
+              <a:rPr dirty="0" err="1"/>
+              <a:t>gestiona</a:t>
+            </a:r>
+            <a:r>
+              <a:rPr dirty="0"/>
+              <a:t> </a:t>
+            </a:r>
+            <a:r>
+              <a:rPr dirty="0" err="1"/>
+              <a:t>envíos</a:t>
+            </a:r>
+            <a:r>
+              <a:rPr dirty="0"/>
+              <a:t> </a:t>
+            </a:r>
+            <a:r>
+              <a:rPr dirty="0" err="1"/>
+              <a:t>parciales</a:t>
+            </a:r>
+            <a:r>
+              <a:rPr dirty="0"/>
+              <a:t>; se </a:t>
+            </a:r>
+            <a:r>
+              <a:rPr dirty="0" err="1"/>
+              <a:t>reintenta</a:t>
+            </a:r>
+            <a:r>
+              <a:rPr dirty="0"/>
+              <a:t> EINTR. Se </a:t>
+            </a:r>
+            <a:r>
+              <a:rPr dirty="0" err="1"/>
+              <a:t>evita</a:t>
+            </a:r>
+            <a:r>
+              <a:rPr dirty="0"/>
+              <a:t> SIGPIPE </a:t>
+            </a:r>
+            <a:r>
+              <a:rPr dirty="0" err="1"/>
+              <a:t>en</a:t>
+            </a:r>
+            <a:r>
+              <a:rPr dirty="0"/>
+              <a:t> </a:t>
+            </a:r>
+            <a:r>
+              <a:rPr dirty="0" err="1"/>
+              <a:t>envío</a:t>
+            </a:r>
+            <a:r>
+              <a:rPr dirty="0"/>
+              <a:t> para </a:t>
+            </a:r>
+            <a:r>
+              <a:rPr dirty="0" err="1"/>
+              <a:t>que</a:t>
+            </a:r>
+            <a:r>
+              <a:rPr dirty="0"/>
+              <a:t> </a:t>
+            </a:r>
+            <a:r>
+              <a:rPr dirty="0" err="1"/>
+              <a:t>una</a:t>
+            </a:r>
+            <a:r>
+              <a:rPr dirty="0"/>
+              <a:t> </a:t>
+            </a:r>
+            <a:r>
+              <a:rPr dirty="0" err="1"/>
+              <a:t>desconexión</a:t>
+            </a:r>
+            <a:r>
+              <a:rPr dirty="0"/>
+              <a:t> no </a:t>
+            </a:r>
+            <a:r>
+              <a:rPr dirty="0" err="1"/>
+              <a:t>termine</a:t>
+            </a:r>
+            <a:r>
+              <a:rPr dirty="0"/>
+              <a:t> </a:t>
+            </a:r>
+            <a:r>
+              <a:rPr dirty="0" err="1"/>
+              <a:t>el</a:t>
+            </a:r>
+            <a:r>
+              <a:rPr dirty="0"/>
+              <a:t> </a:t>
+            </a:r>
+            <a:r>
+              <a:rPr dirty="0" err="1"/>
+              <a:t>proceso</a:t>
+            </a:r>
+            <a:r>
+              <a:rPr dirty="0"/>
+              <a:t>.</a:t>
+            </a:r>
+          </a:p>
+          <a:p>
+            <a:r>
+              <a:rPr dirty="0"/>
+              <a:t>PING/ECHO/TIME/STATS/HELP/QUIT. El JSON es un parser plano </a:t>
+            </a:r>
+            <a:r>
+              <a:rPr dirty="0" err="1"/>
+              <a:t>propio</a:t>
+            </a:r>
+            <a:r>
+              <a:rPr dirty="0"/>
+              <a:t> y </a:t>
+            </a:r>
+            <a:r>
+              <a:rPr dirty="0" err="1"/>
+              <a:t>limitado</a:t>
+            </a:r>
+            <a:r>
+              <a:rPr dirty="0"/>
+              <a:t>, no un parser general. Las </a:t>
+            </a:r>
+            <a:r>
+              <a:rPr dirty="0" err="1"/>
+              <a:t>respuestas</a:t>
+            </a:r>
+            <a:r>
+              <a:rPr dirty="0"/>
+              <a:t> son </a:t>
+            </a:r>
+            <a:r>
+              <a:rPr dirty="0" err="1"/>
+              <a:t>siempre</a:t>
+            </a:r>
+            <a:r>
+              <a:rPr dirty="0"/>
+              <a:t> </a:t>
+            </a:r>
+            <a:r>
+              <a:rPr dirty="0" err="1"/>
+              <a:t>texto</a:t>
+            </a:r>
+            <a:r>
+              <a:rPr dirty="0"/>
+              <a:t>. La </a:t>
+            </a:r>
+            <a:r>
+              <a:rPr dirty="0" err="1"/>
+              <a:t>evolución</a:t>
+            </a:r>
+            <a:r>
+              <a:rPr dirty="0"/>
+              <a:t> </a:t>
+            </a:r>
+            <a:r>
+              <a:rPr dirty="0" err="1"/>
+              <a:t>sería</a:t>
+            </a:r>
+            <a:r>
+              <a:rPr dirty="0"/>
+              <a:t> </a:t>
+            </a:r>
+            <a:r>
+              <a:rPr dirty="0" err="1"/>
+              <a:t>una</a:t>
+            </a:r>
+            <a:r>
+              <a:rPr dirty="0"/>
+              <a:t> </a:t>
+            </a:r>
+            <a:r>
+              <a:rPr dirty="0" err="1"/>
+              <a:t>biblioteca</a:t>
+            </a:r>
+            <a:r>
+              <a:rPr dirty="0"/>
+              <a:t> JSON y </a:t>
+            </a:r>
+            <a:r>
+              <a:rPr dirty="0" err="1"/>
+              <a:t>una</a:t>
+            </a:r>
+            <a:r>
+              <a:rPr dirty="0"/>
+              <a:t> </a:t>
+            </a:r>
+            <a:r>
+              <a:rPr dirty="0" err="1"/>
+              <a:t>validación</a:t>
+            </a:r>
+            <a:r>
+              <a:rPr dirty="0"/>
+              <a:t> </a:t>
+            </a:r>
+            <a:r>
+              <a:rPr dirty="0" err="1"/>
+              <a:t>más</a:t>
+            </a:r>
+            <a:r>
+              <a:rPr dirty="0"/>
+              <a:t> </a:t>
+            </a:r>
+            <a:r>
+              <a:rPr dirty="0" err="1"/>
+              <a:t>completa</a:t>
+            </a:r>
+            <a:r>
+              <a:rPr dirty="0"/>
+              <a:t>.</a:t>
             </a:r>
           </a:p>
         </p:txBody>
@@ -1273,7 +1474,7 @@
             <a:spLocks noGrp="1"/>
           </p:cNvSpPr>
           <p:nvPr>
-            <p:ph type="sldNum" idx="5" sz="quarter"/>
+            <p:ph type="sldNum" sz="quarter" idx="5"/>
           </p:nvPr>
         </p:nvSpPr>
         <p:spPr/>
@@ -1287,7 +1488,7 @@
 </file>
 
 <file path=ppt/notesSlides/notesSlide5.xml><?xml version="1.0" encoding="utf-8"?>
-<p:notes xmlns:a="http://schemas.openxmlformats.org/drawingml/2006/main" xmlns:p="http://schemas.openxmlformats.org/presentationml/2006/main" xmlns:r="http://schemas.openxmlformats.org/officeDocument/2006/relationships">
+<p:notes xmlns:a="http://schemas.openxmlformats.org/drawingml/2006/main" xmlns:r="http://schemas.openxmlformats.org/officeDocument/2006/relationships" xmlns:p="http://schemas.openxmlformats.org/presentationml/2006/main">
   <p:cSld>
     <p:spTree>
       <p:nvGrpSpPr>
@@ -1307,7 +1508,7 @@
         <p:nvSpPr>
           <p:cNvPr id="2" name="Slide Image Placeholder 1"/>
           <p:cNvSpPr>
-            <a:spLocks noGrp="1"/>
+            <a:spLocks noGrp="1" noRot="1" noChangeAspect="1"/>
           </p:cNvSpPr>
           <p:nvPr>
             <p:ph type="sldImg" idx="2"/>
@@ -1322,7 +1523,7 @@
             <a:spLocks noGrp="1"/>
           </p:cNvSpPr>
           <p:nvPr>
-            <p:ph type="body" idx="3" sz="quarter"/>
+            <p:ph type="body" sz="quarter" idx="3"/>
           </p:nvPr>
         </p:nvSpPr>
         <p:spPr/>
@@ -1334,7 +1535,9 @@
               <a:t>TIEMPO: 60 s. Tramo 03:00–04:00.</a:t>
             </a:r>
           </a:p>
-          <a:p/>
+          <a:p>
+            <a:endParaRPr/>
+          </a:p>
           <a:p>
             <a:r>
               <a:t>EVOLUCIÓN. La versión inicial usaba un thread detached por cliente: simple, pero sin límite de hilos y con vida útil del servidor difícil de coordinar. Ahora hay pool fijo y join. La justificación es controlar recursos y terminar de forma coordinada, no una mejora de throughput medida.</a:t>
@@ -1354,7 +1557,7 @@
             <a:spLocks noGrp="1"/>
           </p:cNvSpPr>
           <p:nvPr>
-            <p:ph type="sldNum" idx="5" sz="quarter"/>
+            <p:ph type="sldNum" sz="quarter" idx="5"/>
           </p:nvPr>
         </p:nvSpPr>
         <p:spPr/>
@@ -1368,7 +1571,7 @@
 </file>
 
 <file path=ppt/notesSlides/notesSlide6.xml><?xml version="1.0" encoding="utf-8"?>
-<p:notes xmlns:a="http://schemas.openxmlformats.org/drawingml/2006/main" xmlns:p="http://schemas.openxmlformats.org/presentationml/2006/main" xmlns:r="http://schemas.openxmlformats.org/officeDocument/2006/relationships">
+<p:notes xmlns:a="http://schemas.openxmlformats.org/drawingml/2006/main" xmlns:r="http://schemas.openxmlformats.org/officeDocument/2006/relationships" xmlns:p="http://schemas.openxmlformats.org/presentationml/2006/main">
   <p:cSld>
     <p:spTree>
       <p:nvGrpSpPr>
@@ -1388,7 +1591,7 @@
         <p:nvSpPr>
           <p:cNvPr id="2" name="Slide Image Placeholder 1"/>
           <p:cNvSpPr>
-            <a:spLocks noGrp="1"/>
+            <a:spLocks noGrp="1" noRot="1" noChangeAspect="1"/>
           </p:cNvSpPr>
           <p:nvPr>
             <p:ph type="sldImg" idx="2"/>
@@ -1403,7 +1606,7 @@
             <a:spLocks noGrp="1"/>
           </p:cNvSpPr>
           <p:nvPr>
-            <p:ph type="body" idx="3" sz="quarter"/>
+            <p:ph type="body" sz="quarter" idx="3"/>
           </p:nvPr>
         </p:nvSpPr>
         <p:spPr/>
@@ -1415,7 +1618,9 @@
               <a:t>TIEMPO: 60 s. Tramo 04:00–05:00.</a:t>
             </a:r>
           </a:p>
-          <a:p/>
+          <a:p>
+            <a:endParaRPr/>
+          </a:p>
           <a:p>
             <a:r>
               <a:t>El productor es accept_loop: poll y accept no bloqueante, configuración del socket, inserción en pending_clients y notify_one. Los consumidores son worker_loop: esperan, extraen, registran y atienden. Por defecto hay 4 workers y capacidad para 16 pendientes. La cola es FIFO; el orden de terminación puede variar. Una cola llena cierra la nueva conexión, sin mensaje BUSY.</a:t>
@@ -1435,7 +1640,7 @@
             <a:spLocks noGrp="1"/>
           </p:cNvSpPr>
           <p:nvPr>
-            <p:ph type="sldNum" idx="5" sz="quarter"/>
+            <p:ph type="sldNum" sz="quarter" idx="5"/>
           </p:nvPr>
         </p:nvSpPr>
         <p:spPr/>
@@ -1449,7 +1654,7 @@
 </file>
 
 <file path=ppt/notesSlides/notesSlide7.xml><?xml version="1.0" encoding="utf-8"?>
-<p:notes xmlns:a="http://schemas.openxmlformats.org/drawingml/2006/main" xmlns:p="http://schemas.openxmlformats.org/presentationml/2006/main" xmlns:r="http://schemas.openxmlformats.org/officeDocument/2006/relationships">
+<p:notes xmlns:a="http://schemas.openxmlformats.org/drawingml/2006/main" xmlns:r="http://schemas.openxmlformats.org/officeDocument/2006/relationships" xmlns:p="http://schemas.openxmlformats.org/presentationml/2006/main">
   <p:cSld>
     <p:spTree>
       <p:nvGrpSpPr>
@@ -1469,7 +1674,7 @@
         <p:nvSpPr>
           <p:cNvPr id="2" name="Slide Image Placeholder 1"/>
           <p:cNvSpPr>
-            <a:spLocks noGrp="1"/>
+            <a:spLocks noGrp="1" noRot="1" noChangeAspect="1"/>
           </p:cNvSpPr>
           <p:nvPr>
             <p:ph type="sldImg" idx="2"/>
@@ -1484,7 +1689,7 @@
             <a:spLocks noGrp="1"/>
           </p:cNvSpPr>
           <p:nvPr>
-            <p:ph type="body" idx="3" sz="quarter"/>
+            <p:ph type="body" sz="quarter" idx="3"/>
           </p:nvPr>
         </p:nvSpPr>
         <p:spPr/>
@@ -1496,7 +1701,9 @@
               <a:t>TIEMPO: 75 s. Tramo 05:00–06:15.</a:t>
             </a:r>
           </a:p>
-          <a:p/>
+          <a:p>
+            <a:endParaRPr/>
+          </a:p>
           <a:p>
             <a:r>
               <a:t>clients_mutex protege pending_clients, active_clients y stopping. Son estructuras y transiciones compartidas que no se resuelven con contadores atómicos. lock_guard protege secciones cortas. unique_lock permite que wait libere el mutex al dormir y lo recupere antes de continuar. El predicado maneja despertares espurios y parada. El productor modifica bajo lock y notifica.</a:t>
@@ -1516,7 +1723,7 @@
             <a:spLocks noGrp="1"/>
           </p:cNvSpPr>
           <p:nvPr>
-            <p:ph type="sldNum" idx="5" sz="quarter"/>
+            <p:ph type="sldNum" sz="quarter" idx="5"/>
           </p:nvPr>
         </p:nvSpPr>
         <p:spPr/>
@@ -1530,7 +1737,7 @@
 </file>
 
 <file path=ppt/notesSlides/notesSlide8.xml><?xml version="1.0" encoding="utf-8"?>
-<p:notes xmlns:a="http://schemas.openxmlformats.org/drawingml/2006/main" xmlns:p="http://schemas.openxmlformats.org/presentationml/2006/main" xmlns:r="http://schemas.openxmlformats.org/officeDocument/2006/relationships">
+<p:notes xmlns:a="http://schemas.openxmlformats.org/drawingml/2006/main" xmlns:r="http://schemas.openxmlformats.org/officeDocument/2006/relationships" xmlns:p="http://schemas.openxmlformats.org/presentationml/2006/main">
   <p:cSld>
     <p:spTree>
       <p:nvGrpSpPr>
@@ -1550,7 +1757,7 @@
         <p:nvSpPr>
           <p:cNvPr id="2" name="Slide Image Placeholder 1"/>
           <p:cNvSpPr>
-            <a:spLocks noGrp="1"/>
+            <a:spLocks noGrp="1" noRot="1" noChangeAspect="1"/>
           </p:cNvSpPr>
           <p:nvPr>
             <p:ph type="sldImg" idx="2"/>
@@ -1565,7 +1772,7 @@
             <a:spLocks noGrp="1"/>
           </p:cNvSpPr>
           <p:nvPr>
-            <p:ph type="body" idx="3" sz="quarter"/>
+            <p:ph type="body" sz="quarter" idx="3"/>
           </p:nvPr>
         </p:nvSpPr>
         <p:spPr/>
@@ -1577,7 +1784,9 @@
               <a:t>TIEMPO: 60 s. Tramo 06:15–07:15.</a:t>
             </a:r>
           </a:p>
-          <a:p/>
+          <a:p>
+            <a:endParaRPr/>
+          </a:p>
           <a:p>
             <a:r>
               <a:t>El descriptor pasa del productor a la cola y de la cola a un trabajador. Si se rechaza, lo cierra el productor; si queda pendiente al parar, lo cierra stop; si está activo, lo cierra el trabajador. No hay un socket compartido de cliente entre workers.</a:t>
@@ -1597,7 +1806,7 @@
             <a:spLocks noGrp="1"/>
           </p:cNvSpPr>
           <p:nvPr>
-            <p:ph type="sldNum" idx="5" sz="quarter"/>
+            <p:ph type="sldNum" sz="quarter" idx="5"/>
           </p:nvPr>
         </p:nvSpPr>
         <p:spPr/>
@@ -1611,7 +1820,7 @@
 </file>
 
 <file path=ppt/notesSlides/notesSlide9.xml><?xml version="1.0" encoding="utf-8"?>
-<p:notes xmlns:a="http://schemas.openxmlformats.org/drawingml/2006/main" xmlns:p="http://schemas.openxmlformats.org/presentationml/2006/main" xmlns:r="http://schemas.openxmlformats.org/officeDocument/2006/relationships">
+<p:notes xmlns:a="http://schemas.openxmlformats.org/drawingml/2006/main" xmlns:r="http://schemas.openxmlformats.org/officeDocument/2006/relationships" xmlns:p="http://schemas.openxmlformats.org/presentationml/2006/main">
   <p:cSld>
     <p:spTree>
       <p:nvGrpSpPr>
@@ -1631,7 +1840,7 @@
         <p:nvSpPr>
           <p:cNvPr id="2" name="Slide Image Placeholder 1"/>
           <p:cNvSpPr>
-            <a:spLocks noGrp="1"/>
+            <a:spLocks noGrp="1" noRot="1" noChangeAspect="1"/>
           </p:cNvSpPr>
           <p:nvPr>
             <p:ph type="sldImg" idx="2"/>
@@ -1646,7 +1855,7 @@
             <a:spLocks noGrp="1"/>
           </p:cNvSpPr>
           <p:nvPr>
-            <p:ph type="body" idx="3" sz="quarter"/>
+            <p:ph type="body" sz="quarter" idx="3"/>
           </p:nvPr>
         </p:nvSpPr>
         <p:spPr/>
@@ -1658,7 +1867,9 @@
               <a:t>TIEMPO: 75 s. Tramo 07:15–08:30.</a:t>
             </a:r>
           </a:p>
-          <a:p/>
+          <a:p>
+            <a:endParaRPr/>
+          </a:p>
           <a:p>
             <a:r>
               <a:t>SIGINT/SIGTERM solo escriben un atomic&lt;bool&gt; lock-free, verificado por static_assert. El handler no usa mutex ni condición. El productor observa la bandera mediante poll con timeout de 100 ms. stop marca stopping bajo mutex, descarta pendientes y llama shutdown para los activos. notify_all despierta a los workers en wait. run hace join fuera del mutex y cierra la escucha.</a:t>
@@ -1678,7 +1889,7 @@
             <a:spLocks noGrp="1"/>
           </p:cNvSpPr>
           <p:nvPr>
-            <p:ph type="sldNum" idx="5" sz="quarter"/>
+            <p:ph type="sldNum" sz="quarter" idx="5"/>
           </p:nvPr>
         </p:nvSpPr>
         <p:spPr/>
@@ -1729,10 +1940,9 @@
           <a:lstStyle/>
           <a:p>
             <a:r>
-              <a:rPr lang="en-US" smtClean="0"/>
+              <a:rPr lang="en-US"/>
               <a:t>Click to edit Master title style</a:t>
             </a:r>
-            <a:endParaRPr lang="en-US"/>
           </a:p>
         </p:txBody>
       </p:sp>
@@ -1848,10 +2058,9 @@
           </a:lstStyle>
           <a:p>
             <a:r>
-              <a:rPr lang="en-US" smtClean="0"/>
+              <a:rPr lang="en-US"/>
               <a:t>Click to edit Master subtitle style</a:t>
             </a:r>
-            <a:endParaRPr lang="en-US"/>
           </a:p>
         </p:txBody>
       </p:sp>
@@ -1872,7 +2081,7 @@
           <a:p>
             <a:fld id="{5BCAD085-E8A6-8845-BD4E-CB4CCA059FC4}" type="datetimeFigureOut">
               <a:rPr lang="en-US" smtClean="0"/>
-              <a:t>1/27/13</a:t>
+              <a:t>10/22/26</a:t>
             </a:fld>
             <a:endParaRPr lang="en-US"/>
           </a:p>
@@ -1914,7 +2123,7 @@
           <a:p>
             <a:fld id="{C1FF6DA9-008F-8B48-92A6-B652298478BF}" type="slidenum">
               <a:rPr lang="en-US" smtClean="0"/>
-              <a:t>‹#›</a:t>
+              <a:t>‹Nº›</a:t>
             </a:fld>
             <a:endParaRPr lang="en-US"/>
           </a:p>
@@ -1966,10 +2175,9 @@
           <a:lstStyle/>
           <a:p>
             <a:r>
-              <a:rPr lang="en-US" smtClean="0"/>
+              <a:rPr lang="en-US"/>
               <a:t>Click to edit Master title style</a:t>
             </a:r>
-            <a:endParaRPr lang="en-US"/>
           </a:p>
         </p:txBody>
       </p:sp>
@@ -1990,38 +2198,37 @@
           <a:p>
             <a:pPr lvl="0"/>
             <a:r>
-              <a:rPr lang="en-US" smtClean="0"/>
+              <a:rPr lang="en-US"/>
               <a:t>Click to edit Master text styles</a:t>
             </a:r>
           </a:p>
           <a:p>
             <a:pPr lvl="1"/>
             <a:r>
-              <a:rPr lang="en-US" smtClean="0"/>
+              <a:rPr lang="en-US"/>
               <a:t>Second level</a:t>
             </a:r>
           </a:p>
           <a:p>
             <a:pPr lvl="2"/>
             <a:r>
-              <a:rPr lang="en-US" smtClean="0"/>
+              <a:rPr lang="en-US"/>
               <a:t>Third level</a:t>
             </a:r>
           </a:p>
           <a:p>
             <a:pPr lvl="3"/>
             <a:r>
-              <a:rPr lang="en-US" smtClean="0"/>
+              <a:rPr lang="en-US"/>
               <a:t>Fourth level</a:t>
             </a:r>
           </a:p>
           <a:p>
             <a:pPr lvl="4"/>
             <a:r>
-              <a:rPr lang="en-US" smtClean="0"/>
+              <a:rPr lang="en-US"/>
               <a:t>Fifth level</a:t>
             </a:r>
-            <a:endParaRPr lang="en-US"/>
           </a:p>
         </p:txBody>
       </p:sp>
@@ -2042,7 +2249,7 @@
           <a:p>
             <a:fld id="{5BCAD085-E8A6-8845-BD4E-CB4CCA059FC4}" type="datetimeFigureOut">
               <a:rPr lang="en-US" smtClean="0"/>
-              <a:t>1/27/13</a:t>
+              <a:t>10/22/26</a:t>
             </a:fld>
             <a:endParaRPr lang="en-US"/>
           </a:p>
@@ -2084,7 +2291,7 @@
           <a:p>
             <a:fld id="{C1FF6DA9-008F-8B48-92A6-B652298478BF}" type="slidenum">
               <a:rPr lang="en-US" smtClean="0"/>
-              <a:t>‹#›</a:t>
+              <a:t>‹Nº›</a:t>
             </a:fld>
             <a:endParaRPr lang="en-US"/>
           </a:p>
@@ -2141,10 +2348,9 @@
           <a:lstStyle/>
           <a:p>
             <a:r>
-              <a:rPr lang="en-US" smtClean="0"/>
+              <a:rPr lang="en-US"/>
               <a:t>Click to edit Master title style</a:t>
             </a:r>
-            <a:endParaRPr lang="en-US"/>
           </a:p>
         </p:txBody>
       </p:sp>
@@ -2170,38 +2376,37 @@
           <a:p>
             <a:pPr lvl="0"/>
             <a:r>
-              <a:rPr lang="en-US" smtClean="0"/>
+              <a:rPr lang="en-US"/>
               <a:t>Click to edit Master text styles</a:t>
             </a:r>
           </a:p>
           <a:p>
             <a:pPr lvl="1"/>
             <a:r>
-              <a:rPr lang="en-US" smtClean="0"/>
+              <a:rPr lang="en-US"/>
               <a:t>Second level</a:t>
             </a:r>
           </a:p>
           <a:p>
             <a:pPr lvl="2"/>
             <a:r>
-              <a:rPr lang="en-US" smtClean="0"/>
+              <a:rPr lang="en-US"/>
               <a:t>Third level</a:t>
             </a:r>
           </a:p>
           <a:p>
             <a:pPr lvl="3"/>
             <a:r>
-              <a:rPr lang="en-US" smtClean="0"/>
+              <a:rPr lang="en-US"/>
               <a:t>Fourth level</a:t>
             </a:r>
           </a:p>
           <a:p>
             <a:pPr lvl="4"/>
             <a:r>
-              <a:rPr lang="en-US" smtClean="0"/>
+              <a:rPr lang="en-US"/>
               <a:t>Fifth level</a:t>
             </a:r>
-            <a:endParaRPr lang="en-US"/>
           </a:p>
         </p:txBody>
       </p:sp>
@@ -2222,7 +2427,7 @@
           <a:p>
             <a:fld id="{5BCAD085-E8A6-8845-BD4E-CB4CCA059FC4}" type="datetimeFigureOut">
               <a:rPr lang="en-US" smtClean="0"/>
-              <a:t>1/27/13</a:t>
+              <a:t>10/22/26</a:t>
             </a:fld>
             <a:endParaRPr lang="en-US"/>
           </a:p>
@@ -2264,7 +2469,7 @@
           <a:p>
             <a:fld id="{C1FF6DA9-008F-8B48-92A6-B652298478BF}" type="slidenum">
               <a:rPr lang="en-US" smtClean="0"/>
-              <a:t>‹#›</a:t>
+              <a:t>‹Nº›</a:t>
             </a:fld>
             <a:endParaRPr lang="en-US"/>
           </a:p>
@@ -2316,10 +2521,9 @@
           <a:lstStyle/>
           <a:p>
             <a:r>
-              <a:rPr lang="en-US" smtClean="0"/>
+              <a:rPr lang="en-US"/>
               <a:t>Click to edit Master title style</a:t>
             </a:r>
-            <a:endParaRPr lang="en-US"/>
           </a:p>
         </p:txBody>
       </p:sp>
@@ -2340,38 +2544,37 @@
           <a:p>
             <a:pPr lvl="0"/>
             <a:r>
-              <a:rPr lang="en-US" smtClean="0"/>
+              <a:rPr lang="en-US"/>
               <a:t>Click to edit Master text styles</a:t>
             </a:r>
           </a:p>
           <a:p>
             <a:pPr lvl="1"/>
             <a:r>
-              <a:rPr lang="en-US" smtClean="0"/>
+              <a:rPr lang="en-US"/>
               <a:t>Second level</a:t>
             </a:r>
           </a:p>
           <a:p>
             <a:pPr lvl="2"/>
             <a:r>
-              <a:rPr lang="en-US" smtClean="0"/>
+              <a:rPr lang="en-US"/>
               <a:t>Third level</a:t>
             </a:r>
           </a:p>
           <a:p>
             <a:pPr lvl="3"/>
             <a:r>
-              <a:rPr lang="en-US" smtClean="0"/>
+              <a:rPr lang="en-US"/>
               <a:t>Fourth level</a:t>
             </a:r>
           </a:p>
           <a:p>
             <a:pPr lvl="4"/>
             <a:r>
-              <a:rPr lang="en-US" smtClean="0"/>
+              <a:rPr lang="en-US"/>
               <a:t>Fifth level</a:t>
             </a:r>
-            <a:endParaRPr lang="en-US"/>
           </a:p>
         </p:txBody>
       </p:sp>
@@ -2392,7 +2595,7 @@
           <a:p>
             <a:fld id="{5BCAD085-E8A6-8845-BD4E-CB4CCA059FC4}" type="datetimeFigureOut">
               <a:rPr lang="en-US" smtClean="0"/>
-              <a:t>1/27/13</a:t>
+              <a:t>10/22/26</a:t>
             </a:fld>
             <a:endParaRPr lang="en-US"/>
           </a:p>
@@ -2434,7 +2637,7 @@
           <a:p>
             <a:fld id="{C1FF6DA9-008F-8B48-92A6-B652298478BF}" type="slidenum">
               <a:rPr lang="en-US" smtClean="0"/>
-              <a:t>‹#›</a:t>
+              <a:t>‹Nº›</a:t>
             </a:fld>
             <a:endParaRPr lang="en-US"/>
           </a:p>
@@ -2495,10 +2698,9 @@
           </a:lstStyle>
           <a:p>
             <a:r>
-              <a:rPr lang="en-US" smtClean="0"/>
+              <a:rPr lang="en-US"/>
               <a:t>Click to edit Master title style</a:t>
             </a:r>
-            <a:endParaRPr lang="en-US"/>
           </a:p>
         </p:txBody>
       </p:sp>
@@ -2615,7 +2817,7 @@
           <a:p>
             <a:pPr lvl="0"/>
             <a:r>
-              <a:rPr lang="en-US" smtClean="0"/>
+              <a:rPr lang="en-US"/>
               <a:t>Click to edit Master text styles</a:t>
             </a:r>
           </a:p>
@@ -2638,7 +2840,7 @@
           <a:p>
             <a:fld id="{5BCAD085-E8A6-8845-BD4E-CB4CCA059FC4}" type="datetimeFigureOut">
               <a:rPr lang="en-US" smtClean="0"/>
-              <a:t>1/27/13</a:t>
+              <a:t>10/22/26</a:t>
             </a:fld>
             <a:endParaRPr lang="en-US"/>
           </a:p>
@@ -2680,7 +2882,7 @@
           <a:p>
             <a:fld id="{C1FF6DA9-008F-8B48-92A6-B652298478BF}" type="slidenum">
               <a:rPr lang="en-US" smtClean="0"/>
-              <a:t>‹#›</a:t>
+              <a:t>‹Nº›</a:t>
             </a:fld>
             <a:endParaRPr lang="en-US"/>
           </a:p>
@@ -2732,10 +2934,9 @@
           <a:lstStyle/>
           <a:p>
             <a:r>
-              <a:rPr lang="en-US" smtClean="0"/>
+              <a:rPr lang="en-US"/>
               <a:t>Click to edit Master title style</a:t>
             </a:r>
-            <a:endParaRPr lang="en-US"/>
           </a:p>
         </p:txBody>
       </p:sp>
@@ -2789,38 +2990,37 @@
           <a:p>
             <a:pPr lvl="0"/>
             <a:r>
-              <a:rPr lang="en-US" smtClean="0"/>
+              <a:rPr lang="en-US"/>
               <a:t>Click to edit Master text styles</a:t>
             </a:r>
           </a:p>
           <a:p>
             <a:pPr lvl="1"/>
             <a:r>
-              <a:rPr lang="en-US" smtClean="0"/>
+              <a:rPr lang="en-US"/>
               <a:t>Second level</a:t>
             </a:r>
           </a:p>
           <a:p>
             <a:pPr lvl="2"/>
             <a:r>
-              <a:rPr lang="en-US" smtClean="0"/>
+              <a:rPr lang="en-US"/>
               <a:t>Third level</a:t>
             </a:r>
           </a:p>
           <a:p>
             <a:pPr lvl="3"/>
             <a:r>
-              <a:rPr lang="en-US" smtClean="0"/>
+              <a:rPr lang="en-US"/>
               <a:t>Fourth level</a:t>
             </a:r>
           </a:p>
           <a:p>
             <a:pPr lvl="4"/>
             <a:r>
-              <a:rPr lang="en-US" smtClean="0"/>
+              <a:rPr lang="en-US"/>
               <a:t>Fifth level</a:t>
             </a:r>
-            <a:endParaRPr lang="en-US"/>
           </a:p>
         </p:txBody>
       </p:sp>
@@ -2874,38 +3074,37 @@
           <a:p>
             <a:pPr lvl="0"/>
             <a:r>
-              <a:rPr lang="en-US" smtClean="0"/>
+              <a:rPr lang="en-US"/>
               <a:t>Click to edit Master text styles</a:t>
             </a:r>
           </a:p>
           <a:p>
             <a:pPr lvl="1"/>
             <a:r>
-              <a:rPr lang="en-US" smtClean="0"/>
+              <a:rPr lang="en-US"/>
               <a:t>Second level</a:t>
             </a:r>
           </a:p>
           <a:p>
             <a:pPr lvl="2"/>
             <a:r>
-              <a:rPr lang="en-US" smtClean="0"/>
+              <a:rPr lang="en-US"/>
               <a:t>Third level</a:t>
             </a:r>
           </a:p>
           <a:p>
             <a:pPr lvl="3"/>
             <a:r>
-              <a:rPr lang="en-US" smtClean="0"/>
+              <a:rPr lang="en-US"/>
               <a:t>Fourth level</a:t>
             </a:r>
           </a:p>
           <a:p>
             <a:pPr lvl="4"/>
             <a:r>
-              <a:rPr lang="en-US" smtClean="0"/>
+              <a:rPr lang="en-US"/>
               <a:t>Fifth level</a:t>
             </a:r>
-            <a:endParaRPr lang="en-US"/>
           </a:p>
         </p:txBody>
       </p:sp>
@@ -2926,7 +3125,7 @@
           <a:p>
             <a:fld id="{5BCAD085-E8A6-8845-BD4E-CB4CCA059FC4}" type="datetimeFigureOut">
               <a:rPr lang="en-US" smtClean="0"/>
-              <a:t>1/27/13</a:t>
+              <a:t>10/22/26</a:t>
             </a:fld>
             <a:endParaRPr lang="en-US"/>
           </a:p>
@@ -2968,7 +3167,7 @@
           <a:p>
             <a:fld id="{C1FF6DA9-008F-8B48-92A6-B652298478BF}" type="slidenum">
               <a:rPr lang="en-US" smtClean="0"/>
-              <a:t>‹#›</a:t>
+              <a:t>‹Nº›</a:t>
             </a:fld>
             <a:endParaRPr lang="en-US"/>
           </a:p>
@@ -3024,10 +3223,9 @@
           </a:lstStyle>
           <a:p>
             <a:r>
-              <a:rPr lang="en-US" smtClean="0"/>
+              <a:rPr lang="en-US"/>
               <a:t>Click to edit Master title style</a:t>
             </a:r>
-            <a:endParaRPr lang="en-US"/>
           </a:p>
         </p:txBody>
       </p:sp>
@@ -3090,7 +3288,7 @@
           <a:p>
             <a:pPr lvl="0"/>
             <a:r>
-              <a:rPr lang="en-US" smtClean="0"/>
+              <a:rPr lang="en-US"/>
               <a:t>Click to edit Master text styles</a:t>
             </a:r>
           </a:p>
@@ -3146,38 +3344,37 @@
           <a:p>
             <a:pPr lvl="0"/>
             <a:r>
-              <a:rPr lang="en-US" smtClean="0"/>
+              <a:rPr lang="en-US"/>
               <a:t>Click to edit Master text styles</a:t>
             </a:r>
           </a:p>
           <a:p>
             <a:pPr lvl="1"/>
             <a:r>
-              <a:rPr lang="en-US" smtClean="0"/>
+              <a:rPr lang="en-US"/>
               <a:t>Second level</a:t>
             </a:r>
           </a:p>
           <a:p>
             <a:pPr lvl="2"/>
             <a:r>
-              <a:rPr lang="en-US" smtClean="0"/>
+              <a:rPr lang="en-US"/>
               <a:t>Third level</a:t>
             </a:r>
           </a:p>
           <a:p>
             <a:pPr lvl="3"/>
             <a:r>
-              <a:rPr lang="en-US" smtClean="0"/>
+              <a:rPr lang="en-US"/>
               <a:t>Fourth level</a:t>
             </a:r>
           </a:p>
           <a:p>
             <a:pPr lvl="4"/>
             <a:r>
-              <a:rPr lang="en-US" smtClean="0"/>
+              <a:rPr lang="en-US"/>
               <a:t>Fifth level</a:t>
             </a:r>
-            <a:endParaRPr lang="en-US"/>
           </a:p>
         </p:txBody>
       </p:sp>
@@ -3240,7 +3437,7 @@
           <a:p>
             <a:pPr lvl="0"/>
             <a:r>
-              <a:rPr lang="en-US" smtClean="0"/>
+              <a:rPr lang="en-US"/>
               <a:t>Click to edit Master text styles</a:t>
             </a:r>
           </a:p>
@@ -3296,38 +3493,37 @@
           <a:p>
             <a:pPr lvl="0"/>
             <a:r>
-              <a:rPr lang="en-US" smtClean="0"/>
+              <a:rPr lang="en-US"/>
               <a:t>Click to edit Master text styles</a:t>
             </a:r>
           </a:p>
           <a:p>
             <a:pPr lvl="1"/>
             <a:r>
-              <a:rPr lang="en-US" smtClean="0"/>
+              <a:rPr lang="en-US"/>
               <a:t>Second level</a:t>
             </a:r>
           </a:p>
           <a:p>
             <a:pPr lvl="2"/>
             <a:r>
-              <a:rPr lang="en-US" smtClean="0"/>
+              <a:rPr lang="en-US"/>
               <a:t>Third level</a:t>
             </a:r>
           </a:p>
           <a:p>
             <a:pPr lvl="3"/>
             <a:r>
-              <a:rPr lang="en-US" smtClean="0"/>
+              <a:rPr lang="en-US"/>
               <a:t>Fourth level</a:t>
             </a:r>
           </a:p>
           <a:p>
             <a:pPr lvl="4"/>
             <a:r>
-              <a:rPr lang="en-US" smtClean="0"/>
+              <a:rPr lang="en-US"/>
               <a:t>Fifth level</a:t>
             </a:r>
-            <a:endParaRPr lang="en-US"/>
           </a:p>
         </p:txBody>
       </p:sp>
@@ -3348,7 +3544,7 @@
           <a:p>
             <a:fld id="{5BCAD085-E8A6-8845-BD4E-CB4CCA059FC4}" type="datetimeFigureOut">
               <a:rPr lang="en-US" smtClean="0"/>
-              <a:t>1/27/13</a:t>
+              <a:t>10/22/26</a:t>
             </a:fld>
             <a:endParaRPr lang="en-US"/>
           </a:p>
@@ -3390,7 +3586,7 @@
           <a:p>
             <a:fld id="{C1FF6DA9-008F-8B48-92A6-B652298478BF}" type="slidenum">
               <a:rPr lang="en-US" smtClean="0"/>
-              <a:t>‹#›</a:t>
+              <a:t>‹Nº›</a:t>
             </a:fld>
             <a:endParaRPr lang="en-US"/>
           </a:p>
@@ -3442,10 +3638,9 @@
           <a:lstStyle/>
           <a:p>
             <a:r>
-              <a:rPr lang="en-US" smtClean="0"/>
+              <a:rPr lang="en-US"/>
               <a:t>Click to edit Master title style</a:t>
             </a:r>
-            <a:endParaRPr lang="en-US"/>
           </a:p>
         </p:txBody>
       </p:sp>
@@ -3466,7 +3661,7 @@
           <a:p>
             <a:fld id="{5BCAD085-E8A6-8845-BD4E-CB4CCA059FC4}" type="datetimeFigureOut">
               <a:rPr lang="en-US" smtClean="0"/>
-              <a:t>1/27/13</a:t>
+              <a:t>10/22/26</a:t>
             </a:fld>
             <a:endParaRPr lang="en-US"/>
           </a:p>
@@ -3508,7 +3703,7 @@
           <a:p>
             <a:fld id="{C1FF6DA9-008F-8B48-92A6-B652298478BF}" type="slidenum">
               <a:rPr lang="en-US" smtClean="0"/>
-              <a:t>‹#›</a:t>
+              <a:t>‹Nº›</a:t>
             </a:fld>
             <a:endParaRPr lang="en-US"/>
           </a:p>
@@ -3561,7 +3756,7 @@
           <a:p>
             <a:fld id="{5BCAD085-E8A6-8845-BD4E-CB4CCA059FC4}" type="datetimeFigureOut">
               <a:rPr lang="en-US" smtClean="0"/>
-              <a:t>1/27/13</a:t>
+              <a:t>10/22/26</a:t>
             </a:fld>
             <a:endParaRPr lang="en-US"/>
           </a:p>
@@ -3603,7 +3798,7 @@
           <a:p>
             <a:fld id="{C1FF6DA9-008F-8B48-92A6-B652298478BF}" type="slidenum">
               <a:rPr lang="en-US" smtClean="0"/>
-              <a:t>‹#›</a:t>
+              <a:t>‹Nº›</a:t>
             </a:fld>
             <a:endParaRPr lang="en-US"/>
           </a:p>
@@ -3664,10 +3859,9 @@
           </a:lstStyle>
           <a:p>
             <a:r>
-              <a:rPr lang="en-US" smtClean="0"/>
+              <a:rPr lang="en-US"/>
               <a:t>Click to edit Master title style</a:t>
             </a:r>
-            <a:endParaRPr lang="en-US"/>
           </a:p>
         </p:txBody>
       </p:sp>
@@ -3721,38 +3915,37 @@
           <a:p>
             <a:pPr lvl="0"/>
             <a:r>
-              <a:rPr lang="en-US" smtClean="0"/>
+              <a:rPr lang="en-US"/>
               <a:t>Click to edit Master text styles</a:t>
             </a:r>
           </a:p>
           <a:p>
             <a:pPr lvl="1"/>
             <a:r>
-              <a:rPr lang="en-US" smtClean="0"/>
+              <a:rPr lang="en-US"/>
               <a:t>Second level</a:t>
             </a:r>
           </a:p>
           <a:p>
             <a:pPr lvl="2"/>
             <a:r>
-              <a:rPr lang="en-US" smtClean="0"/>
+              <a:rPr lang="en-US"/>
               <a:t>Third level</a:t>
             </a:r>
           </a:p>
           <a:p>
             <a:pPr lvl="3"/>
             <a:r>
-              <a:rPr lang="en-US" smtClean="0"/>
+              <a:rPr lang="en-US"/>
               <a:t>Fourth level</a:t>
             </a:r>
           </a:p>
           <a:p>
             <a:pPr lvl="4"/>
             <a:r>
-              <a:rPr lang="en-US" smtClean="0"/>
+              <a:rPr lang="en-US"/>
               <a:t>Fifth level</a:t>
             </a:r>
-            <a:endParaRPr lang="en-US"/>
           </a:p>
         </p:txBody>
       </p:sp>
@@ -3815,7 +4008,7 @@
           <a:p>
             <a:pPr lvl="0"/>
             <a:r>
-              <a:rPr lang="en-US" smtClean="0"/>
+              <a:rPr lang="en-US"/>
               <a:t>Click to edit Master text styles</a:t>
             </a:r>
           </a:p>
@@ -3838,7 +4031,7 @@
           <a:p>
             <a:fld id="{5BCAD085-E8A6-8845-BD4E-CB4CCA059FC4}" type="datetimeFigureOut">
               <a:rPr lang="en-US" smtClean="0"/>
-              <a:t>1/27/13</a:t>
+              <a:t>10/22/26</a:t>
             </a:fld>
             <a:endParaRPr lang="en-US"/>
           </a:p>
@@ -3880,7 +4073,7 @@
           <a:p>
             <a:fld id="{C1FF6DA9-008F-8B48-92A6-B652298478BF}" type="slidenum">
               <a:rPr lang="en-US" smtClean="0"/>
-              <a:t>‹#›</a:t>
+              <a:t>‹Nº›</a:t>
             </a:fld>
             <a:endParaRPr lang="en-US"/>
           </a:p>
@@ -3941,10 +4134,9 @@
           </a:lstStyle>
           <a:p>
             <a:r>
-              <a:rPr lang="en-US" smtClean="0"/>
+              <a:rPr lang="en-US"/>
               <a:t>Click to edit Master title style</a:t>
             </a:r>
-            <a:endParaRPr lang="en-US"/>
           </a:p>
         </p:txBody>
       </p:sp>
@@ -4068,7 +4260,7 @@
           <a:p>
             <a:pPr lvl="0"/>
             <a:r>
-              <a:rPr lang="en-US" smtClean="0"/>
+              <a:rPr lang="en-US"/>
               <a:t>Click to edit Master text styles</a:t>
             </a:r>
           </a:p>
@@ -4091,7 +4283,7 @@
           <a:p>
             <a:fld id="{5BCAD085-E8A6-8845-BD4E-CB4CCA059FC4}" type="datetimeFigureOut">
               <a:rPr lang="en-US" smtClean="0"/>
-              <a:t>1/27/13</a:t>
+              <a:t>10/22/26</a:t>
             </a:fld>
             <a:endParaRPr lang="en-US"/>
           </a:p>
@@ -4133,7 +4325,7 @@
           <a:p>
             <a:fld id="{C1FF6DA9-008F-8B48-92A6-B652298478BF}" type="slidenum">
               <a:rPr lang="en-US" smtClean="0"/>
-              <a:t>‹#›</a:t>
+              <a:t>‹Nº›</a:t>
             </a:fld>
             <a:endParaRPr lang="en-US"/>
           </a:p>
@@ -4200,10 +4392,9 @@
           <a:lstStyle/>
           <a:p>
             <a:r>
-              <a:rPr lang="en-US" smtClean="0"/>
+              <a:rPr lang="en-US"/>
               <a:t>Click to edit Master title style</a:t>
             </a:r>
-            <a:endParaRPr lang="en-US"/>
           </a:p>
         </p:txBody>
       </p:sp>
@@ -4234,38 +4425,37 @@
           <a:p>
             <a:pPr lvl="0"/>
             <a:r>
-              <a:rPr lang="en-US" smtClean="0"/>
+              <a:rPr lang="en-US"/>
               <a:t>Click to edit Master text styles</a:t>
             </a:r>
           </a:p>
           <a:p>
             <a:pPr lvl="1"/>
             <a:r>
-              <a:rPr lang="en-US" smtClean="0"/>
+              <a:rPr lang="en-US"/>
               <a:t>Second level</a:t>
             </a:r>
           </a:p>
           <a:p>
             <a:pPr lvl="2"/>
             <a:r>
-              <a:rPr lang="en-US" smtClean="0"/>
+              <a:rPr lang="en-US"/>
               <a:t>Third level</a:t>
             </a:r>
           </a:p>
           <a:p>
             <a:pPr lvl="3"/>
             <a:r>
-              <a:rPr lang="en-US" smtClean="0"/>
+              <a:rPr lang="en-US"/>
               <a:t>Fourth level</a:t>
             </a:r>
           </a:p>
           <a:p>
             <a:pPr lvl="4"/>
             <a:r>
-              <a:rPr lang="en-US" smtClean="0"/>
+              <a:rPr lang="en-US"/>
               <a:t>Fifth level</a:t>
             </a:r>
-            <a:endParaRPr lang="en-US"/>
           </a:p>
         </p:txBody>
       </p:sp>
@@ -4304,7 +4494,7 @@
           <a:p>
             <a:fld id="{5BCAD085-E8A6-8845-BD4E-CB4CCA059FC4}" type="datetimeFigureOut">
               <a:rPr lang="en-US" smtClean="0"/>
-              <a:t>1/27/13</a:t>
+              <a:t>10/22/26</a:t>
             </a:fld>
             <a:endParaRPr lang="en-US"/>
           </a:p>
@@ -4382,7 +4572,7 @@
           <a:p>
             <a:fld id="{C1FF6DA9-008F-8B48-92A6-B652298478BF}" type="slidenum">
               <a:rPr lang="en-US" smtClean="0"/>
-              <a:t>‹#›</a:t>
+              <a:t>‹Nº›</a:t>
             </a:fld>
             <a:endParaRPr lang="en-US"/>
           </a:p>
@@ -4663,7 +4853,7 @@
 </file>
 
 <file path=ppt/slides/slide1.xml><?xml version="1.0" encoding="utf-8"?>
-<p:sld xmlns:a="http://schemas.openxmlformats.org/drawingml/2006/main" xmlns:p="http://schemas.openxmlformats.org/presentationml/2006/main" xmlns:r="http://schemas.openxmlformats.org/officeDocument/2006/relationships">
+<p:sld xmlns:a="http://schemas.openxmlformats.org/drawingml/2006/main" xmlns:r="http://schemas.openxmlformats.org/officeDocument/2006/relationships" xmlns:p="http://schemas.openxmlformats.org/presentationml/2006/main">
   <p:cSld>
     <p:bg>
       <p:bgPr>
@@ -4679,7 +4869,14 @@
         <p:cNvGrpSpPr/>
         <p:nvPr/>
       </p:nvGrpSpPr>
-      <p:grpSpPr/>
+      <p:grpSpPr>
+        <a:xfrm>
+          <a:off x="0" y="0"/>
+          <a:ext cx="0" cy="0"/>
+          <a:chOff x="0" y="0"/>
+          <a:chExt cx="0" cy="0"/>
+        </a:xfrm>
+      </p:grpSpPr>
       <p:sp>
         <p:nvSpPr>
           <p:cNvPr id="2" name="Rectangle 1"/>
@@ -4720,6 +4917,7 @@
           <a:lstStyle/>
           <a:p>
             <a:pPr algn="ctr"/>
+            <a:endParaRPr/>
           </a:p>
         </p:txBody>
       </p:sp>
@@ -4740,7 +4938,7 @@
           <a:noFill/>
         </p:spPr>
         <p:txBody>
-          <a:bodyPr wrap="square" lIns="0" rIns="0" tIns="0" bIns="0">
+          <a:bodyPr wrap="square" lIns="0" tIns="0" rIns="0" bIns="0">
             <a:spAutoFit/>
           </a:bodyPr>
           <a:lstStyle/>
@@ -4773,7 +4971,7 @@
         </p:nvSpPr>
         <p:spPr>
           <a:xfrm>
-            <a:off x="594360" y="868680"/>
+            <a:off x="731520" y="1988820"/>
             <a:ext cx="10972800" cy="868680"/>
           </a:xfrm>
           <a:prstGeom prst="rect">
@@ -4782,7 +4980,7 @@
           <a:noFill/>
         </p:spPr>
         <p:txBody>
-          <a:bodyPr wrap="square" lIns="0" rIns="0" tIns="0" bIns="0">
+          <a:bodyPr wrap="square" lIns="0" tIns="0" rIns="0" bIns="0">
             <a:spAutoFit/>
           </a:bodyPr>
           <a:lstStyle/>
@@ -4802,7 +5000,28 @@
               </a:defRPr>
             </a:pPr>
             <a:r>
-              <a:t>Servidor concurrente en C++</a:t>
+              <a:rPr dirty="0" err="1"/>
+              <a:t>Servidor</a:t>
+            </a:r>
+            <a:r>
+              <a:rPr dirty="0"/>
+              <a:t> </a:t>
+            </a:r>
+            <a:r>
+              <a:rPr dirty="0" err="1"/>
+              <a:t>concurrente</a:t>
+            </a:r>
+            <a:r>
+              <a:rPr dirty="0"/>
+              <a:t> </a:t>
+            </a:r>
+            <a:r>
+              <a:rPr dirty="0" err="1"/>
+              <a:t>en</a:t>
+            </a:r>
+            <a:r>
+              <a:rPr dirty="0"/>
+              <a:t> C++</a:t>
             </a:r>
           </a:p>
         </p:txBody>
@@ -4847,6 +5066,7 @@
           <a:lstStyle/>
           <a:p>
             <a:pPr algn="ctr"/>
+            <a:endParaRPr/>
           </a:p>
         </p:txBody>
       </p:sp>
@@ -4867,7 +5087,7 @@
           <a:noFill/>
         </p:spPr>
         <p:txBody>
-          <a:bodyPr wrap="square" lIns="0" rIns="0" tIns="0" bIns="0">
+          <a:bodyPr wrap="square" lIns="0" tIns="0" rIns="0" bIns="0">
             <a:spAutoFit/>
           </a:bodyPr>
           <a:lstStyle/>
@@ -4909,7 +5129,7 @@
           <a:noFill/>
         </p:spPr>
         <p:txBody>
-          <a:bodyPr wrap="square" lIns="0" rIns="0" tIns="0" bIns="0">
+          <a:bodyPr wrap="square" lIns="0" tIns="0" rIns="0" bIns="0">
             <a:spAutoFit/>
           </a:bodyPr>
           <a:lstStyle/>
@@ -4936,14 +5156,14 @@
       </p:sp>
       <p:sp>
         <p:nvSpPr>
-          <p:cNvPr id="8" name="TextBox 7"/>
+          <p:cNvPr id="9" name="TextBox 8"/>
           <p:cNvSpPr txBox="1"/>
           <p:nvPr/>
         </p:nvSpPr>
         <p:spPr>
           <a:xfrm>
-            <a:off x="685800" y="2057400"/>
-            <a:ext cx="10789920" cy="1417320"/>
+            <a:off x="731520" y="4069080"/>
+            <a:ext cx="10607040" cy="731520"/>
           </a:xfrm>
           <a:prstGeom prst="rect">
             <a:avLst/>
@@ -4951,7 +5171,7 @@
           <a:noFill/>
         </p:spPr>
         <p:txBody>
-          <a:bodyPr wrap="square" lIns="0" rIns="0" tIns="0" bIns="0">
+          <a:bodyPr wrap="square" lIns="0" tIns="0" rIns="0" bIns="0">
             <a:spAutoFit/>
           </a:bodyPr>
           <a:lstStyle/>
@@ -4963,67 +5183,6 @@
               <a:spcAft>
                 <a:spcPts val="800"/>
               </a:spcAft>
-              <a:defRPr sz="4200" b="1">
-                <a:solidFill>
-                  <a:srgbClr val="20282B"/>
-                </a:solidFill>
-                <a:latin typeface="Arial"/>
-              </a:defRPr>
-            </a:pPr>
-            <a:r>
-              <a:t>Acotar recursos.</a:t>
-            </a:r>
-          </a:p>
-          <a:p>
-            <a:pPr>
-              <a:lnSpc>
-                <a:spcPct val="108000"/>
-              </a:lnSpc>
-              <a:spcAft>
-                <a:spcPts val="800"/>
-              </a:spcAft>
-              <a:defRPr sz="4200" b="1">
-                <a:solidFill>
-                  <a:srgbClr val="20282B"/>
-                </a:solidFill>
-                <a:latin typeface="Arial"/>
-              </a:defRPr>
-            </a:pPr>
-            <a:r>
-              <a:t>Hacer explícita la vida útil.</a:t>
-            </a:r>
-          </a:p>
-        </p:txBody>
-      </p:sp>
-      <p:sp>
-        <p:nvSpPr>
-          <p:cNvPr id="9" name="TextBox 8"/>
-          <p:cNvSpPr txBox="1"/>
-          <p:nvPr/>
-        </p:nvSpPr>
-        <p:spPr>
-          <a:xfrm>
-            <a:off x="731520" y="4069080"/>
-            <a:ext cx="10607040" cy="731520"/>
-          </a:xfrm>
-          <a:prstGeom prst="rect">
-            <a:avLst/>
-          </a:prstGeom>
-          <a:noFill/>
-        </p:spPr>
-        <p:txBody>
-          <a:bodyPr wrap="square" lIns="0" rIns="0" tIns="0" bIns="0">
-            <a:spAutoFit/>
-          </a:bodyPr>
-          <a:lstStyle/>
-          <a:p>
-            <a:pPr>
-              <a:lnSpc>
-                <a:spcPct val="108000"/>
-              </a:lnSpc>
-              <a:spcAft>
-                <a:spcPts val="800"/>
-              </a:spcAft>
               <a:defRPr sz="2400" b="0">
                 <a:solidFill>
                   <a:srgbClr val="536267"/>
@@ -5032,7 +5191,48 @@
               </a:defRPr>
             </a:pPr>
             <a:r>
-              <a:t>Un proyecto personal para razonar sobre decisiones de ingeniería.</a:t>
+              <a:rPr dirty="0"/>
+              <a:t>Un </a:t>
+            </a:r>
+            <a:r>
+              <a:rPr dirty="0" err="1"/>
+              <a:t>proyecto</a:t>
+            </a:r>
+            <a:r>
+              <a:rPr dirty="0"/>
+              <a:t> personal para </a:t>
+            </a:r>
+            <a:r>
+              <a:rPr dirty="0" err="1"/>
+              <a:t>razonar</a:t>
+            </a:r>
+            <a:r>
+              <a:rPr dirty="0"/>
+              <a:t> </a:t>
+            </a:r>
+            <a:r>
+              <a:rPr dirty="0" err="1"/>
+              <a:t>sobre</a:t>
+            </a:r>
+            <a:r>
+              <a:rPr dirty="0"/>
+              <a:t> </a:t>
+            </a:r>
+            <a:r>
+              <a:rPr dirty="0" err="1"/>
+              <a:t>decisiones</a:t>
+            </a:r>
+            <a:r>
+              <a:rPr dirty="0"/>
+              <a:t> de </a:t>
+            </a:r>
+            <a:r>
+              <a:rPr dirty="0" err="1"/>
+              <a:t>ingeniería</a:t>
+            </a:r>
+            <a:r>
+              <a:rPr dirty="0"/>
+              <a:t>.</a:t>
             </a:r>
           </a:p>
         </p:txBody>
@@ -5054,7 +5254,7 @@
           <a:noFill/>
         </p:spPr>
         <p:txBody>
-          <a:bodyPr wrap="square" lIns="0" rIns="0" tIns="0" bIns="0">
+          <a:bodyPr wrap="square" lIns="0" tIns="0" rIns="0" bIns="0">
             <a:spAutoFit/>
           </a:bodyPr>
           <a:lstStyle/>
@@ -5088,7 +5288,7 @@
 </file>
 
 <file path=ppt/slides/slide10.xml><?xml version="1.0" encoding="utf-8"?>
-<p:sld xmlns:a="http://schemas.openxmlformats.org/drawingml/2006/main" xmlns:p="http://schemas.openxmlformats.org/presentationml/2006/main" xmlns:r="http://schemas.openxmlformats.org/officeDocument/2006/relationships">
+<p:sld xmlns:a="http://schemas.openxmlformats.org/drawingml/2006/main" xmlns:r="http://schemas.openxmlformats.org/officeDocument/2006/relationships" xmlns:p="http://schemas.openxmlformats.org/presentationml/2006/main">
   <p:cSld>
     <p:bg>
       <p:bgPr>
@@ -5104,7 +5304,14 @@
         <p:cNvGrpSpPr/>
         <p:nvPr/>
       </p:nvGrpSpPr>
-      <p:grpSpPr/>
+      <p:grpSpPr>
+        <a:xfrm>
+          <a:off x="0" y="0"/>
+          <a:ext cx="0" cy="0"/>
+          <a:chOff x="0" y="0"/>
+          <a:chExt cx="0" cy="0"/>
+        </a:xfrm>
+      </p:grpSpPr>
       <p:sp>
         <p:nvSpPr>
           <p:cNvPr id="2" name="Rectangle 1"/>
@@ -5145,6 +5352,7 @@
           <a:lstStyle/>
           <a:p>
             <a:pPr algn="ctr"/>
+            <a:endParaRPr/>
           </a:p>
         </p:txBody>
       </p:sp>
@@ -5165,7 +5373,7 @@
           <a:noFill/>
         </p:spPr>
         <p:txBody>
-          <a:bodyPr wrap="square" lIns="0" rIns="0" tIns="0" bIns="0">
+          <a:bodyPr wrap="square" lIns="0" tIns="0" rIns="0" bIns="0">
             <a:spAutoFit/>
           </a:bodyPr>
           <a:lstStyle/>
@@ -5207,7 +5415,7 @@
           <a:noFill/>
         </p:spPr>
         <p:txBody>
-          <a:bodyPr wrap="square" lIns="0" rIns="0" tIns="0" bIns="0">
+          <a:bodyPr wrap="square" lIns="0" tIns="0" rIns="0" bIns="0">
             <a:spAutoFit/>
           </a:bodyPr>
           <a:lstStyle/>
@@ -5272,6 +5480,7 @@
           <a:lstStyle/>
           <a:p>
             <a:pPr algn="ctr"/>
+            <a:endParaRPr/>
           </a:p>
         </p:txBody>
       </p:sp>
@@ -5292,7 +5501,7 @@
           <a:noFill/>
         </p:spPr>
         <p:txBody>
-          <a:bodyPr wrap="square" lIns="0" rIns="0" tIns="0" bIns="0">
+          <a:bodyPr wrap="square" lIns="0" tIns="0" rIns="0" bIns="0">
             <a:spAutoFit/>
           </a:bodyPr>
           <a:lstStyle/>
@@ -5334,7 +5543,7 @@
           <a:noFill/>
         </p:spPr>
         <p:txBody>
-          <a:bodyPr wrap="square" lIns="0" rIns="0" tIns="0" bIns="0">
+          <a:bodyPr wrap="square" lIns="0" tIns="0" rIns="0" bIns="0">
             <a:spAutoFit/>
           </a:bodyPr>
           <a:lstStyle/>
@@ -5399,6 +5608,7 @@
           <a:lstStyle/>
           <a:p>
             <a:pPr algn="ctr"/>
+            <a:endParaRPr/>
           </a:p>
         </p:txBody>
       </p:sp>
@@ -5419,7 +5629,7 @@
           <a:noFill/>
         </p:spPr>
         <p:txBody>
-          <a:bodyPr wrap="square" lIns="0" rIns="0" tIns="0" bIns="0">
+          <a:bodyPr wrap="square" lIns="0" tIns="0" rIns="0" bIns="0">
             <a:spAutoFit/>
           </a:bodyPr>
           <a:lstStyle/>
@@ -5461,7 +5671,7 @@
           <a:noFill/>
         </p:spPr>
         <p:txBody>
-          <a:bodyPr wrap="square" lIns="0" rIns="0" tIns="0" bIns="0">
+          <a:bodyPr wrap="square" lIns="0" tIns="0" rIns="0" bIns="0">
             <a:spAutoFit/>
           </a:bodyPr>
           <a:lstStyle/>
@@ -5503,7 +5713,7 @@
           <a:noFill/>
         </p:spPr>
         <p:txBody>
-          <a:bodyPr wrap="square" lIns="0" rIns="0" tIns="0" bIns="0">
+          <a:bodyPr wrap="square" lIns="0" tIns="0" rIns="0" bIns="0">
             <a:spAutoFit/>
           </a:bodyPr>
           <a:lstStyle/>
@@ -5564,7 +5774,7 @@
           <a:noFill/>
         </p:spPr>
         <p:txBody>
-          <a:bodyPr wrap="square" lIns="0" rIns="0" tIns="0" bIns="0">
+          <a:bodyPr wrap="square" lIns="0" tIns="0" rIns="0" bIns="0">
             <a:spAutoFit/>
           </a:bodyPr>
           <a:lstStyle/>
@@ -5606,7 +5816,7 @@
           <a:noFill/>
         </p:spPr>
         <p:txBody>
-          <a:bodyPr wrap="square" lIns="0" rIns="0" tIns="0" bIns="0">
+          <a:bodyPr wrap="square" lIns="0" tIns="0" rIns="0" bIns="0">
             <a:spAutoFit/>
           </a:bodyPr>
           <a:lstStyle/>
@@ -5667,7 +5877,7 @@
           <a:noFill/>
         </p:spPr>
         <p:txBody>
-          <a:bodyPr wrap="square" lIns="0" rIns="0" tIns="0" bIns="0">
+          <a:bodyPr wrap="square" lIns="0" tIns="0" rIns="0" bIns="0">
             <a:spAutoFit/>
           </a:bodyPr>
           <a:lstStyle/>
@@ -5709,7 +5919,7 @@
           <a:noFill/>
         </p:spPr>
         <p:txBody>
-          <a:bodyPr wrap="square" lIns="0" rIns="0" tIns="0" bIns="0">
+          <a:bodyPr wrap="square" lIns="0" tIns="0" rIns="0" bIns="0">
             <a:spAutoFit/>
           </a:bodyPr>
           <a:lstStyle/>
@@ -5793,6 +6003,7 @@
           <a:lstStyle/>
           <a:p>
             <a:pPr algn="ctr"/>
+            <a:endParaRPr/>
           </a:p>
         </p:txBody>
       </p:sp>
@@ -5813,7 +6024,7 @@
           <a:noFill/>
         </p:spPr>
         <p:txBody>
-          <a:bodyPr wrap="square" lIns="0" rIns="0" tIns="0" bIns="0">
+          <a:bodyPr wrap="square" lIns="0" tIns="0" rIns="0" bIns="0">
             <a:spAutoFit/>
           </a:bodyPr>
           <a:lstStyle/>
@@ -5847,7 +6058,7 @@
 </file>
 
 <file path=ppt/slides/slide11.xml><?xml version="1.0" encoding="utf-8"?>
-<p:sld xmlns:a="http://schemas.openxmlformats.org/drawingml/2006/main" xmlns:p="http://schemas.openxmlformats.org/presentationml/2006/main" xmlns:r="http://schemas.openxmlformats.org/officeDocument/2006/relationships">
+<p:sld xmlns:a="http://schemas.openxmlformats.org/drawingml/2006/main" xmlns:r="http://schemas.openxmlformats.org/officeDocument/2006/relationships" xmlns:p="http://schemas.openxmlformats.org/presentationml/2006/main">
   <p:cSld>
     <p:bg>
       <p:bgPr>
@@ -5863,7 +6074,14 @@
         <p:cNvGrpSpPr/>
         <p:nvPr/>
       </p:nvGrpSpPr>
-      <p:grpSpPr/>
+      <p:grpSpPr>
+        <a:xfrm>
+          <a:off x="0" y="0"/>
+          <a:ext cx="0" cy="0"/>
+          <a:chOff x="0" y="0"/>
+          <a:chExt cx="0" cy="0"/>
+        </a:xfrm>
+      </p:grpSpPr>
       <p:sp>
         <p:nvSpPr>
           <p:cNvPr id="2" name="Rectangle 1"/>
@@ -5904,6 +6122,7 @@
           <a:lstStyle/>
           <a:p>
             <a:pPr algn="ctr"/>
+            <a:endParaRPr/>
           </a:p>
         </p:txBody>
       </p:sp>
@@ -5924,7 +6143,7 @@
           <a:noFill/>
         </p:spPr>
         <p:txBody>
-          <a:bodyPr wrap="square" lIns="0" rIns="0" tIns="0" bIns="0">
+          <a:bodyPr wrap="square" lIns="0" tIns="0" rIns="0" bIns="0">
             <a:spAutoFit/>
           </a:bodyPr>
           <a:lstStyle/>
@@ -5966,7 +6185,7 @@
           <a:noFill/>
         </p:spPr>
         <p:txBody>
-          <a:bodyPr wrap="square" lIns="0" rIns="0" tIns="0" bIns="0">
+          <a:bodyPr wrap="square" lIns="0" tIns="0" rIns="0" bIns="0">
             <a:spAutoFit/>
           </a:bodyPr>
           <a:lstStyle/>
@@ -6031,6 +6250,7 @@
           <a:lstStyle/>
           <a:p>
             <a:pPr algn="ctr"/>
+            <a:endParaRPr/>
           </a:p>
         </p:txBody>
       </p:sp>
@@ -6051,7 +6271,7 @@
           <a:noFill/>
         </p:spPr>
         <p:txBody>
-          <a:bodyPr wrap="square" lIns="0" rIns="0" tIns="0" bIns="0">
+          <a:bodyPr wrap="square" lIns="0" tIns="0" rIns="0" bIns="0">
             <a:spAutoFit/>
           </a:bodyPr>
           <a:lstStyle/>
@@ -6093,7 +6313,7 @@
           <a:noFill/>
         </p:spPr>
         <p:txBody>
-          <a:bodyPr wrap="square" lIns="0" rIns="0" tIns="0" bIns="0">
+          <a:bodyPr wrap="square" lIns="0" tIns="0" rIns="0" bIns="0">
             <a:spAutoFit/>
           </a:bodyPr>
           <a:lstStyle/>
@@ -6135,7 +6355,7 @@
           <a:noFill/>
         </p:spPr>
         <p:txBody>
-          <a:bodyPr wrap="square" lIns="0" rIns="0" tIns="0" bIns="0">
+          <a:bodyPr wrap="square" lIns="0" tIns="0" rIns="0" bIns="0">
             <a:spAutoFit/>
           </a:bodyPr>
           <a:lstStyle/>
@@ -6177,7 +6397,7 @@
           <a:noFill/>
         </p:spPr>
         <p:txBody>
-          <a:bodyPr wrap="square" lIns="0" rIns="0" tIns="0" bIns="0">
+          <a:bodyPr wrap="square" lIns="0" tIns="0" rIns="0" bIns="0">
             <a:spAutoFit/>
           </a:bodyPr>
           <a:lstStyle/>
@@ -6242,6 +6462,7 @@
           <a:lstStyle/>
           <a:p>
             <a:pPr algn="ctr"/>
+            <a:endParaRPr/>
           </a:p>
         </p:txBody>
       </p:sp>
@@ -6262,7 +6483,7 @@
           <a:noFill/>
         </p:spPr>
         <p:txBody>
-          <a:bodyPr wrap="square" lIns="0" rIns="0" tIns="0" bIns="0">
+          <a:bodyPr wrap="square" lIns="0" tIns="0" rIns="0" bIns="0">
             <a:spAutoFit/>
           </a:bodyPr>
           <a:lstStyle/>
@@ -6304,7 +6525,7 @@
           <a:noFill/>
         </p:spPr>
         <p:txBody>
-          <a:bodyPr wrap="square" lIns="0" rIns="0" tIns="0" bIns="0">
+          <a:bodyPr wrap="square" lIns="0" tIns="0" rIns="0" bIns="0">
             <a:spAutoFit/>
           </a:bodyPr>
           <a:lstStyle/>
@@ -6369,6 +6590,7 @@
           <a:lstStyle/>
           <a:p>
             <a:pPr algn="ctr"/>
+            <a:endParaRPr/>
           </a:p>
         </p:txBody>
       </p:sp>
@@ -6389,7 +6611,7 @@
           <a:noFill/>
         </p:spPr>
         <p:txBody>
-          <a:bodyPr wrap="square" lIns="0" rIns="0" tIns="0" bIns="0">
+          <a:bodyPr wrap="square" lIns="0" tIns="0" rIns="0" bIns="0">
             <a:spAutoFit/>
           </a:bodyPr>
           <a:lstStyle/>
@@ -6431,7 +6653,7 @@
           <a:noFill/>
         </p:spPr>
         <p:txBody>
-          <a:bodyPr wrap="square" lIns="0" rIns="0" tIns="0" bIns="0">
+          <a:bodyPr wrap="square" lIns="0" tIns="0" rIns="0" bIns="0">
             <a:spAutoFit/>
           </a:bodyPr>
           <a:lstStyle/>
@@ -6496,6 +6718,7 @@
           <a:lstStyle/>
           <a:p>
             <a:pPr algn="ctr"/>
+            <a:endParaRPr/>
           </a:p>
         </p:txBody>
       </p:sp>
@@ -6516,7 +6739,7 @@
           <a:noFill/>
         </p:spPr>
         <p:txBody>
-          <a:bodyPr wrap="square" lIns="0" rIns="0" tIns="0" bIns="0">
+          <a:bodyPr wrap="square" lIns="0" tIns="0" rIns="0" bIns="0">
             <a:spAutoFit/>
           </a:bodyPr>
           <a:lstStyle/>
@@ -6558,7 +6781,7 @@
           <a:noFill/>
         </p:spPr>
         <p:txBody>
-          <a:bodyPr wrap="square" lIns="0" rIns="0" tIns="0" bIns="0">
+          <a:bodyPr wrap="square" lIns="0" tIns="0" rIns="0" bIns="0">
             <a:spAutoFit/>
           </a:bodyPr>
           <a:lstStyle/>
@@ -6623,6 +6846,7 @@
           <a:lstStyle/>
           <a:p>
             <a:pPr algn="ctr"/>
+            <a:endParaRPr/>
           </a:p>
         </p:txBody>
       </p:sp>
@@ -6635,7 +6859,7 @@
 </file>
 
 <file path=ppt/slides/slide12.xml><?xml version="1.0" encoding="utf-8"?>
-<p:sld xmlns:a="http://schemas.openxmlformats.org/drawingml/2006/main" xmlns:p="http://schemas.openxmlformats.org/presentationml/2006/main" xmlns:r="http://schemas.openxmlformats.org/officeDocument/2006/relationships">
+<p:sld xmlns:a="http://schemas.openxmlformats.org/drawingml/2006/main" xmlns:r="http://schemas.openxmlformats.org/officeDocument/2006/relationships" xmlns:p="http://schemas.openxmlformats.org/presentationml/2006/main">
   <p:cSld>
     <p:bg>
       <p:bgPr>
@@ -6651,7 +6875,14 @@
         <p:cNvGrpSpPr/>
         <p:nvPr/>
       </p:nvGrpSpPr>
-      <p:grpSpPr/>
+      <p:grpSpPr>
+        <a:xfrm>
+          <a:off x="0" y="0"/>
+          <a:ext cx="0" cy="0"/>
+          <a:chOff x="0" y="0"/>
+          <a:chExt cx="0" cy="0"/>
+        </a:xfrm>
+      </p:grpSpPr>
       <p:sp>
         <p:nvSpPr>
           <p:cNvPr id="2" name="Rectangle 1"/>
@@ -6692,6 +6923,7 @@
           <a:lstStyle/>
           <a:p>
             <a:pPr algn="ctr"/>
+            <a:endParaRPr/>
           </a:p>
         </p:txBody>
       </p:sp>
@@ -6712,7 +6944,7 @@
           <a:noFill/>
         </p:spPr>
         <p:txBody>
-          <a:bodyPr wrap="square" lIns="0" rIns="0" tIns="0" bIns="0">
+          <a:bodyPr wrap="square" lIns="0" tIns="0" rIns="0" bIns="0">
             <a:spAutoFit/>
           </a:bodyPr>
           <a:lstStyle/>
@@ -6754,7 +6986,7 @@
           <a:noFill/>
         </p:spPr>
         <p:txBody>
-          <a:bodyPr wrap="square" lIns="0" rIns="0" tIns="0" bIns="0">
+          <a:bodyPr wrap="square" lIns="0" tIns="0" rIns="0" bIns="0">
             <a:spAutoFit/>
           </a:bodyPr>
           <a:lstStyle/>
@@ -6819,6 +7051,7 @@
           <a:lstStyle/>
           <a:p>
             <a:pPr algn="ctr"/>
+            <a:endParaRPr/>
           </a:p>
         </p:txBody>
       </p:sp>
@@ -6839,7 +7072,7 @@
           <a:noFill/>
         </p:spPr>
         <p:txBody>
-          <a:bodyPr wrap="square" lIns="0" rIns="0" tIns="0" bIns="0">
+          <a:bodyPr wrap="square" lIns="0" tIns="0" rIns="0" bIns="0">
             <a:spAutoFit/>
           </a:bodyPr>
           <a:lstStyle/>
@@ -6881,7 +7114,7 @@
           <a:noFill/>
         </p:spPr>
         <p:txBody>
-          <a:bodyPr wrap="square" lIns="0" rIns="0" tIns="0" bIns="0">
+          <a:bodyPr wrap="square" lIns="0" tIns="0" rIns="0" bIns="0">
             <a:spAutoFit/>
           </a:bodyPr>
           <a:lstStyle/>
@@ -6923,7 +7156,7 @@
           <a:noFill/>
         </p:spPr>
         <p:txBody>
-          <a:bodyPr wrap="square" lIns="0" rIns="0" tIns="0" bIns="0">
+          <a:bodyPr wrap="square" lIns="0" tIns="0" rIns="0" bIns="0">
             <a:spAutoFit/>
           </a:bodyPr>
           <a:lstStyle/>
@@ -6965,7 +7198,7 @@
           <a:noFill/>
         </p:spPr>
         <p:txBody>
-          <a:bodyPr wrap="square" lIns="0" rIns="0" tIns="0" bIns="0">
+          <a:bodyPr wrap="square" lIns="0" tIns="0" rIns="0" bIns="0">
             <a:spAutoFit/>
           </a:bodyPr>
           <a:lstStyle/>
@@ -7030,6 +7263,7 @@
           <a:lstStyle/>
           <a:p>
             <a:pPr algn="ctr"/>
+            <a:endParaRPr/>
           </a:p>
         </p:txBody>
       </p:sp>
@@ -7050,7 +7284,7 @@
           <a:noFill/>
         </p:spPr>
         <p:txBody>
-          <a:bodyPr wrap="square" lIns="0" rIns="0" tIns="0" bIns="0">
+          <a:bodyPr wrap="square" lIns="0" tIns="0" rIns="0" bIns="0">
             <a:spAutoFit/>
           </a:bodyPr>
           <a:lstStyle/>
@@ -7092,7 +7326,7 @@
           <a:noFill/>
         </p:spPr>
         <p:txBody>
-          <a:bodyPr wrap="square" lIns="0" rIns="0" tIns="0" bIns="0">
+          <a:bodyPr wrap="square" lIns="0" tIns="0" rIns="0" bIns="0">
             <a:spAutoFit/>
           </a:bodyPr>
           <a:lstStyle/>
@@ -7157,6 +7391,7 @@
           <a:lstStyle/>
           <a:p>
             <a:pPr algn="ctr"/>
+            <a:endParaRPr/>
           </a:p>
         </p:txBody>
       </p:sp>
@@ -7177,7 +7412,7 @@
           <a:noFill/>
         </p:spPr>
         <p:txBody>
-          <a:bodyPr wrap="square" lIns="0" rIns="0" tIns="0" bIns="0">
+          <a:bodyPr wrap="square" lIns="0" tIns="0" rIns="0" bIns="0">
             <a:spAutoFit/>
           </a:bodyPr>
           <a:lstStyle/>
@@ -7219,7 +7454,7 @@
           <a:noFill/>
         </p:spPr>
         <p:txBody>
-          <a:bodyPr wrap="square" lIns="0" rIns="0" tIns="0" bIns="0">
+          <a:bodyPr wrap="square" lIns="0" tIns="0" rIns="0" bIns="0">
             <a:spAutoFit/>
           </a:bodyPr>
           <a:lstStyle/>
@@ -7284,6 +7519,7 @@
           <a:lstStyle/>
           <a:p>
             <a:pPr algn="ctr"/>
+            <a:endParaRPr/>
           </a:p>
         </p:txBody>
       </p:sp>
@@ -7327,6 +7563,7 @@
           <a:lstStyle/>
           <a:p>
             <a:pPr algn="ctr"/>
+            <a:endParaRPr/>
           </a:p>
         </p:txBody>
       </p:sp>
@@ -7347,7 +7584,7 @@
           <a:noFill/>
         </p:spPr>
         <p:txBody>
-          <a:bodyPr wrap="square" lIns="0" rIns="0" tIns="0" bIns="0">
+          <a:bodyPr wrap="square" lIns="0" tIns="0" rIns="0" bIns="0">
             <a:spAutoFit/>
           </a:bodyPr>
           <a:lstStyle/>
@@ -7381,7 +7618,7 @@
 </file>
 
 <file path=ppt/slides/slide13.xml><?xml version="1.0" encoding="utf-8"?>
-<p:sld xmlns:a="http://schemas.openxmlformats.org/drawingml/2006/main" xmlns:p="http://schemas.openxmlformats.org/presentationml/2006/main" xmlns:r="http://schemas.openxmlformats.org/officeDocument/2006/relationships">
+<p:sld xmlns:a="http://schemas.openxmlformats.org/drawingml/2006/main" xmlns:r="http://schemas.openxmlformats.org/officeDocument/2006/relationships" xmlns:p="http://schemas.openxmlformats.org/presentationml/2006/main">
   <p:cSld>
     <p:bg>
       <p:bgPr>
@@ -7397,7 +7634,14 @@
         <p:cNvGrpSpPr/>
         <p:nvPr/>
       </p:nvGrpSpPr>
-      <p:grpSpPr/>
+      <p:grpSpPr>
+        <a:xfrm>
+          <a:off x="0" y="0"/>
+          <a:ext cx="0" cy="0"/>
+          <a:chOff x="0" y="0"/>
+          <a:chExt cx="0" cy="0"/>
+        </a:xfrm>
+      </p:grpSpPr>
       <p:sp>
         <p:nvSpPr>
           <p:cNvPr id="2" name="Rectangle 1"/>
@@ -7438,6 +7682,7 @@
           <a:lstStyle/>
           <a:p>
             <a:pPr algn="ctr"/>
+            <a:endParaRPr/>
           </a:p>
         </p:txBody>
       </p:sp>
@@ -7458,7 +7703,7 @@
           <a:noFill/>
         </p:spPr>
         <p:txBody>
-          <a:bodyPr wrap="square" lIns="0" rIns="0" tIns="0" bIns="0">
+          <a:bodyPr wrap="square" lIns="0" tIns="0" rIns="0" bIns="0">
             <a:spAutoFit/>
           </a:bodyPr>
           <a:lstStyle/>
@@ -7500,7 +7745,7 @@
           <a:noFill/>
         </p:spPr>
         <p:txBody>
-          <a:bodyPr wrap="square" lIns="0" rIns="0" tIns="0" bIns="0">
+          <a:bodyPr wrap="square" lIns="0" tIns="0" rIns="0" bIns="0">
             <a:spAutoFit/>
           </a:bodyPr>
           <a:lstStyle/>
@@ -7565,6 +7810,7 @@
           <a:lstStyle/>
           <a:p>
             <a:pPr algn="ctr"/>
+            <a:endParaRPr/>
           </a:p>
         </p:txBody>
       </p:sp>
@@ -7585,7 +7831,7 @@
           <a:noFill/>
         </p:spPr>
         <p:txBody>
-          <a:bodyPr wrap="square" lIns="0" rIns="0" tIns="0" bIns="0">
+          <a:bodyPr wrap="square" lIns="0" tIns="0" rIns="0" bIns="0">
             <a:spAutoFit/>
           </a:bodyPr>
           <a:lstStyle/>
@@ -7627,7 +7873,7 @@
           <a:noFill/>
         </p:spPr>
         <p:txBody>
-          <a:bodyPr wrap="square" lIns="0" rIns="0" tIns="0" bIns="0">
+          <a:bodyPr wrap="square" lIns="0" tIns="0" rIns="0" bIns="0">
             <a:spAutoFit/>
           </a:bodyPr>
           <a:lstStyle/>
@@ -7692,6 +7938,7 @@
           <a:lstStyle/>
           <a:p>
             <a:pPr algn="ctr"/>
+            <a:endParaRPr/>
           </a:p>
         </p:txBody>
       </p:sp>
@@ -7712,7 +7959,7 @@
           <a:noFill/>
         </p:spPr>
         <p:txBody>
-          <a:bodyPr wrap="square" lIns="0" rIns="0" tIns="0" bIns="0">
+          <a:bodyPr wrap="square" lIns="0" tIns="0" rIns="0" bIns="0">
             <a:spAutoFit/>
           </a:bodyPr>
           <a:lstStyle/>
@@ -7754,7 +8001,7 @@
           <a:noFill/>
         </p:spPr>
         <p:txBody>
-          <a:bodyPr wrap="square" lIns="0" rIns="0" tIns="0" bIns="0">
+          <a:bodyPr wrap="square" lIns="0" tIns="0" rIns="0" bIns="0">
             <a:spAutoFit/>
           </a:bodyPr>
           <a:lstStyle/>
@@ -7819,6 +8066,7 @@
           <a:lstStyle/>
           <a:p>
             <a:pPr algn="ctr"/>
+            <a:endParaRPr/>
           </a:p>
         </p:txBody>
       </p:sp>
@@ -7862,6 +8110,7 @@
           <a:lstStyle/>
           <a:p>
             <a:pPr algn="ctr"/>
+            <a:endParaRPr/>
           </a:p>
         </p:txBody>
       </p:sp>
@@ -7882,7 +8131,7 @@
           <a:noFill/>
         </p:spPr>
         <p:txBody>
-          <a:bodyPr wrap="square" lIns="0" rIns="0" tIns="0" bIns="0">
+          <a:bodyPr wrap="square" lIns="0" tIns="0" rIns="0" bIns="0">
             <a:spAutoFit/>
           </a:bodyPr>
           <a:lstStyle/>
@@ -7924,7 +8173,7 @@
           <a:noFill/>
         </p:spPr>
         <p:txBody>
-          <a:bodyPr wrap="square" lIns="0" rIns="0" tIns="0" bIns="0">
+          <a:bodyPr wrap="square" lIns="0" tIns="0" rIns="0" bIns="0">
             <a:spAutoFit/>
           </a:bodyPr>
           <a:lstStyle/>
@@ -7989,6 +8238,7 @@
           <a:lstStyle/>
           <a:p>
             <a:pPr algn="ctr"/>
+            <a:endParaRPr/>
           </a:p>
         </p:txBody>
       </p:sp>
@@ -8032,6 +8282,7 @@
           <a:lstStyle/>
           <a:p>
             <a:pPr algn="ctr"/>
+            <a:endParaRPr/>
           </a:p>
         </p:txBody>
       </p:sp>
@@ -8052,7 +8303,7 @@
           <a:noFill/>
         </p:spPr>
         <p:txBody>
-          <a:bodyPr wrap="square" lIns="0" rIns="0" tIns="0" bIns="0">
+          <a:bodyPr wrap="square" lIns="0" tIns="0" rIns="0" bIns="0">
             <a:spAutoFit/>
           </a:bodyPr>
           <a:lstStyle/>
@@ -8094,7 +8345,7 @@
           <a:noFill/>
         </p:spPr>
         <p:txBody>
-          <a:bodyPr wrap="square" lIns="0" rIns="0" tIns="0" bIns="0">
+          <a:bodyPr wrap="square" lIns="0" tIns="0" rIns="0" bIns="0">
             <a:spAutoFit/>
           </a:bodyPr>
           <a:lstStyle/>
@@ -8159,6 +8410,7 @@
           <a:lstStyle/>
           <a:p>
             <a:pPr algn="ctr"/>
+            <a:endParaRPr/>
           </a:p>
         </p:txBody>
       </p:sp>
@@ -8202,6 +8454,7 @@
           <a:lstStyle/>
           <a:p>
             <a:pPr algn="ctr"/>
+            <a:endParaRPr/>
           </a:p>
         </p:txBody>
       </p:sp>
@@ -8222,7 +8475,7 @@
           <a:noFill/>
         </p:spPr>
         <p:txBody>
-          <a:bodyPr wrap="square" lIns="0" rIns="0" tIns="0" bIns="0">
+          <a:bodyPr wrap="square" lIns="0" tIns="0" rIns="0" bIns="0">
             <a:spAutoFit/>
           </a:bodyPr>
           <a:lstStyle/>
@@ -8264,7 +8517,7 @@
           <a:noFill/>
         </p:spPr>
         <p:txBody>
-          <a:bodyPr wrap="square" lIns="0" rIns="0" tIns="0" bIns="0">
+          <a:bodyPr wrap="square" lIns="0" tIns="0" rIns="0" bIns="0">
             <a:spAutoFit/>
           </a:bodyPr>
           <a:lstStyle/>
@@ -8291,67 +8544,6 @@
       </p:sp>
       <p:sp>
         <p:nvSpPr>
-          <p:cNvPr id="23" name="TextBox 22"/>
-          <p:cNvSpPr txBox="1"/>
-          <p:nvPr/>
-        </p:nvSpPr>
-        <p:spPr>
-          <a:xfrm>
-            <a:off x="731520" y="4114800"/>
-            <a:ext cx="10698480" cy="822960"/>
-          </a:xfrm>
-          <a:prstGeom prst="rect">
-            <a:avLst/>
-          </a:prstGeom>
-          <a:noFill/>
-        </p:spPr>
-        <p:txBody>
-          <a:bodyPr wrap="square" lIns="0" rIns="0" tIns="0" bIns="0">
-            <a:spAutoFit/>
-          </a:bodyPr>
-          <a:lstStyle/>
-          <a:p>
-            <a:pPr>
-              <a:lnSpc>
-                <a:spcPct val="108000"/>
-              </a:lnSpc>
-              <a:spcAft>
-                <a:spcPts val="800"/>
-              </a:spcAft>
-              <a:defRPr sz="2200" b="0">
-                <a:solidFill>
-                  <a:srgbClr val="20282B"/>
-                </a:solidFill>
-                <a:latin typeface="Arial"/>
-              </a:defRPr>
-            </a:pPr>
-            <a:r>
-              <a:t>Pool nuevo: comprobado localmente en macOS y Linux.</a:t>
-            </a:r>
-          </a:p>
-          <a:p>
-            <a:pPr>
-              <a:lnSpc>
-                <a:spcPct val="108000"/>
-              </a:lnSpc>
-              <a:spcAft>
-                <a:spcPts val="800"/>
-              </a:spcAft>
-              <a:defRPr sz="2200" b="0">
-                <a:solidFill>
-                  <a:srgbClr val="20282B"/>
-                </a:solidFill>
-                <a:latin typeface="Arial"/>
-              </a:defRPr>
-            </a:pPr>
-            <a:r>
-              <a:t>Validación remota de estos cambios: pendiente de publicación.</a:t>
-            </a:r>
-          </a:p>
-        </p:txBody>
-      </p:sp>
-      <p:sp>
-        <p:nvSpPr>
           <p:cNvPr id="24" name="TextBox 23"/>
           <p:cNvSpPr txBox="1"/>
           <p:nvPr/>
@@ -8367,7 +8559,7 @@
           <a:noFill/>
         </p:spPr>
         <p:txBody>
-          <a:bodyPr wrap="square" lIns="0" rIns="0" tIns="0" bIns="0">
+          <a:bodyPr wrap="square" lIns="0" tIns="0" rIns="0" bIns="0">
             <a:spAutoFit/>
           </a:bodyPr>
           <a:lstStyle/>
@@ -8412,7 +8604,7 @@
           <a:noFill/>
         </p:spPr>
         <p:txBody>
-          <a:bodyPr wrap="square" lIns="0" rIns="0" tIns="0" bIns="0">
+          <a:bodyPr wrap="square" lIns="0" tIns="0" rIns="0" bIns="0">
             <a:spAutoFit/>
           </a:bodyPr>
           <a:lstStyle/>
@@ -8449,7 +8641,7 @@
 </file>
 
 <file path=ppt/slides/slide14.xml><?xml version="1.0" encoding="utf-8"?>
-<p:sld xmlns:a="http://schemas.openxmlformats.org/drawingml/2006/main" xmlns:p="http://schemas.openxmlformats.org/presentationml/2006/main" xmlns:r="http://schemas.openxmlformats.org/officeDocument/2006/relationships">
+<p:sld xmlns:a="http://schemas.openxmlformats.org/drawingml/2006/main" xmlns:r="http://schemas.openxmlformats.org/officeDocument/2006/relationships" xmlns:p="http://schemas.openxmlformats.org/presentationml/2006/main">
   <p:cSld>
     <p:bg>
       <p:bgPr>
@@ -8465,7 +8657,14 @@
         <p:cNvGrpSpPr/>
         <p:nvPr/>
       </p:nvGrpSpPr>
-      <p:grpSpPr/>
+      <p:grpSpPr>
+        <a:xfrm>
+          <a:off x="0" y="0"/>
+          <a:ext cx="0" cy="0"/>
+          <a:chOff x="0" y="0"/>
+          <a:chExt cx="0" cy="0"/>
+        </a:xfrm>
+      </p:grpSpPr>
       <p:sp>
         <p:nvSpPr>
           <p:cNvPr id="2" name="Rectangle 1"/>
@@ -8506,6 +8705,7 @@
           <a:lstStyle/>
           <a:p>
             <a:pPr algn="ctr"/>
+            <a:endParaRPr/>
           </a:p>
         </p:txBody>
       </p:sp>
@@ -8526,7 +8726,7 @@
           <a:noFill/>
         </p:spPr>
         <p:txBody>
-          <a:bodyPr wrap="square" lIns="0" rIns="0" tIns="0" bIns="0">
+          <a:bodyPr wrap="square" lIns="0" tIns="0" rIns="0" bIns="0">
             <a:spAutoFit/>
           </a:bodyPr>
           <a:lstStyle/>
@@ -8568,7 +8768,7 @@
           <a:noFill/>
         </p:spPr>
         <p:txBody>
-          <a:bodyPr wrap="square" lIns="0" rIns="0" tIns="0" bIns="0">
+          <a:bodyPr wrap="square" lIns="0" tIns="0" rIns="0" bIns="0">
             <a:spAutoFit/>
           </a:bodyPr>
           <a:lstStyle/>
@@ -8633,6 +8833,7 @@
           <a:lstStyle/>
           <a:p>
             <a:pPr algn="ctr"/>
+            <a:endParaRPr/>
           </a:p>
         </p:txBody>
       </p:sp>
@@ -8653,7 +8854,7 @@
           <a:noFill/>
         </p:spPr>
         <p:txBody>
-          <a:bodyPr wrap="square" lIns="0" rIns="0" tIns="0" bIns="0">
+          <a:bodyPr wrap="square" lIns="0" tIns="0" rIns="0" bIns="0">
             <a:spAutoFit/>
           </a:bodyPr>
           <a:lstStyle/>
@@ -8695,7 +8896,7 @@
           <a:noFill/>
         </p:spPr>
         <p:txBody>
-          <a:bodyPr wrap="square" lIns="0" rIns="0" tIns="0" bIns="0">
+          <a:bodyPr wrap="square" lIns="0" tIns="0" rIns="0" bIns="0">
             <a:spAutoFit/>
           </a:bodyPr>
           <a:lstStyle/>
@@ -8760,6 +8961,7 @@
           <a:lstStyle/>
           <a:p>
             <a:pPr algn="ctr"/>
+            <a:endParaRPr/>
           </a:p>
         </p:txBody>
       </p:sp>
@@ -8780,7 +8982,7 @@
           <a:noFill/>
         </p:spPr>
         <p:txBody>
-          <a:bodyPr wrap="square" lIns="0" rIns="0" tIns="0" bIns="0">
+          <a:bodyPr wrap="square" lIns="0" tIns="0" rIns="0" bIns="0">
             <a:spAutoFit/>
           </a:bodyPr>
           <a:lstStyle/>
@@ -8822,7 +9024,7 @@
           <a:noFill/>
         </p:spPr>
         <p:txBody>
-          <a:bodyPr wrap="square" lIns="0" rIns="0" tIns="0" bIns="0">
+          <a:bodyPr wrap="square" lIns="0" tIns="0" rIns="0" bIns="0">
             <a:spAutoFit/>
           </a:bodyPr>
           <a:lstStyle/>
@@ -8887,6 +9089,7 @@
           <a:lstStyle/>
           <a:p>
             <a:pPr algn="ctr"/>
+            <a:endParaRPr/>
           </a:p>
         </p:txBody>
       </p:sp>
@@ -8930,6 +9133,7 @@
           <a:lstStyle/>
           <a:p>
             <a:pPr algn="ctr"/>
+            <a:endParaRPr/>
           </a:p>
         </p:txBody>
       </p:sp>
@@ -8950,7 +9154,7 @@
           <a:noFill/>
         </p:spPr>
         <p:txBody>
-          <a:bodyPr wrap="square" lIns="0" rIns="0" tIns="0" bIns="0">
+          <a:bodyPr wrap="square" lIns="0" tIns="0" rIns="0" bIns="0">
             <a:spAutoFit/>
           </a:bodyPr>
           <a:lstStyle/>
@@ -8992,7 +9196,7 @@
           <a:noFill/>
         </p:spPr>
         <p:txBody>
-          <a:bodyPr wrap="square" lIns="0" rIns="0" tIns="0" bIns="0">
+          <a:bodyPr wrap="square" lIns="0" tIns="0" rIns="0" bIns="0">
             <a:spAutoFit/>
           </a:bodyPr>
           <a:lstStyle/>
@@ -9057,6 +9261,7 @@
           <a:lstStyle/>
           <a:p>
             <a:pPr algn="ctr"/>
+            <a:endParaRPr/>
           </a:p>
         </p:txBody>
       </p:sp>
@@ -9100,6 +9305,7 @@
           <a:lstStyle/>
           <a:p>
             <a:pPr algn="ctr"/>
+            <a:endParaRPr/>
           </a:p>
         </p:txBody>
       </p:sp>
@@ -9120,7 +9326,7 @@
           <a:noFill/>
         </p:spPr>
         <p:txBody>
-          <a:bodyPr wrap="square" lIns="0" rIns="0" tIns="0" bIns="0">
+          <a:bodyPr wrap="square" lIns="0" tIns="0" rIns="0" bIns="0">
             <a:spAutoFit/>
           </a:bodyPr>
           <a:lstStyle/>
@@ -9162,7 +9368,7 @@
           <a:noFill/>
         </p:spPr>
         <p:txBody>
-          <a:bodyPr wrap="square" lIns="0" rIns="0" tIns="0" bIns="0">
+          <a:bodyPr wrap="square" lIns="0" tIns="0" rIns="0" bIns="0">
             <a:spAutoFit/>
           </a:bodyPr>
           <a:lstStyle/>
@@ -9204,7 +9410,7 @@
           <a:noFill/>
         </p:spPr>
         <p:txBody>
-          <a:bodyPr wrap="square" lIns="0" rIns="0" tIns="0" bIns="0">
+          <a:bodyPr wrap="square" lIns="0" tIns="0" rIns="0" bIns="0">
             <a:spAutoFit/>
           </a:bodyPr>
           <a:lstStyle/>
@@ -9288,6 +9494,7 @@
           <a:lstStyle/>
           <a:p>
             <a:pPr algn="ctr"/>
+            <a:endParaRPr/>
           </a:p>
         </p:txBody>
       </p:sp>
@@ -9308,7 +9515,7 @@
           <a:noFill/>
         </p:spPr>
         <p:txBody>
-          <a:bodyPr wrap="square" lIns="0" rIns="0" tIns="0" bIns="0">
+          <a:bodyPr wrap="square" lIns="0" tIns="0" rIns="0" bIns="0">
             <a:spAutoFit/>
           </a:bodyPr>
           <a:lstStyle/>
@@ -9342,7 +9549,7 @@
 </file>
 
 <file path=ppt/slides/slide15.xml><?xml version="1.0" encoding="utf-8"?>
-<p:sld xmlns:a="http://schemas.openxmlformats.org/drawingml/2006/main" xmlns:p="http://schemas.openxmlformats.org/presentationml/2006/main" xmlns:r="http://schemas.openxmlformats.org/officeDocument/2006/relationships">
+<p:sld xmlns:a="http://schemas.openxmlformats.org/drawingml/2006/main" xmlns:r="http://schemas.openxmlformats.org/officeDocument/2006/relationships" xmlns:p="http://schemas.openxmlformats.org/presentationml/2006/main">
   <p:cSld>
     <p:bg>
       <p:bgPr>
@@ -9358,7 +9565,14 @@
         <p:cNvGrpSpPr/>
         <p:nvPr/>
       </p:nvGrpSpPr>
-      <p:grpSpPr/>
+      <p:grpSpPr>
+        <a:xfrm>
+          <a:off x="0" y="0"/>
+          <a:ext cx="0" cy="0"/>
+          <a:chOff x="0" y="0"/>
+          <a:chExt cx="0" cy="0"/>
+        </a:xfrm>
+      </p:grpSpPr>
       <p:sp>
         <p:nvSpPr>
           <p:cNvPr id="2" name="Rectangle 1"/>
@@ -9399,6 +9613,7 @@
           <a:lstStyle/>
           <a:p>
             <a:pPr algn="ctr"/>
+            <a:endParaRPr/>
           </a:p>
         </p:txBody>
       </p:sp>
@@ -9419,7 +9634,7 @@
           <a:noFill/>
         </p:spPr>
         <p:txBody>
-          <a:bodyPr wrap="square" lIns="0" rIns="0" tIns="0" bIns="0">
+          <a:bodyPr wrap="square" lIns="0" tIns="0" rIns="0" bIns="0">
             <a:spAutoFit/>
           </a:bodyPr>
           <a:lstStyle/>
@@ -9461,7 +9676,7 @@
           <a:noFill/>
         </p:spPr>
         <p:txBody>
-          <a:bodyPr wrap="square" lIns="0" rIns="0" tIns="0" bIns="0">
+          <a:bodyPr wrap="square" lIns="0" tIns="0" rIns="0" bIns="0">
             <a:spAutoFit/>
           </a:bodyPr>
           <a:lstStyle/>
@@ -9526,6 +9741,7 @@
           <a:lstStyle/>
           <a:p>
             <a:pPr algn="ctr"/>
+            <a:endParaRPr/>
           </a:p>
         </p:txBody>
       </p:sp>
@@ -9546,7 +9762,7 @@
           <a:noFill/>
         </p:spPr>
         <p:txBody>
-          <a:bodyPr wrap="square" lIns="0" rIns="0" tIns="0" bIns="0">
+          <a:bodyPr wrap="square" lIns="0" tIns="0" rIns="0" bIns="0">
             <a:spAutoFit/>
           </a:bodyPr>
           <a:lstStyle/>
@@ -9588,7 +9804,7 @@
           <a:noFill/>
         </p:spPr>
         <p:txBody>
-          <a:bodyPr wrap="square" lIns="0" rIns="0" tIns="0" bIns="0">
+          <a:bodyPr wrap="square" lIns="0" tIns="0" rIns="0" bIns="0">
             <a:spAutoFit/>
           </a:bodyPr>
           <a:lstStyle/>
@@ -9630,7 +9846,7 @@
           <a:noFill/>
         </p:spPr>
         <p:txBody>
-          <a:bodyPr wrap="square" lIns="0" rIns="0" tIns="0" bIns="0">
+          <a:bodyPr wrap="square" lIns="0" tIns="0" rIns="0" bIns="0">
             <a:spAutoFit/>
           </a:bodyPr>
           <a:lstStyle/>
@@ -9672,7 +9888,7 @@
           <a:noFill/>
         </p:spPr>
         <p:txBody>
-          <a:bodyPr wrap="square" lIns="0" rIns="0" tIns="0" bIns="0">
+          <a:bodyPr wrap="square" lIns="0" tIns="0" rIns="0" bIns="0">
             <a:spAutoFit/>
           </a:bodyPr>
           <a:lstStyle/>
@@ -9737,6 +9953,7 @@
           <a:lstStyle/>
           <a:p>
             <a:pPr algn="ctr"/>
+            <a:endParaRPr/>
           </a:p>
         </p:txBody>
       </p:sp>
@@ -9757,7 +9974,7 @@
           <a:noFill/>
         </p:spPr>
         <p:txBody>
-          <a:bodyPr wrap="square" lIns="0" rIns="0" tIns="0" bIns="0">
+          <a:bodyPr wrap="square" lIns="0" tIns="0" rIns="0" bIns="0">
             <a:spAutoFit/>
           </a:bodyPr>
           <a:lstStyle/>
@@ -9799,7 +10016,7 @@
           <a:noFill/>
         </p:spPr>
         <p:txBody>
-          <a:bodyPr wrap="square" lIns="0" rIns="0" tIns="0" bIns="0">
+          <a:bodyPr wrap="square" lIns="0" tIns="0" rIns="0" bIns="0">
             <a:spAutoFit/>
           </a:bodyPr>
           <a:lstStyle/>
@@ -9864,6 +10081,7 @@
           <a:lstStyle/>
           <a:p>
             <a:pPr algn="ctr"/>
+            <a:endParaRPr/>
           </a:p>
         </p:txBody>
       </p:sp>
@@ -9884,7 +10102,7 @@
           <a:noFill/>
         </p:spPr>
         <p:txBody>
-          <a:bodyPr wrap="square" lIns="0" rIns="0" tIns="0" bIns="0">
+          <a:bodyPr wrap="square" lIns="0" tIns="0" rIns="0" bIns="0">
             <a:spAutoFit/>
           </a:bodyPr>
           <a:lstStyle/>
@@ -9926,7 +10144,7 @@
           <a:noFill/>
         </p:spPr>
         <p:txBody>
-          <a:bodyPr wrap="square" lIns="0" rIns="0" tIns="0" bIns="0">
+          <a:bodyPr wrap="square" lIns="0" tIns="0" rIns="0" bIns="0">
             <a:spAutoFit/>
           </a:bodyPr>
           <a:lstStyle/>
@@ -9991,6 +10209,7 @@
           <a:lstStyle/>
           <a:p>
             <a:pPr algn="ctr"/>
+            <a:endParaRPr/>
           </a:p>
         </p:txBody>
       </p:sp>
@@ -10034,6 +10253,7 @@
           <a:lstStyle/>
           <a:p>
             <a:pPr algn="ctr"/>
+            <a:endParaRPr/>
           </a:p>
         </p:txBody>
       </p:sp>
@@ -10054,7 +10274,7 @@
           <a:noFill/>
         </p:spPr>
         <p:txBody>
-          <a:bodyPr wrap="square" lIns="0" rIns="0" tIns="0" bIns="0">
+          <a:bodyPr wrap="square" lIns="0" tIns="0" rIns="0" bIns="0">
             <a:spAutoFit/>
           </a:bodyPr>
           <a:lstStyle/>
@@ -10088,7 +10308,7 @@
 </file>
 
 <file path=ppt/slides/slide2.xml><?xml version="1.0" encoding="utf-8"?>
-<p:sld xmlns:a="http://schemas.openxmlformats.org/drawingml/2006/main" xmlns:p="http://schemas.openxmlformats.org/presentationml/2006/main" xmlns:r="http://schemas.openxmlformats.org/officeDocument/2006/relationships">
+<p:sld xmlns:a="http://schemas.openxmlformats.org/drawingml/2006/main" xmlns:r="http://schemas.openxmlformats.org/officeDocument/2006/relationships" xmlns:p="http://schemas.openxmlformats.org/presentationml/2006/main">
   <p:cSld>
     <p:bg>
       <p:bgPr>
@@ -10104,7 +10324,14 @@
         <p:cNvGrpSpPr/>
         <p:nvPr/>
       </p:nvGrpSpPr>
-      <p:grpSpPr/>
+      <p:grpSpPr>
+        <a:xfrm>
+          <a:off x="0" y="0"/>
+          <a:ext cx="0" cy="0"/>
+          <a:chOff x="0" y="0"/>
+          <a:chExt cx="0" cy="0"/>
+        </a:xfrm>
+      </p:grpSpPr>
       <p:sp>
         <p:nvSpPr>
           <p:cNvPr id="2" name="Rectangle 1"/>
@@ -10145,6 +10372,7 @@
           <a:lstStyle/>
           <a:p>
             <a:pPr algn="ctr"/>
+            <a:endParaRPr/>
           </a:p>
         </p:txBody>
       </p:sp>
@@ -10165,7 +10393,7 @@
           <a:noFill/>
         </p:spPr>
         <p:txBody>
-          <a:bodyPr wrap="square" lIns="0" rIns="0" tIns="0" bIns="0">
+          <a:bodyPr wrap="square" lIns="0" tIns="0" rIns="0" bIns="0">
             <a:spAutoFit/>
           </a:bodyPr>
           <a:lstStyle/>
@@ -10207,7 +10435,7 @@
           <a:noFill/>
         </p:spPr>
         <p:txBody>
-          <a:bodyPr wrap="square" lIns="0" rIns="0" tIns="0" bIns="0">
+          <a:bodyPr wrap="square" lIns="0" tIns="0" rIns="0" bIns="0">
             <a:spAutoFit/>
           </a:bodyPr>
           <a:lstStyle/>
@@ -10272,6 +10500,7 @@
           <a:lstStyle/>
           <a:p>
             <a:pPr algn="ctr"/>
+            <a:endParaRPr/>
           </a:p>
         </p:txBody>
       </p:sp>
@@ -10292,7 +10521,7 @@
           <a:noFill/>
         </p:spPr>
         <p:txBody>
-          <a:bodyPr wrap="square" lIns="0" rIns="0" tIns="0" bIns="0">
+          <a:bodyPr wrap="square" lIns="0" tIns="0" rIns="0" bIns="0">
             <a:spAutoFit/>
           </a:bodyPr>
           <a:lstStyle/>
@@ -10334,7 +10563,7 @@
           <a:noFill/>
         </p:spPr>
         <p:txBody>
-          <a:bodyPr wrap="square" lIns="0" rIns="0" tIns="0" bIns="0">
+          <a:bodyPr wrap="square" lIns="0" tIns="0" rIns="0" bIns="0">
             <a:spAutoFit/>
           </a:bodyPr>
           <a:lstStyle/>
@@ -10376,7 +10605,7 @@
           <a:noFill/>
         </p:spPr>
         <p:txBody>
-          <a:bodyPr wrap="square" lIns="0" rIns="0" tIns="0" bIns="0">
+          <a:bodyPr wrap="square" lIns="0" tIns="0" rIns="0" bIns="0">
             <a:spAutoFit/>
           </a:bodyPr>
           <a:lstStyle/>
@@ -10418,7 +10647,7 @@
           <a:noFill/>
         </p:spPr>
         <p:txBody>
-          <a:bodyPr wrap="square" lIns="0" rIns="0" tIns="0" bIns="0">
+          <a:bodyPr wrap="square" lIns="0" tIns="0" rIns="0" bIns="0">
             <a:spAutoFit/>
           </a:bodyPr>
           <a:lstStyle/>
@@ -10483,6 +10712,7 @@
           <a:lstStyle/>
           <a:p>
             <a:pPr algn="ctr"/>
+            <a:endParaRPr/>
           </a:p>
         </p:txBody>
       </p:sp>
@@ -10503,7 +10733,7 @@
           <a:noFill/>
         </p:spPr>
         <p:txBody>
-          <a:bodyPr wrap="square" lIns="0" rIns="0" tIns="0" bIns="0">
+          <a:bodyPr wrap="square" lIns="0" tIns="0" rIns="0" bIns="0">
             <a:spAutoFit/>
           </a:bodyPr>
           <a:lstStyle/>
@@ -10545,7 +10775,7 @@
           <a:noFill/>
         </p:spPr>
         <p:txBody>
-          <a:bodyPr wrap="square" lIns="0" rIns="0" tIns="0" bIns="0">
+          <a:bodyPr wrap="square" lIns="0" tIns="0" rIns="0" bIns="0">
             <a:spAutoFit/>
           </a:bodyPr>
           <a:lstStyle/>
@@ -10610,6 +10840,7 @@
           <a:lstStyle/>
           <a:p>
             <a:pPr algn="ctr"/>
+            <a:endParaRPr/>
           </a:p>
         </p:txBody>
       </p:sp>
@@ -10630,7 +10861,7 @@
           <a:noFill/>
         </p:spPr>
         <p:txBody>
-          <a:bodyPr wrap="square" lIns="0" rIns="0" tIns="0" bIns="0">
+          <a:bodyPr wrap="square" lIns="0" tIns="0" rIns="0" bIns="0">
             <a:spAutoFit/>
           </a:bodyPr>
           <a:lstStyle/>
@@ -10672,7 +10903,7 @@
           <a:noFill/>
         </p:spPr>
         <p:txBody>
-          <a:bodyPr wrap="square" lIns="0" rIns="0" tIns="0" bIns="0">
+          <a:bodyPr wrap="square" lIns="0" tIns="0" rIns="0" bIns="0">
             <a:spAutoFit/>
           </a:bodyPr>
           <a:lstStyle/>
@@ -10737,6 +10968,7 @@
           <a:lstStyle/>
           <a:p>
             <a:pPr algn="ctr"/>
+            <a:endParaRPr/>
           </a:p>
         </p:txBody>
       </p:sp>
@@ -10757,7 +10989,7 @@
           <a:noFill/>
         </p:spPr>
         <p:txBody>
-          <a:bodyPr wrap="square" lIns="0" rIns="0" tIns="0" bIns="0">
+          <a:bodyPr wrap="square" lIns="0" tIns="0" rIns="0" bIns="0">
             <a:spAutoFit/>
           </a:bodyPr>
           <a:lstStyle/>
@@ -10799,7 +11031,7 @@
           <a:noFill/>
         </p:spPr>
         <p:txBody>
-          <a:bodyPr wrap="square" lIns="0" rIns="0" tIns="0" bIns="0">
+          <a:bodyPr wrap="square" lIns="0" tIns="0" rIns="0" bIns="0">
             <a:spAutoFit/>
           </a:bodyPr>
           <a:lstStyle/>
@@ -10864,6 +11096,7 @@
           <a:lstStyle/>
           <a:p>
             <a:pPr algn="ctr"/>
+            <a:endParaRPr/>
           </a:p>
         </p:txBody>
       </p:sp>
@@ -10876,7 +11109,7 @@
 </file>
 
 <file path=ppt/slides/slide3.xml><?xml version="1.0" encoding="utf-8"?>
-<p:sld xmlns:a="http://schemas.openxmlformats.org/drawingml/2006/main" xmlns:p="http://schemas.openxmlformats.org/presentationml/2006/main" xmlns:r="http://schemas.openxmlformats.org/officeDocument/2006/relationships">
+<p:sld xmlns:a="http://schemas.openxmlformats.org/drawingml/2006/main" xmlns:r="http://schemas.openxmlformats.org/officeDocument/2006/relationships" xmlns:p="http://schemas.openxmlformats.org/presentationml/2006/main">
   <p:cSld>
     <p:bg>
       <p:bgPr>
@@ -10892,7 +11125,14 @@
         <p:cNvGrpSpPr/>
         <p:nvPr/>
       </p:nvGrpSpPr>
-      <p:grpSpPr/>
+      <p:grpSpPr>
+        <a:xfrm>
+          <a:off x="0" y="0"/>
+          <a:ext cx="0" cy="0"/>
+          <a:chOff x="0" y="0"/>
+          <a:chExt cx="0" cy="0"/>
+        </a:xfrm>
+      </p:grpSpPr>
       <p:sp>
         <p:nvSpPr>
           <p:cNvPr id="2" name="Rectangle 1"/>
@@ -10933,6 +11173,7 @@
           <a:lstStyle/>
           <a:p>
             <a:pPr algn="ctr"/>
+            <a:endParaRPr/>
           </a:p>
         </p:txBody>
       </p:sp>
@@ -10953,7 +11194,7 @@
           <a:noFill/>
         </p:spPr>
         <p:txBody>
-          <a:bodyPr wrap="square" lIns="0" rIns="0" tIns="0" bIns="0">
+          <a:bodyPr wrap="square" lIns="0" tIns="0" rIns="0" bIns="0">
             <a:spAutoFit/>
           </a:bodyPr>
           <a:lstStyle/>
@@ -10995,7 +11236,7 @@
           <a:noFill/>
         </p:spPr>
         <p:txBody>
-          <a:bodyPr wrap="square" lIns="0" rIns="0" tIns="0" bIns="0">
+          <a:bodyPr wrap="square" lIns="0" tIns="0" rIns="0" bIns="0">
             <a:spAutoFit/>
           </a:bodyPr>
           <a:lstStyle/>
@@ -11060,6 +11301,7 @@
           <a:lstStyle/>
           <a:p>
             <a:pPr algn="ctr"/>
+            <a:endParaRPr/>
           </a:p>
         </p:txBody>
       </p:sp>
@@ -11080,7 +11322,7 @@
           <a:noFill/>
         </p:spPr>
         <p:txBody>
-          <a:bodyPr wrap="square" lIns="0" rIns="0" tIns="0" bIns="0">
+          <a:bodyPr wrap="square" lIns="0" tIns="0" rIns="0" bIns="0">
             <a:spAutoFit/>
           </a:bodyPr>
           <a:lstStyle/>
@@ -11122,7 +11364,7 @@
           <a:noFill/>
         </p:spPr>
         <p:txBody>
-          <a:bodyPr wrap="square" lIns="0" rIns="0" tIns="0" bIns="0">
+          <a:bodyPr wrap="square" lIns="0" tIns="0" rIns="0" bIns="0">
             <a:spAutoFit/>
           </a:bodyPr>
           <a:lstStyle/>
@@ -11187,6 +11429,7 @@
           <a:lstStyle/>
           <a:p>
             <a:pPr algn="ctr"/>
+            <a:endParaRPr/>
           </a:p>
         </p:txBody>
       </p:sp>
@@ -11207,7 +11450,7 @@
           <a:noFill/>
         </p:spPr>
         <p:txBody>
-          <a:bodyPr wrap="square" lIns="0" rIns="0" tIns="0" bIns="0">
+          <a:bodyPr wrap="square" lIns="0" tIns="0" rIns="0" bIns="0">
             <a:spAutoFit/>
           </a:bodyPr>
           <a:lstStyle/>
@@ -11249,7 +11492,7 @@
           <a:noFill/>
         </p:spPr>
         <p:txBody>
-          <a:bodyPr wrap="square" lIns="0" rIns="0" tIns="0" bIns="0">
+          <a:bodyPr wrap="square" lIns="0" tIns="0" rIns="0" bIns="0">
             <a:spAutoFit/>
           </a:bodyPr>
           <a:lstStyle/>
@@ -11314,6 +11557,7 @@
           <a:lstStyle/>
           <a:p>
             <a:pPr algn="ctr"/>
+            <a:endParaRPr/>
           </a:p>
         </p:txBody>
       </p:sp>
@@ -11357,6 +11601,7 @@
           <a:lstStyle/>
           <a:p>
             <a:pPr algn="ctr"/>
+            <a:endParaRPr/>
           </a:p>
         </p:txBody>
       </p:sp>
@@ -11377,7 +11622,7 @@
           <a:noFill/>
         </p:spPr>
         <p:txBody>
-          <a:bodyPr wrap="square" lIns="0" rIns="0" tIns="0" bIns="0">
+          <a:bodyPr wrap="square" lIns="0" tIns="0" rIns="0" bIns="0">
             <a:spAutoFit/>
           </a:bodyPr>
           <a:lstStyle/>
@@ -11419,7 +11664,7 @@
           <a:noFill/>
         </p:spPr>
         <p:txBody>
-          <a:bodyPr wrap="square" lIns="0" rIns="0" tIns="0" bIns="0">
+          <a:bodyPr wrap="square" lIns="0" tIns="0" rIns="0" bIns="0">
             <a:spAutoFit/>
           </a:bodyPr>
           <a:lstStyle/>
@@ -11484,6 +11729,7 @@
           <a:lstStyle/>
           <a:p>
             <a:pPr algn="ctr"/>
+            <a:endParaRPr/>
           </a:p>
         </p:txBody>
       </p:sp>
@@ -11527,6 +11773,7 @@
           <a:lstStyle/>
           <a:p>
             <a:pPr algn="ctr"/>
+            <a:endParaRPr/>
           </a:p>
         </p:txBody>
       </p:sp>
@@ -11547,7 +11794,7 @@
           <a:noFill/>
         </p:spPr>
         <p:txBody>
-          <a:bodyPr wrap="square" lIns="0" rIns="0" tIns="0" bIns="0">
+          <a:bodyPr wrap="square" lIns="0" tIns="0" rIns="0" bIns="0">
             <a:spAutoFit/>
           </a:bodyPr>
           <a:lstStyle/>
@@ -11589,7 +11836,7 @@
           <a:noFill/>
         </p:spPr>
         <p:txBody>
-          <a:bodyPr wrap="square" lIns="0" rIns="0" tIns="0" bIns="0">
+          <a:bodyPr wrap="square" lIns="0" tIns="0" rIns="0" bIns="0">
             <a:spAutoFit/>
           </a:bodyPr>
           <a:lstStyle/>
@@ -11654,6 +11901,7 @@
           <a:lstStyle/>
           <a:p>
             <a:pPr algn="ctr"/>
+            <a:endParaRPr/>
           </a:p>
         </p:txBody>
       </p:sp>
@@ -11697,6 +11945,7 @@
           <a:lstStyle/>
           <a:p>
             <a:pPr algn="ctr"/>
+            <a:endParaRPr/>
           </a:p>
         </p:txBody>
       </p:sp>
@@ -11717,7 +11966,7 @@
           <a:noFill/>
         </p:spPr>
         <p:txBody>
-          <a:bodyPr wrap="square" lIns="0" rIns="0" tIns="0" bIns="0">
+          <a:bodyPr wrap="square" lIns="0" tIns="0" rIns="0" bIns="0">
             <a:spAutoFit/>
           </a:bodyPr>
           <a:lstStyle/>
@@ -11759,7 +12008,7 @@
           <a:noFill/>
         </p:spPr>
         <p:txBody>
-          <a:bodyPr wrap="square" lIns="0" rIns="0" tIns="0" bIns="0">
+          <a:bodyPr wrap="square" lIns="0" tIns="0" rIns="0" bIns="0">
             <a:spAutoFit/>
           </a:bodyPr>
           <a:lstStyle/>
@@ -11801,7 +12050,7 @@
           <a:noFill/>
         </p:spPr>
         <p:txBody>
-          <a:bodyPr wrap="square" lIns="0" rIns="0" tIns="0" bIns="0">
+          <a:bodyPr wrap="square" lIns="0" tIns="0" rIns="0" bIns="0">
             <a:spAutoFit/>
           </a:bodyPr>
           <a:lstStyle/>
@@ -11862,7 +12111,7 @@
           <a:noFill/>
         </p:spPr>
         <p:txBody>
-          <a:bodyPr wrap="square" lIns="0" rIns="0" tIns="0" bIns="0">
+          <a:bodyPr wrap="square" lIns="0" tIns="0" rIns="0" bIns="0">
             <a:spAutoFit/>
           </a:bodyPr>
           <a:lstStyle/>
@@ -11946,6 +12195,7 @@
           <a:lstStyle/>
           <a:p>
             <a:pPr algn="ctr"/>
+            <a:endParaRPr/>
           </a:p>
         </p:txBody>
       </p:sp>
@@ -11966,7 +12216,7 @@
           <a:noFill/>
         </p:spPr>
         <p:txBody>
-          <a:bodyPr wrap="square" lIns="0" rIns="0" tIns="0" bIns="0">
+          <a:bodyPr wrap="square" lIns="0" tIns="0" rIns="0" bIns="0">
             <a:spAutoFit/>
           </a:bodyPr>
           <a:lstStyle/>
@@ -12000,7 +12250,7 @@
 </file>
 
 <file path=ppt/slides/slide4.xml><?xml version="1.0" encoding="utf-8"?>
-<p:sld xmlns:a="http://schemas.openxmlformats.org/drawingml/2006/main" xmlns:p="http://schemas.openxmlformats.org/presentationml/2006/main" xmlns:r="http://schemas.openxmlformats.org/officeDocument/2006/relationships">
+<p:sld xmlns:a="http://schemas.openxmlformats.org/drawingml/2006/main" xmlns:r="http://schemas.openxmlformats.org/officeDocument/2006/relationships" xmlns:p="http://schemas.openxmlformats.org/presentationml/2006/main">
   <p:cSld>
     <p:bg>
       <p:bgPr>
@@ -12016,7 +12266,14 @@
         <p:cNvGrpSpPr/>
         <p:nvPr/>
       </p:nvGrpSpPr>
-      <p:grpSpPr/>
+      <p:grpSpPr>
+        <a:xfrm>
+          <a:off x="0" y="0"/>
+          <a:ext cx="0" cy="0"/>
+          <a:chOff x="0" y="0"/>
+          <a:chExt cx="0" cy="0"/>
+        </a:xfrm>
+      </p:grpSpPr>
       <p:sp>
         <p:nvSpPr>
           <p:cNvPr id="2" name="Rectangle 1"/>
@@ -12057,6 +12314,7 @@
           <a:lstStyle/>
           <a:p>
             <a:pPr algn="ctr"/>
+            <a:endParaRPr/>
           </a:p>
         </p:txBody>
       </p:sp>
@@ -12077,7 +12335,7 @@
           <a:noFill/>
         </p:spPr>
         <p:txBody>
-          <a:bodyPr wrap="square" lIns="0" rIns="0" tIns="0" bIns="0">
+          <a:bodyPr wrap="square" lIns="0" tIns="0" rIns="0" bIns="0">
             <a:spAutoFit/>
           </a:bodyPr>
           <a:lstStyle/>
@@ -12119,7 +12377,7 @@
           <a:noFill/>
         </p:spPr>
         <p:txBody>
-          <a:bodyPr wrap="square" lIns="0" rIns="0" tIns="0" bIns="0">
+          <a:bodyPr wrap="square" lIns="0" tIns="0" rIns="0" bIns="0">
             <a:spAutoFit/>
           </a:bodyPr>
           <a:lstStyle/>
@@ -12184,6 +12442,7 @@
           <a:lstStyle/>
           <a:p>
             <a:pPr algn="ctr"/>
+            <a:endParaRPr/>
           </a:p>
         </p:txBody>
       </p:sp>
@@ -12204,7 +12463,7 @@
           <a:noFill/>
         </p:spPr>
         <p:txBody>
-          <a:bodyPr wrap="square" lIns="0" rIns="0" tIns="0" bIns="0">
+          <a:bodyPr wrap="square" lIns="0" tIns="0" rIns="0" bIns="0">
             <a:spAutoFit/>
           </a:bodyPr>
           <a:lstStyle/>
@@ -12246,7 +12505,7 @@
           <a:noFill/>
         </p:spPr>
         <p:txBody>
-          <a:bodyPr wrap="square" lIns="0" rIns="0" tIns="0" bIns="0">
+          <a:bodyPr wrap="square" lIns="0" tIns="0" rIns="0" bIns="0">
             <a:spAutoFit/>
           </a:bodyPr>
           <a:lstStyle/>
@@ -12311,6 +12570,7 @@
           <a:lstStyle/>
           <a:p>
             <a:pPr algn="ctr"/>
+            <a:endParaRPr/>
           </a:p>
         </p:txBody>
       </p:sp>
@@ -12331,7 +12591,7 @@
           <a:noFill/>
         </p:spPr>
         <p:txBody>
-          <a:bodyPr wrap="square" lIns="0" rIns="0" tIns="0" bIns="0">
+          <a:bodyPr wrap="square" lIns="0" tIns="0" rIns="0" bIns="0">
             <a:spAutoFit/>
           </a:bodyPr>
           <a:lstStyle/>
@@ -12411,7 +12671,7 @@
           <a:noFill/>
         </p:spPr>
         <p:txBody>
-          <a:bodyPr wrap="square" lIns="0" rIns="0" tIns="0" bIns="0">
+          <a:bodyPr wrap="square" lIns="0" tIns="0" rIns="0" bIns="0">
             <a:spAutoFit/>
           </a:bodyPr>
           <a:lstStyle/>
@@ -12472,7 +12732,7 @@
           <a:noFill/>
         </p:spPr>
         <p:txBody>
-          <a:bodyPr wrap="square" lIns="0" rIns="0" tIns="0" bIns="0">
+          <a:bodyPr wrap="square" lIns="0" tIns="0" rIns="0" bIns="0">
             <a:spAutoFit/>
           </a:bodyPr>
           <a:lstStyle/>
@@ -12556,6 +12816,7 @@
           <a:lstStyle/>
           <a:p>
             <a:pPr algn="ctr"/>
+            <a:endParaRPr/>
           </a:p>
         </p:txBody>
       </p:sp>
@@ -12576,7 +12837,7 @@
           <a:noFill/>
         </p:spPr>
         <p:txBody>
-          <a:bodyPr wrap="square" lIns="0" rIns="0" tIns="0" bIns="0">
+          <a:bodyPr wrap="square" lIns="0" tIns="0" rIns="0" bIns="0">
             <a:spAutoFit/>
           </a:bodyPr>
           <a:lstStyle/>
@@ -12610,7 +12871,7 @@
 </file>
 
 <file path=ppt/slides/slide5.xml><?xml version="1.0" encoding="utf-8"?>
-<p:sld xmlns:a="http://schemas.openxmlformats.org/drawingml/2006/main" xmlns:p="http://schemas.openxmlformats.org/presentationml/2006/main" xmlns:r="http://schemas.openxmlformats.org/officeDocument/2006/relationships">
+<p:sld xmlns:a="http://schemas.openxmlformats.org/drawingml/2006/main" xmlns:r="http://schemas.openxmlformats.org/officeDocument/2006/relationships" xmlns:p="http://schemas.openxmlformats.org/presentationml/2006/main">
   <p:cSld>
     <p:bg>
       <p:bgPr>
@@ -12626,7 +12887,14 @@
         <p:cNvGrpSpPr/>
         <p:nvPr/>
       </p:nvGrpSpPr>
-      <p:grpSpPr/>
+      <p:grpSpPr>
+        <a:xfrm>
+          <a:off x="0" y="0"/>
+          <a:ext cx="0" cy="0"/>
+          <a:chOff x="0" y="0"/>
+          <a:chExt cx="0" cy="0"/>
+        </a:xfrm>
+      </p:grpSpPr>
       <p:sp>
         <p:nvSpPr>
           <p:cNvPr id="2" name="Rectangle 1"/>
@@ -12667,6 +12935,7 @@
           <a:lstStyle/>
           <a:p>
             <a:pPr algn="ctr"/>
+            <a:endParaRPr/>
           </a:p>
         </p:txBody>
       </p:sp>
@@ -12687,7 +12956,7 @@
           <a:noFill/>
         </p:spPr>
         <p:txBody>
-          <a:bodyPr wrap="square" lIns="0" rIns="0" tIns="0" bIns="0">
+          <a:bodyPr wrap="square" lIns="0" tIns="0" rIns="0" bIns="0">
             <a:spAutoFit/>
           </a:bodyPr>
           <a:lstStyle/>
@@ -12729,7 +12998,7 @@
           <a:noFill/>
         </p:spPr>
         <p:txBody>
-          <a:bodyPr wrap="square" lIns="0" rIns="0" tIns="0" bIns="0">
+          <a:bodyPr wrap="square" lIns="0" tIns="0" rIns="0" bIns="0">
             <a:spAutoFit/>
           </a:bodyPr>
           <a:lstStyle/>
@@ -12794,6 +13063,7 @@
           <a:lstStyle/>
           <a:p>
             <a:pPr algn="ctr"/>
+            <a:endParaRPr/>
           </a:p>
         </p:txBody>
       </p:sp>
@@ -12814,7 +13084,7 @@
           <a:noFill/>
         </p:spPr>
         <p:txBody>
-          <a:bodyPr wrap="square" lIns="0" rIns="0" tIns="0" bIns="0">
+          <a:bodyPr wrap="square" lIns="0" tIns="0" rIns="0" bIns="0">
             <a:spAutoFit/>
           </a:bodyPr>
           <a:lstStyle/>
@@ -12856,7 +13126,7 @@
           <a:noFill/>
         </p:spPr>
         <p:txBody>
-          <a:bodyPr wrap="square" lIns="0" rIns="0" tIns="0" bIns="0">
+          <a:bodyPr wrap="square" lIns="0" tIns="0" rIns="0" bIns="0">
             <a:spAutoFit/>
           </a:bodyPr>
           <a:lstStyle/>
@@ -12898,7 +13168,7 @@
           <a:noFill/>
         </p:spPr>
         <p:txBody>
-          <a:bodyPr wrap="square" lIns="0" rIns="0" tIns="0" bIns="0">
+          <a:bodyPr wrap="square" lIns="0" tIns="0" rIns="0" bIns="0">
             <a:spAutoFit/>
           </a:bodyPr>
           <a:lstStyle/>
@@ -12940,7 +13210,7 @@
           <a:noFill/>
         </p:spPr>
         <p:txBody>
-          <a:bodyPr wrap="square" lIns="0" rIns="0" tIns="0" bIns="0">
+          <a:bodyPr wrap="square" lIns="0" tIns="0" rIns="0" bIns="0">
             <a:spAutoFit/>
           </a:bodyPr>
           <a:lstStyle/>
@@ -13005,6 +13275,7 @@
           <a:lstStyle/>
           <a:p>
             <a:pPr algn="ctr"/>
+            <a:endParaRPr/>
           </a:p>
         </p:txBody>
       </p:sp>
@@ -13025,7 +13296,7 @@
           <a:noFill/>
         </p:spPr>
         <p:txBody>
-          <a:bodyPr wrap="square" lIns="0" rIns="0" tIns="0" bIns="0">
+          <a:bodyPr wrap="square" lIns="0" tIns="0" rIns="0" bIns="0">
             <a:spAutoFit/>
           </a:bodyPr>
           <a:lstStyle/>
@@ -13067,7 +13338,7 @@
           <a:noFill/>
         </p:spPr>
         <p:txBody>
-          <a:bodyPr wrap="square" lIns="0" rIns="0" tIns="0" bIns="0">
+          <a:bodyPr wrap="square" lIns="0" tIns="0" rIns="0" bIns="0">
             <a:spAutoFit/>
           </a:bodyPr>
           <a:lstStyle/>
@@ -13132,6 +13403,7 @@
           <a:lstStyle/>
           <a:p>
             <a:pPr algn="ctr"/>
+            <a:endParaRPr/>
           </a:p>
         </p:txBody>
       </p:sp>
@@ -13152,7 +13424,7 @@
           <a:noFill/>
         </p:spPr>
         <p:txBody>
-          <a:bodyPr wrap="square" lIns="0" rIns="0" tIns="0" bIns="0">
+          <a:bodyPr wrap="square" lIns="0" tIns="0" rIns="0" bIns="0">
             <a:spAutoFit/>
           </a:bodyPr>
           <a:lstStyle/>
@@ -13194,7 +13466,7 @@
           <a:noFill/>
         </p:spPr>
         <p:txBody>
-          <a:bodyPr wrap="square" lIns="0" rIns="0" tIns="0" bIns="0">
+          <a:bodyPr wrap="square" lIns="0" tIns="0" rIns="0" bIns="0">
             <a:spAutoFit/>
           </a:bodyPr>
           <a:lstStyle/>
@@ -13214,7 +13486,40 @@
               </a:defRPr>
             </a:pPr>
             <a:r>
-              <a:t>Alternativa para muchas conexiones; aún no implementada.</a:t>
+              <a:rPr dirty="0"/>
+              <a:t>Alternativa para </a:t>
+            </a:r>
+            <a:r>
+              <a:rPr dirty="0" err="1"/>
+              <a:t>muchas</a:t>
+            </a:r>
+            <a:r>
+              <a:rPr dirty="0"/>
+              <a:t> </a:t>
+            </a:r>
+            <a:r>
+              <a:rPr dirty="0" err="1"/>
+              <a:t>conexiones</a:t>
+            </a:r>
+            <a:r>
+              <a:rPr dirty="0"/>
+              <a:t>; </a:t>
+            </a:r>
+            <a:r>
+              <a:rPr dirty="0" err="1"/>
+              <a:t>aún</a:t>
+            </a:r>
+            <a:r>
+              <a:rPr dirty="0"/>
+              <a:t> no </a:t>
+            </a:r>
+            <a:r>
+              <a:rPr dirty="0" err="1"/>
+              <a:t>implementada</a:t>
+            </a:r>
+            <a:r>
+              <a:rPr dirty="0"/>
+              <a:t>.</a:t>
             </a:r>
           </a:p>
         </p:txBody>
@@ -13259,6 +13564,7 @@
           <a:lstStyle/>
           <a:p>
             <a:pPr algn="ctr"/>
+            <a:endParaRPr/>
           </a:p>
         </p:txBody>
       </p:sp>
@@ -13302,6 +13608,7 @@
           <a:lstStyle/>
           <a:p>
             <a:pPr algn="ctr"/>
+            <a:endParaRPr/>
           </a:p>
         </p:txBody>
       </p:sp>
@@ -13322,7 +13629,7 @@
           <a:noFill/>
         </p:spPr>
         <p:txBody>
-          <a:bodyPr wrap="square" lIns="0" rIns="0" tIns="0" bIns="0">
+          <a:bodyPr wrap="square" lIns="0" tIns="0" rIns="0" bIns="0">
             <a:spAutoFit/>
           </a:bodyPr>
           <a:lstStyle/>
@@ -13356,7 +13663,7 @@
 </file>
 
 <file path=ppt/slides/slide6.xml><?xml version="1.0" encoding="utf-8"?>
-<p:sld xmlns:a="http://schemas.openxmlformats.org/drawingml/2006/main" xmlns:p="http://schemas.openxmlformats.org/presentationml/2006/main" xmlns:r="http://schemas.openxmlformats.org/officeDocument/2006/relationships">
+<p:sld xmlns:a="http://schemas.openxmlformats.org/drawingml/2006/main" xmlns:r="http://schemas.openxmlformats.org/officeDocument/2006/relationships" xmlns:p="http://schemas.openxmlformats.org/presentationml/2006/main">
   <p:cSld>
     <p:bg>
       <p:bgPr>
@@ -13372,7 +13679,14 @@
         <p:cNvGrpSpPr/>
         <p:nvPr/>
       </p:nvGrpSpPr>
-      <p:grpSpPr/>
+      <p:grpSpPr>
+        <a:xfrm>
+          <a:off x="0" y="0"/>
+          <a:ext cx="0" cy="0"/>
+          <a:chOff x="0" y="0"/>
+          <a:chExt cx="0" cy="0"/>
+        </a:xfrm>
+      </p:grpSpPr>
       <p:sp>
         <p:nvSpPr>
           <p:cNvPr id="2" name="Rectangle 1"/>
@@ -13413,6 +13727,7 @@
           <a:lstStyle/>
           <a:p>
             <a:pPr algn="ctr"/>
+            <a:endParaRPr/>
           </a:p>
         </p:txBody>
       </p:sp>
@@ -13433,7 +13748,7 @@
           <a:noFill/>
         </p:spPr>
         <p:txBody>
-          <a:bodyPr wrap="square" lIns="0" rIns="0" tIns="0" bIns="0">
+          <a:bodyPr wrap="square" lIns="0" tIns="0" rIns="0" bIns="0">
             <a:spAutoFit/>
           </a:bodyPr>
           <a:lstStyle/>
@@ -13475,7 +13790,7 @@
           <a:noFill/>
         </p:spPr>
         <p:txBody>
-          <a:bodyPr wrap="square" lIns="0" rIns="0" tIns="0" bIns="0">
+          <a:bodyPr wrap="square" lIns="0" tIns="0" rIns="0" bIns="0">
             <a:spAutoFit/>
           </a:bodyPr>
           <a:lstStyle/>
@@ -13540,6 +13855,7 @@
           <a:lstStyle/>
           <a:p>
             <a:pPr algn="ctr"/>
+            <a:endParaRPr/>
           </a:p>
         </p:txBody>
       </p:sp>
@@ -13560,7 +13876,7 @@
           <a:noFill/>
         </p:spPr>
         <p:txBody>
-          <a:bodyPr wrap="square" lIns="0" rIns="0" tIns="0" bIns="0">
+          <a:bodyPr wrap="square" lIns="0" tIns="0" rIns="0" bIns="0">
             <a:spAutoFit/>
           </a:bodyPr>
           <a:lstStyle/>
@@ -13602,7 +13918,7 @@
           <a:noFill/>
         </p:spPr>
         <p:txBody>
-          <a:bodyPr wrap="square" lIns="0" rIns="0" tIns="0" bIns="0">
+          <a:bodyPr wrap="square" lIns="0" tIns="0" rIns="0" bIns="0">
             <a:spAutoFit/>
           </a:bodyPr>
           <a:lstStyle/>
@@ -13667,6 +13983,7 @@
           <a:lstStyle/>
           <a:p>
             <a:pPr algn="ctr"/>
+            <a:endParaRPr/>
           </a:p>
         </p:txBody>
       </p:sp>
@@ -13687,7 +14004,7 @@
           <a:noFill/>
         </p:spPr>
         <p:txBody>
-          <a:bodyPr wrap="square" lIns="0" rIns="0" tIns="0" bIns="0">
+          <a:bodyPr wrap="square" lIns="0" tIns="0" rIns="0" bIns="0">
             <a:spAutoFit/>
           </a:bodyPr>
           <a:lstStyle/>
@@ -13729,7 +14046,7 @@
           <a:noFill/>
         </p:spPr>
         <p:txBody>
-          <a:bodyPr wrap="square" lIns="0" rIns="0" tIns="0" bIns="0">
+          <a:bodyPr wrap="square" lIns="0" tIns="0" rIns="0" bIns="0">
             <a:spAutoFit/>
           </a:bodyPr>
           <a:lstStyle/>
@@ -13794,6 +14111,7 @@
           <a:lstStyle/>
           <a:p>
             <a:pPr algn="ctr"/>
+            <a:endParaRPr/>
           </a:p>
         </p:txBody>
       </p:sp>
@@ -13837,6 +14155,7 @@
           <a:lstStyle/>
           <a:p>
             <a:pPr algn="ctr"/>
+            <a:endParaRPr/>
           </a:p>
         </p:txBody>
       </p:sp>
@@ -13857,7 +14176,7 @@
           <a:noFill/>
         </p:spPr>
         <p:txBody>
-          <a:bodyPr wrap="square" lIns="0" rIns="0" tIns="0" bIns="0">
+          <a:bodyPr wrap="square" lIns="0" tIns="0" rIns="0" bIns="0">
             <a:spAutoFit/>
           </a:bodyPr>
           <a:lstStyle/>
@@ -13899,7 +14218,7 @@
           <a:noFill/>
         </p:spPr>
         <p:txBody>
-          <a:bodyPr wrap="square" lIns="0" rIns="0" tIns="0" bIns="0">
+          <a:bodyPr wrap="square" lIns="0" tIns="0" rIns="0" bIns="0">
             <a:spAutoFit/>
           </a:bodyPr>
           <a:lstStyle/>
@@ -13964,6 +14283,7 @@
           <a:lstStyle/>
           <a:p>
             <a:pPr algn="ctr"/>
+            <a:endParaRPr/>
           </a:p>
         </p:txBody>
       </p:sp>
@@ -14007,6 +14327,7 @@
           <a:lstStyle/>
           <a:p>
             <a:pPr algn="ctr"/>
+            <a:endParaRPr/>
           </a:p>
         </p:txBody>
       </p:sp>
@@ -14027,7 +14348,7 @@
           <a:noFill/>
         </p:spPr>
         <p:txBody>
-          <a:bodyPr wrap="square" lIns="0" rIns="0" tIns="0" bIns="0">
+          <a:bodyPr wrap="square" lIns="0" tIns="0" rIns="0" bIns="0">
             <a:spAutoFit/>
           </a:bodyPr>
           <a:lstStyle/>
@@ -14069,7 +14390,7 @@
           <a:noFill/>
         </p:spPr>
         <p:txBody>
-          <a:bodyPr wrap="square" lIns="0" rIns="0" tIns="0" bIns="0">
+          <a:bodyPr wrap="square" lIns="0" tIns="0" rIns="0" bIns="0">
             <a:spAutoFit/>
           </a:bodyPr>
           <a:lstStyle/>
@@ -14134,6 +14455,7 @@
           <a:lstStyle/>
           <a:p>
             <a:pPr algn="ctr"/>
+            <a:endParaRPr/>
           </a:p>
         </p:txBody>
       </p:sp>
@@ -14177,6 +14499,7 @@
           <a:lstStyle/>
           <a:p>
             <a:pPr algn="ctr"/>
+            <a:endParaRPr/>
           </a:p>
         </p:txBody>
       </p:sp>
@@ -14197,7 +14520,7 @@
           <a:noFill/>
         </p:spPr>
         <p:txBody>
-          <a:bodyPr wrap="square" lIns="0" rIns="0" tIns="0" bIns="0">
+          <a:bodyPr wrap="square" lIns="0" tIns="0" rIns="0" bIns="0">
             <a:spAutoFit/>
           </a:bodyPr>
           <a:lstStyle/>
@@ -14239,7 +14562,7 @@
           <a:noFill/>
         </p:spPr>
         <p:txBody>
-          <a:bodyPr wrap="square" lIns="0" rIns="0" tIns="0" bIns="0">
+          <a:bodyPr wrap="square" lIns="0" tIns="0" rIns="0" bIns="0">
             <a:spAutoFit/>
           </a:bodyPr>
           <a:lstStyle/>
@@ -14281,7 +14604,7 @@
           <a:noFill/>
         </p:spPr>
         <p:txBody>
-          <a:bodyPr wrap="square" lIns="0" rIns="0" tIns="0" bIns="0">
+          <a:bodyPr wrap="square" lIns="0" tIns="0" rIns="0" bIns="0">
             <a:spAutoFit/>
           </a:bodyPr>
           <a:lstStyle/>
@@ -14365,6 +14688,7 @@
           <a:lstStyle/>
           <a:p>
             <a:pPr algn="ctr"/>
+            <a:endParaRPr/>
           </a:p>
         </p:txBody>
       </p:sp>
@@ -14385,7 +14709,7 @@
           <a:noFill/>
         </p:spPr>
         <p:txBody>
-          <a:bodyPr wrap="square" lIns="0" rIns="0" tIns="0" bIns="0">
+          <a:bodyPr wrap="square" lIns="0" tIns="0" rIns="0" bIns="0">
             <a:spAutoFit/>
           </a:bodyPr>
           <a:lstStyle/>
@@ -14419,7 +14743,7 @@
 </file>
 
 <file path=ppt/slides/slide7.xml><?xml version="1.0" encoding="utf-8"?>
-<p:sld xmlns:a="http://schemas.openxmlformats.org/drawingml/2006/main" xmlns:p="http://schemas.openxmlformats.org/presentationml/2006/main" xmlns:r="http://schemas.openxmlformats.org/officeDocument/2006/relationships">
+<p:sld xmlns:a="http://schemas.openxmlformats.org/drawingml/2006/main" xmlns:r="http://schemas.openxmlformats.org/officeDocument/2006/relationships" xmlns:p="http://schemas.openxmlformats.org/presentationml/2006/main">
   <p:cSld>
     <p:bg>
       <p:bgPr>
@@ -14435,7 +14759,14 @@
         <p:cNvGrpSpPr/>
         <p:nvPr/>
       </p:nvGrpSpPr>
-      <p:grpSpPr/>
+      <p:grpSpPr>
+        <a:xfrm>
+          <a:off x="0" y="0"/>
+          <a:ext cx="0" cy="0"/>
+          <a:chOff x="0" y="0"/>
+          <a:chExt cx="0" cy="0"/>
+        </a:xfrm>
+      </p:grpSpPr>
       <p:sp>
         <p:nvSpPr>
           <p:cNvPr id="2" name="Rectangle 1"/>
@@ -14476,6 +14807,7 @@
           <a:lstStyle/>
           <a:p>
             <a:pPr algn="ctr"/>
+            <a:endParaRPr/>
           </a:p>
         </p:txBody>
       </p:sp>
@@ -14496,7 +14828,7 @@
           <a:noFill/>
         </p:spPr>
         <p:txBody>
-          <a:bodyPr wrap="square" lIns="0" rIns="0" tIns="0" bIns="0">
+          <a:bodyPr wrap="square" lIns="0" tIns="0" rIns="0" bIns="0">
             <a:spAutoFit/>
           </a:bodyPr>
           <a:lstStyle/>
@@ -14538,7 +14870,7 @@
           <a:noFill/>
         </p:spPr>
         <p:txBody>
-          <a:bodyPr wrap="square" lIns="0" rIns="0" tIns="0" bIns="0">
+          <a:bodyPr wrap="square" lIns="0" tIns="0" rIns="0" bIns="0">
             <a:spAutoFit/>
           </a:bodyPr>
           <a:lstStyle/>
@@ -14603,6 +14935,7 @@
           <a:lstStyle/>
           <a:p>
             <a:pPr algn="ctr"/>
+            <a:endParaRPr/>
           </a:p>
         </p:txBody>
       </p:sp>
@@ -14623,7 +14956,7 @@
           <a:noFill/>
         </p:spPr>
         <p:txBody>
-          <a:bodyPr wrap="square" lIns="0" rIns="0" tIns="0" bIns="0">
+          <a:bodyPr wrap="square" lIns="0" tIns="0" rIns="0" bIns="0">
             <a:spAutoFit/>
           </a:bodyPr>
           <a:lstStyle/>
@@ -14665,7 +14998,7 @@
           <a:noFill/>
         </p:spPr>
         <p:txBody>
-          <a:bodyPr wrap="square" lIns="0" rIns="0" tIns="0" bIns="0">
+          <a:bodyPr wrap="square" lIns="0" tIns="0" rIns="0" bIns="0">
             <a:spAutoFit/>
           </a:bodyPr>
           <a:lstStyle/>
@@ -14730,6 +15063,7 @@
           <a:lstStyle/>
           <a:p>
             <a:pPr algn="ctr"/>
+            <a:endParaRPr/>
           </a:p>
         </p:txBody>
       </p:sp>
@@ -14750,7 +15084,7 @@
           <a:noFill/>
         </p:spPr>
         <p:txBody>
-          <a:bodyPr wrap="square" lIns="0" rIns="0" tIns="0" bIns="0">
+          <a:bodyPr wrap="square" lIns="0" tIns="0" rIns="0" bIns="0">
             <a:spAutoFit/>
           </a:bodyPr>
           <a:lstStyle/>
@@ -14849,7 +15183,7 @@
           <a:noFill/>
         </p:spPr>
         <p:txBody>
-          <a:bodyPr wrap="square" lIns="0" rIns="0" tIns="0" bIns="0">
+          <a:bodyPr wrap="square" lIns="0" tIns="0" rIns="0" bIns="0">
             <a:spAutoFit/>
           </a:bodyPr>
           <a:lstStyle/>
@@ -14910,7 +15244,7 @@
           <a:noFill/>
         </p:spPr>
         <p:txBody>
-          <a:bodyPr wrap="square" lIns="0" rIns="0" tIns="0" bIns="0">
+          <a:bodyPr wrap="square" lIns="0" tIns="0" rIns="0" bIns="0">
             <a:spAutoFit/>
           </a:bodyPr>
           <a:lstStyle/>
@@ -14994,6 +15328,7 @@
           <a:lstStyle/>
           <a:p>
             <a:pPr algn="ctr"/>
+            <a:endParaRPr/>
           </a:p>
         </p:txBody>
       </p:sp>
@@ -15014,7 +15349,7 @@
           <a:noFill/>
         </p:spPr>
         <p:txBody>
-          <a:bodyPr wrap="square" lIns="0" rIns="0" tIns="0" bIns="0">
+          <a:bodyPr wrap="square" lIns="0" tIns="0" rIns="0" bIns="0">
             <a:spAutoFit/>
           </a:bodyPr>
           <a:lstStyle/>
@@ -15048,7 +15383,7 @@
 </file>
 
 <file path=ppt/slides/slide8.xml><?xml version="1.0" encoding="utf-8"?>
-<p:sld xmlns:a="http://schemas.openxmlformats.org/drawingml/2006/main" xmlns:p="http://schemas.openxmlformats.org/presentationml/2006/main" xmlns:r="http://schemas.openxmlformats.org/officeDocument/2006/relationships">
+<p:sld xmlns:a="http://schemas.openxmlformats.org/drawingml/2006/main" xmlns:r="http://schemas.openxmlformats.org/officeDocument/2006/relationships" xmlns:p="http://schemas.openxmlformats.org/presentationml/2006/main">
   <p:cSld>
     <p:bg>
       <p:bgPr>
@@ -15064,7 +15399,14 @@
         <p:cNvGrpSpPr/>
         <p:nvPr/>
       </p:nvGrpSpPr>
-      <p:grpSpPr/>
+      <p:grpSpPr>
+        <a:xfrm>
+          <a:off x="0" y="0"/>
+          <a:ext cx="0" cy="0"/>
+          <a:chOff x="0" y="0"/>
+          <a:chExt cx="0" cy="0"/>
+        </a:xfrm>
+      </p:grpSpPr>
       <p:sp>
         <p:nvSpPr>
           <p:cNvPr id="2" name="Rectangle 1"/>
@@ -15105,6 +15447,7 @@
           <a:lstStyle/>
           <a:p>
             <a:pPr algn="ctr"/>
+            <a:endParaRPr/>
           </a:p>
         </p:txBody>
       </p:sp>
@@ -15125,7 +15468,7 @@
           <a:noFill/>
         </p:spPr>
         <p:txBody>
-          <a:bodyPr wrap="square" lIns="0" rIns="0" tIns="0" bIns="0">
+          <a:bodyPr wrap="square" lIns="0" tIns="0" rIns="0" bIns="0">
             <a:spAutoFit/>
           </a:bodyPr>
           <a:lstStyle/>
@@ -15167,7 +15510,7 @@
           <a:noFill/>
         </p:spPr>
         <p:txBody>
-          <a:bodyPr wrap="square" lIns="0" rIns="0" tIns="0" bIns="0">
+          <a:bodyPr wrap="square" lIns="0" tIns="0" rIns="0" bIns="0">
             <a:spAutoFit/>
           </a:bodyPr>
           <a:lstStyle/>
@@ -15232,6 +15575,7 @@
           <a:lstStyle/>
           <a:p>
             <a:pPr algn="ctr"/>
+            <a:endParaRPr/>
           </a:p>
         </p:txBody>
       </p:sp>
@@ -15252,7 +15596,7 @@
           <a:noFill/>
         </p:spPr>
         <p:txBody>
-          <a:bodyPr wrap="square" lIns="0" rIns="0" tIns="0" bIns="0">
+          <a:bodyPr wrap="square" lIns="0" tIns="0" rIns="0" bIns="0">
             <a:spAutoFit/>
           </a:bodyPr>
           <a:lstStyle/>
@@ -15294,7 +15638,7 @@
           <a:noFill/>
         </p:spPr>
         <p:txBody>
-          <a:bodyPr wrap="square" lIns="0" rIns="0" tIns="0" bIns="0">
+          <a:bodyPr wrap="square" lIns="0" tIns="0" rIns="0" bIns="0">
             <a:spAutoFit/>
           </a:bodyPr>
           <a:lstStyle/>
@@ -15336,7 +15680,7 @@
           <a:noFill/>
         </p:spPr>
         <p:txBody>
-          <a:bodyPr wrap="square" lIns="0" rIns="0" tIns="0" bIns="0">
+          <a:bodyPr wrap="square" lIns="0" tIns="0" rIns="0" bIns="0">
             <a:spAutoFit/>
           </a:bodyPr>
           <a:lstStyle/>
@@ -15378,7 +15722,7 @@
           <a:noFill/>
         </p:spPr>
         <p:txBody>
-          <a:bodyPr wrap="square" lIns="0" rIns="0" tIns="0" bIns="0">
+          <a:bodyPr wrap="square" lIns="0" tIns="0" rIns="0" bIns="0">
             <a:spAutoFit/>
           </a:bodyPr>
           <a:lstStyle/>
@@ -15443,6 +15787,7 @@
           <a:lstStyle/>
           <a:p>
             <a:pPr algn="ctr"/>
+            <a:endParaRPr/>
           </a:p>
         </p:txBody>
       </p:sp>
@@ -15463,7 +15808,7 @@
           <a:noFill/>
         </p:spPr>
         <p:txBody>
-          <a:bodyPr wrap="square" lIns="0" rIns="0" tIns="0" bIns="0">
+          <a:bodyPr wrap="square" lIns="0" tIns="0" rIns="0" bIns="0">
             <a:spAutoFit/>
           </a:bodyPr>
           <a:lstStyle/>
@@ -15505,7 +15850,7 @@
           <a:noFill/>
         </p:spPr>
         <p:txBody>
-          <a:bodyPr wrap="square" lIns="0" rIns="0" tIns="0" bIns="0">
+          <a:bodyPr wrap="square" lIns="0" tIns="0" rIns="0" bIns="0">
             <a:spAutoFit/>
           </a:bodyPr>
           <a:lstStyle/>
@@ -15570,6 +15915,7 @@
           <a:lstStyle/>
           <a:p>
             <a:pPr algn="ctr"/>
+            <a:endParaRPr/>
           </a:p>
         </p:txBody>
       </p:sp>
@@ -15590,7 +15936,7 @@
           <a:noFill/>
         </p:spPr>
         <p:txBody>
-          <a:bodyPr wrap="square" lIns="0" rIns="0" tIns="0" bIns="0">
+          <a:bodyPr wrap="square" lIns="0" tIns="0" rIns="0" bIns="0">
             <a:spAutoFit/>
           </a:bodyPr>
           <a:lstStyle/>
@@ -15632,7 +15978,7 @@
           <a:noFill/>
         </p:spPr>
         <p:txBody>
-          <a:bodyPr wrap="square" lIns="0" rIns="0" tIns="0" bIns="0">
+          <a:bodyPr wrap="square" lIns="0" tIns="0" rIns="0" bIns="0">
             <a:spAutoFit/>
           </a:bodyPr>
           <a:lstStyle/>
@@ -15697,6 +16043,7 @@
           <a:lstStyle/>
           <a:p>
             <a:pPr algn="ctr"/>
+            <a:endParaRPr/>
           </a:p>
         </p:txBody>
       </p:sp>
@@ -15717,7 +16064,7 @@
           <a:noFill/>
         </p:spPr>
         <p:txBody>
-          <a:bodyPr wrap="square" lIns="0" rIns="0" tIns="0" bIns="0">
+          <a:bodyPr wrap="square" lIns="0" tIns="0" rIns="0" bIns="0">
             <a:spAutoFit/>
           </a:bodyPr>
           <a:lstStyle/>
@@ -15759,7 +16106,7 @@
           <a:noFill/>
         </p:spPr>
         <p:txBody>
-          <a:bodyPr wrap="square" lIns="0" rIns="0" tIns="0" bIns="0">
+          <a:bodyPr wrap="square" lIns="0" tIns="0" rIns="0" bIns="0">
             <a:spAutoFit/>
           </a:bodyPr>
           <a:lstStyle/>
@@ -15824,6 +16171,7 @@
           <a:lstStyle/>
           <a:p>
             <a:pPr algn="ctr"/>
+            <a:endParaRPr/>
           </a:p>
         </p:txBody>
       </p:sp>
@@ -15836,7 +16184,7 @@
 </file>
 
 <file path=ppt/slides/slide9.xml><?xml version="1.0" encoding="utf-8"?>
-<p:sld xmlns:a="http://schemas.openxmlformats.org/drawingml/2006/main" xmlns:p="http://schemas.openxmlformats.org/presentationml/2006/main" xmlns:r="http://schemas.openxmlformats.org/officeDocument/2006/relationships">
+<p:sld xmlns:a="http://schemas.openxmlformats.org/drawingml/2006/main" xmlns:r="http://schemas.openxmlformats.org/officeDocument/2006/relationships" xmlns:p="http://schemas.openxmlformats.org/presentationml/2006/main">
   <p:cSld>
     <p:bg>
       <p:bgPr>
@@ -15852,7 +16200,14 @@
         <p:cNvGrpSpPr/>
         <p:nvPr/>
       </p:nvGrpSpPr>
-      <p:grpSpPr/>
+      <p:grpSpPr>
+        <a:xfrm>
+          <a:off x="0" y="0"/>
+          <a:ext cx="0" cy="0"/>
+          <a:chOff x="0" y="0"/>
+          <a:chExt cx="0" cy="0"/>
+        </a:xfrm>
+      </p:grpSpPr>
       <p:sp>
         <p:nvSpPr>
           <p:cNvPr id="2" name="Rectangle 1"/>
@@ -15893,6 +16248,7 @@
           <a:lstStyle/>
           <a:p>
             <a:pPr algn="ctr"/>
+            <a:endParaRPr/>
           </a:p>
         </p:txBody>
       </p:sp>
@@ -15913,7 +16269,7 @@
           <a:noFill/>
         </p:spPr>
         <p:txBody>
-          <a:bodyPr wrap="square" lIns="0" rIns="0" tIns="0" bIns="0">
+          <a:bodyPr wrap="square" lIns="0" tIns="0" rIns="0" bIns="0">
             <a:spAutoFit/>
           </a:bodyPr>
           <a:lstStyle/>
@@ -15955,7 +16311,7 @@
           <a:noFill/>
         </p:spPr>
         <p:txBody>
-          <a:bodyPr wrap="square" lIns="0" rIns="0" tIns="0" bIns="0">
+          <a:bodyPr wrap="square" lIns="0" tIns="0" rIns="0" bIns="0">
             <a:spAutoFit/>
           </a:bodyPr>
           <a:lstStyle/>
@@ -16020,6 +16376,7 @@
           <a:lstStyle/>
           <a:p>
             <a:pPr algn="ctr"/>
+            <a:endParaRPr/>
           </a:p>
         </p:txBody>
       </p:sp>
@@ -16040,7 +16397,7 @@
           <a:noFill/>
         </p:spPr>
         <p:txBody>
-          <a:bodyPr wrap="square" lIns="0" rIns="0" tIns="0" bIns="0">
+          <a:bodyPr wrap="square" lIns="0" tIns="0" rIns="0" bIns="0">
             <a:spAutoFit/>
           </a:bodyPr>
           <a:lstStyle/>
@@ -16082,7 +16439,7 @@
           <a:noFill/>
         </p:spPr>
         <p:txBody>
-          <a:bodyPr wrap="square" lIns="0" rIns="0" tIns="0" bIns="0">
+          <a:bodyPr wrap="square" lIns="0" tIns="0" rIns="0" bIns="0">
             <a:spAutoFit/>
           </a:bodyPr>
           <a:lstStyle/>
@@ -16147,6 +16504,7 @@
           <a:lstStyle/>
           <a:p>
             <a:pPr algn="ctr"/>
+            <a:endParaRPr/>
           </a:p>
         </p:txBody>
       </p:sp>
@@ -16167,7 +16525,7 @@
           <a:noFill/>
         </p:spPr>
         <p:txBody>
-          <a:bodyPr wrap="square" lIns="0" rIns="0" tIns="0" bIns="0">
+          <a:bodyPr wrap="square" lIns="0" tIns="0" rIns="0" bIns="0">
             <a:spAutoFit/>
           </a:bodyPr>
           <a:lstStyle/>
@@ -16209,7 +16567,7 @@
           <a:noFill/>
         </p:spPr>
         <p:txBody>
-          <a:bodyPr wrap="square" lIns="0" rIns="0" tIns="0" bIns="0">
+          <a:bodyPr wrap="square" lIns="0" tIns="0" rIns="0" bIns="0">
             <a:spAutoFit/>
           </a:bodyPr>
           <a:lstStyle/>
@@ -16274,6 +16632,7 @@
           <a:lstStyle/>
           <a:p>
             <a:pPr algn="ctr"/>
+            <a:endParaRPr/>
           </a:p>
         </p:txBody>
       </p:sp>
@@ -16317,6 +16676,7 @@
           <a:lstStyle/>
           <a:p>
             <a:pPr algn="ctr"/>
+            <a:endParaRPr/>
           </a:p>
         </p:txBody>
       </p:sp>
@@ -16337,7 +16697,7 @@
           <a:noFill/>
         </p:spPr>
         <p:txBody>
-          <a:bodyPr wrap="square" lIns="0" rIns="0" tIns="0" bIns="0">
+          <a:bodyPr wrap="square" lIns="0" tIns="0" rIns="0" bIns="0">
             <a:spAutoFit/>
           </a:bodyPr>
           <a:lstStyle/>
@@ -16379,7 +16739,7 @@
           <a:noFill/>
         </p:spPr>
         <p:txBody>
-          <a:bodyPr wrap="square" lIns="0" rIns="0" tIns="0" bIns="0">
+          <a:bodyPr wrap="square" lIns="0" tIns="0" rIns="0" bIns="0">
             <a:spAutoFit/>
           </a:bodyPr>
           <a:lstStyle/>
@@ -16444,6 +16804,7 @@
           <a:lstStyle/>
           <a:p>
             <a:pPr algn="ctr"/>
+            <a:endParaRPr/>
           </a:p>
         </p:txBody>
       </p:sp>
@@ -16487,6 +16848,7 @@
           <a:lstStyle/>
           <a:p>
             <a:pPr algn="ctr"/>
+            <a:endParaRPr/>
           </a:p>
         </p:txBody>
       </p:sp>
@@ -16507,7 +16869,7 @@
           <a:noFill/>
         </p:spPr>
         <p:txBody>
-          <a:bodyPr wrap="square" lIns="0" rIns="0" tIns="0" bIns="0">
+          <a:bodyPr wrap="square" lIns="0" tIns="0" rIns="0" bIns="0">
             <a:spAutoFit/>
           </a:bodyPr>
           <a:lstStyle/>
@@ -16549,7 +16911,7 @@
           <a:noFill/>
         </p:spPr>
         <p:txBody>
-          <a:bodyPr wrap="square" lIns="0" rIns="0" tIns="0" bIns="0">
+          <a:bodyPr wrap="square" lIns="0" tIns="0" rIns="0" bIns="0">
             <a:spAutoFit/>
           </a:bodyPr>
           <a:lstStyle/>
@@ -16614,6 +16976,7 @@
           <a:lstStyle/>
           <a:p>
             <a:pPr algn="ctr"/>
+            <a:endParaRPr/>
           </a:p>
         </p:txBody>
       </p:sp>
@@ -16657,6 +17020,7 @@
           <a:lstStyle/>
           <a:p>
             <a:pPr algn="ctr"/>
+            <a:endParaRPr/>
           </a:p>
         </p:txBody>
       </p:sp>
@@ -16677,7 +17041,7 @@
           <a:noFill/>
         </p:spPr>
         <p:txBody>
-          <a:bodyPr wrap="square" lIns="0" rIns="0" tIns="0" bIns="0">
+          <a:bodyPr wrap="square" lIns="0" tIns="0" rIns="0" bIns="0">
             <a:spAutoFit/>
           </a:bodyPr>
           <a:lstStyle/>
@@ -16719,7 +17083,7 @@
           <a:noFill/>
         </p:spPr>
         <p:txBody>
-          <a:bodyPr wrap="square" lIns="0" rIns="0" tIns="0" bIns="0">
+          <a:bodyPr wrap="square" lIns="0" tIns="0" rIns="0" bIns="0">
             <a:spAutoFit/>
           </a:bodyPr>
           <a:lstStyle/>
@@ -16761,7 +17125,7 @@
           <a:noFill/>
         </p:spPr>
         <p:txBody>
-          <a:bodyPr wrap="square" lIns="0" rIns="0" tIns="0" bIns="0">
+          <a:bodyPr wrap="square" lIns="0" tIns="0" rIns="0" bIns="0">
             <a:spAutoFit/>
           </a:bodyPr>
           <a:lstStyle/>
@@ -16845,6 +17209,7 @@
           <a:lstStyle/>
           <a:p>
             <a:pPr algn="ctr"/>
+            <a:endParaRPr/>
           </a:p>
         </p:txBody>
       </p:sp>
@@ -16865,7 +17230,7 @@
           <a:noFill/>
         </p:spPr>
         <p:txBody>
-          <a:bodyPr wrap="square" lIns="0" rIns="0" tIns="0" bIns="0">
+          <a:bodyPr wrap="square" lIns="0" tIns="0" rIns="0" bIns="0">
             <a:spAutoFit/>
           </a:bodyPr>
           <a:lstStyle/>
@@ -17219,7 +17584,7 @@
 </file>
 
 <file path=ppt/theme/theme2.xml><?xml version="1.0" encoding="utf-8"?>
-<a:theme xmlns:a="http://schemas.openxmlformats.org/drawingml/2006/main" name="Office Theme">
+<a:theme xmlns:a="http://schemas.openxmlformats.org/drawingml/2006/main" name="Tema de Office">
   <a:themeElements>
     <a:clrScheme name="Office">
       <a:dk1>
@@ -17229,44 +17594,44 @@
         <a:sysClr val="window" lastClr="FFFFFF"/>
       </a:lt1>
       <a:dk2>
-        <a:srgbClr val="1F497D"/>
+        <a:srgbClr val="0E2841"/>
       </a:dk2>
       <a:lt2>
-        <a:srgbClr val="EEECE1"/>
+        <a:srgbClr val="E8E8E8"/>
       </a:lt2>
       <a:accent1>
-        <a:srgbClr val="4F81BD"/>
+        <a:srgbClr val="156082"/>
       </a:accent1>
       <a:accent2>
-        <a:srgbClr val="C0504D"/>
+        <a:srgbClr val="E97132"/>
       </a:accent2>
       <a:accent3>
-        <a:srgbClr val="9BBB59"/>
+        <a:srgbClr val="196B24"/>
       </a:accent3>
       <a:accent4>
-        <a:srgbClr val="8064A2"/>
+        <a:srgbClr val="0F9ED5"/>
       </a:accent4>
       <a:accent5>
-        <a:srgbClr val="4BACC6"/>
+        <a:srgbClr val="A02B93"/>
       </a:accent5>
       <a:accent6>
-        <a:srgbClr val="F79646"/>
+        <a:srgbClr val="4EA72E"/>
       </a:accent6>
       <a:hlink>
-        <a:srgbClr val="0000FF"/>
+        <a:srgbClr val="467886"/>
       </a:hlink>
       <a:folHlink>
-        <a:srgbClr val="800080"/>
+        <a:srgbClr val="96607D"/>
       </a:folHlink>
     </a:clrScheme>
     <a:fontScheme name="Office">
       <a:majorFont>
-        <a:latin typeface="Calibri"/>
+        <a:latin typeface="Aptos Display" panose="02110004020202020204"/>
         <a:ea typeface=""/>
         <a:cs typeface=""/>
-        <a:font script="Jpan" typeface="ＭＳ Ｐゴシック"/>
+        <a:font script="Jpan" typeface="游ゴシック Light"/>
         <a:font script="Hang" typeface="맑은 고딕"/>
-        <a:font script="Hans" typeface="宋体"/>
+        <a:font script="Hans" typeface="等线 Light"/>
         <a:font script="Hant" typeface="新細明體"/>
         <a:font script="Arab" typeface="Times New Roman"/>
         <a:font script="Hebr" typeface="Times New Roman"/>
@@ -17294,14 +17659,31 @@
         <a:font script="Viet" typeface="Times New Roman"/>
         <a:font script="Uigh" typeface="Microsoft Uighur"/>
         <a:font script="Geor" typeface="Sylfaen"/>
+        <a:font script="Armn" typeface="Arial"/>
+        <a:font script="Bugi" typeface="Leelawadee UI"/>
+        <a:font script="Bopo" typeface="Microsoft JhengHei"/>
+        <a:font script="Java" typeface="Javanese Text"/>
+        <a:font script="Lisu" typeface="Segoe UI"/>
+        <a:font script="Mymr" typeface="Myanmar Text"/>
+        <a:font script="Nkoo" typeface="Ebrima"/>
+        <a:font script="Olck" typeface="Nirmala UI"/>
+        <a:font script="Osma" typeface="Ebrima"/>
+        <a:font script="Phag" typeface="Phagspa"/>
+        <a:font script="Syrn" typeface="Estrangelo Edessa"/>
+        <a:font script="Syrj" typeface="Estrangelo Edessa"/>
+        <a:font script="Syre" typeface="Estrangelo Edessa"/>
+        <a:font script="Sora" typeface="Nirmala UI"/>
+        <a:font script="Tale" typeface="Microsoft Tai Le"/>
+        <a:font script="Talu" typeface="Microsoft New Tai Lue"/>
+        <a:font script="Tfng" typeface="Ebrima"/>
       </a:majorFont>
       <a:minorFont>
-        <a:latin typeface="Calibri"/>
+        <a:latin typeface="Aptos" panose="02110004020202020204"/>
         <a:ea typeface=""/>
         <a:cs typeface=""/>
-        <a:font script="Jpan" typeface="ＭＳ Ｐゴシック"/>
+        <a:font script="Jpan" typeface="游ゴシック"/>
         <a:font script="Hang" typeface="맑은 고딕"/>
-        <a:font script="Hans" typeface="宋体"/>
+        <a:font script="Hans" typeface="等线"/>
         <a:font script="Hant" typeface="新細明體"/>
         <a:font script="Arab" typeface="Arial"/>
         <a:font script="Hebr" typeface="Arial"/>
@@ -17329,6 +17711,23 @@
         <a:font script="Viet" typeface="Arial"/>
         <a:font script="Uigh" typeface="Microsoft Uighur"/>
         <a:font script="Geor" typeface="Sylfaen"/>
+        <a:font script="Armn" typeface="Arial"/>
+        <a:font script="Bugi" typeface="Leelawadee UI"/>
+        <a:font script="Bopo" typeface="Microsoft JhengHei"/>
+        <a:font script="Java" typeface="Javanese Text"/>
+        <a:font script="Lisu" typeface="Segoe UI"/>
+        <a:font script="Mymr" typeface="Myanmar Text"/>
+        <a:font script="Nkoo" typeface="Ebrima"/>
+        <a:font script="Olck" typeface="Nirmala UI"/>
+        <a:font script="Osma" typeface="Ebrima"/>
+        <a:font script="Phag" typeface="Phagspa"/>
+        <a:font script="Syrn" typeface="Estrangelo Edessa"/>
+        <a:font script="Syrj" typeface="Estrangelo Edessa"/>
+        <a:font script="Syre" typeface="Estrangelo Edessa"/>
+        <a:font script="Sora" typeface="Nirmala UI"/>
+        <a:font script="Tale" typeface="Microsoft Tai Le"/>
+        <a:font script="Talu" typeface="Microsoft New Tai Lue"/>
+        <a:font script="Tfng" typeface="Ebrima"/>
       </a:minorFont>
     </a:fontScheme>
     <a:fmtScheme name="Office">
@@ -17340,180 +17739,136 @@
           <a:gsLst>
             <a:gs pos="0">
               <a:schemeClr val="phClr">
-                <a:tint val="50000"/>
-                <a:satMod val="300000"/>
+                <a:lumMod val="110000"/>
+                <a:satMod val="105000"/>
+                <a:tint val="67000"/>
               </a:schemeClr>
             </a:gs>
-            <a:gs pos="35000">
+            <a:gs pos="50000">
               <a:schemeClr val="phClr">
-                <a:tint val="37000"/>
-                <a:satMod val="300000"/>
+                <a:lumMod val="105000"/>
+                <a:satMod val="103000"/>
+                <a:tint val="73000"/>
               </a:schemeClr>
             </a:gs>
             <a:gs pos="100000">
               <a:schemeClr val="phClr">
-                <a:tint val="15000"/>
-                <a:satMod val="350000"/>
+                <a:lumMod val="105000"/>
+                <a:satMod val="109000"/>
+                <a:tint val="81000"/>
               </a:schemeClr>
             </a:gs>
           </a:gsLst>
-          <a:lin ang="16200000" scaled="1"/>
+          <a:lin ang="5400000" scaled="0"/>
         </a:gradFill>
         <a:gradFill rotWithShape="1">
           <a:gsLst>
             <a:gs pos="0">
               <a:schemeClr val="phClr">
-                <a:tint val="100000"/>
+                <a:satMod val="103000"/>
+                <a:lumMod val="102000"/>
+                <a:tint val="94000"/>
+              </a:schemeClr>
+            </a:gs>
+            <a:gs pos="50000">
+              <a:schemeClr val="phClr">
+                <a:satMod val="110000"/>
+                <a:lumMod val="100000"/>
                 <a:shade val="100000"/>
-                <a:satMod val="130000"/>
               </a:schemeClr>
             </a:gs>
             <a:gs pos="100000">
               <a:schemeClr val="phClr">
-                <a:tint val="50000"/>
-                <a:shade val="100000"/>
-                <a:satMod val="350000"/>
+                <a:lumMod val="99000"/>
+                <a:satMod val="120000"/>
+                <a:shade val="78000"/>
               </a:schemeClr>
             </a:gs>
           </a:gsLst>
-          <a:lin ang="16200000" scaled="0"/>
+          <a:lin ang="5400000" scaled="0"/>
         </a:gradFill>
       </a:fillStyleLst>
       <a:lnStyleLst>
-        <a:ln w="9525" cap="flat" cmpd="sng" algn="ctr">
+        <a:ln w="12700" cap="flat" cmpd="sng" algn="ctr">
           <a:solidFill>
-            <a:schemeClr val="phClr">
-              <a:shade val="95000"/>
-              <a:satMod val="105000"/>
-            </a:schemeClr>
+            <a:schemeClr val="phClr"/>
           </a:solidFill>
           <a:prstDash val="solid"/>
+          <a:miter lim="800000"/>
+        </a:ln>
+        <a:ln w="19050" cap="flat" cmpd="sng" algn="ctr">
+          <a:solidFill>
+            <a:schemeClr val="phClr"/>
+          </a:solidFill>
+          <a:prstDash val="solid"/>
+          <a:miter lim="800000"/>
         </a:ln>
         <a:ln w="25400" cap="flat" cmpd="sng" algn="ctr">
           <a:solidFill>
             <a:schemeClr val="phClr"/>
           </a:solidFill>
           <a:prstDash val="solid"/>
-        </a:ln>
-        <a:ln w="38100" cap="flat" cmpd="sng" algn="ctr">
-          <a:solidFill>
-            <a:schemeClr val="phClr"/>
-          </a:solidFill>
-          <a:prstDash val="solid"/>
+          <a:miter lim="800000"/>
         </a:ln>
       </a:lnStyleLst>
       <a:effectStyleLst>
         <a:effectStyle>
+          <a:effectLst/>
+        </a:effectStyle>
+        <a:effectStyle>
+          <a:effectLst/>
+        </a:effectStyle>
+        <a:effectStyle>
           <a:effectLst>
-            <a:outerShdw blurRad="40000" dist="20000" dir="5400000" rotWithShape="0">
+            <a:outerShdw blurRad="57150" dist="19050" dir="5400000" algn="ctr" rotWithShape="0">
               <a:srgbClr val="000000">
-                <a:alpha val="38000"/>
+                <a:alpha val="63000"/>
               </a:srgbClr>
             </a:outerShdw>
           </a:effectLst>
-        </a:effectStyle>
-        <a:effectStyle>
-          <a:effectLst>
-            <a:outerShdw blurRad="40000" dist="23000" dir="5400000" rotWithShape="0">
-              <a:srgbClr val="000000">
-                <a:alpha val="35000"/>
-              </a:srgbClr>
-            </a:outerShdw>
-          </a:effectLst>
-        </a:effectStyle>
-        <a:effectStyle>
-          <a:effectLst>
-            <a:outerShdw blurRad="40000" dist="23000" dir="5400000" rotWithShape="0">
-              <a:srgbClr val="000000">
-                <a:alpha val="35000"/>
-              </a:srgbClr>
-            </a:outerShdw>
-          </a:effectLst>
-          <a:scene3d>
-            <a:camera prst="orthographicFront">
-              <a:rot lat="0" lon="0" rev="0"/>
-            </a:camera>
-            <a:lightRig rig="threePt" dir="t">
-              <a:rot lat="0" lon="0" rev="1200000"/>
-            </a:lightRig>
-          </a:scene3d>
-          <a:sp3d>
-            <a:bevelT w="63500" h="25400"/>
-          </a:sp3d>
         </a:effectStyle>
       </a:effectStyleLst>
       <a:bgFillStyleLst>
         <a:solidFill>
           <a:schemeClr val="phClr"/>
         </a:solidFill>
+        <a:solidFill>
+          <a:schemeClr val="phClr">
+            <a:tint val="95000"/>
+            <a:satMod val="170000"/>
+          </a:schemeClr>
+        </a:solidFill>
         <a:gradFill rotWithShape="1">
           <a:gsLst>
             <a:gs pos="0">
               <a:schemeClr val="phClr">
-                <a:tint val="40000"/>
-                <a:satMod val="350000"/>
+                <a:tint val="93000"/>
+                <a:satMod val="150000"/>
+                <a:shade val="98000"/>
+                <a:lumMod val="102000"/>
               </a:schemeClr>
             </a:gs>
-            <a:gs pos="40000">
+            <a:gs pos="50000">
               <a:schemeClr val="phClr">
-                <a:tint val="45000"/>
-                <a:shade val="99000"/>
-                <a:satMod val="350000"/>
+                <a:tint val="98000"/>
+                <a:satMod val="130000"/>
+                <a:shade val="90000"/>
+                <a:lumMod val="103000"/>
               </a:schemeClr>
             </a:gs>
             <a:gs pos="100000">
               <a:schemeClr val="phClr">
-                <a:shade val="20000"/>
-                <a:satMod val="255000"/>
+                <a:shade val="63000"/>
+                <a:satMod val="120000"/>
               </a:schemeClr>
             </a:gs>
           </a:gsLst>
-          <a:path path="circle">
-            <a:fillToRect l="50000" t="-80000" r="50000" b="180000"/>
-          </a:path>
-        </a:gradFill>
-        <a:gradFill rotWithShape="1">
-          <a:gsLst>
-            <a:gs pos="0">
-              <a:schemeClr val="phClr">
-                <a:tint val="80000"/>
-                <a:satMod val="300000"/>
-              </a:schemeClr>
-            </a:gs>
-            <a:gs pos="100000">
-              <a:schemeClr val="phClr">
-                <a:shade val="30000"/>
-                <a:satMod val="200000"/>
-              </a:schemeClr>
-            </a:gs>
-          </a:gsLst>
-          <a:path path="circle">
-            <a:fillToRect l="50000" t="50000" r="50000" b="50000"/>
-          </a:path>
+          <a:lin ang="5400000" scaled="0"/>
         </a:gradFill>
       </a:bgFillStyleLst>
     </a:fmtScheme>
   </a:themeElements>
   <a:objectDefaults>
-    <a:spDef>
-      <a:spPr/>
-      <a:bodyPr/>
-      <a:lstStyle/>
-      <a:style>
-        <a:lnRef idx="1">
-          <a:schemeClr val="accent1"/>
-        </a:lnRef>
-        <a:fillRef idx="3">
-          <a:schemeClr val="accent1"/>
-        </a:fillRef>
-        <a:effectRef idx="2">
-          <a:schemeClr val="accent1"/>
-        </a:effectRef>
-        <a:fontRef idx="minor">
-          <a:schemeClr val="lt1"/>
-        </a:fontRef>
-      </a:style>
-    </a:spDef>
     <a:lnDef>
       <a:spPr/>
       <a:bodyPr/>
@@ -17535,5 +17890,10 @@
     </a:lnDef>
   </a:objectDefaults>
   <a:extraClrSchemeLst/>
+  <a:extLst>
+    <a:ext uri="{05A4C25C-085E-4340-85A3-A5531E510DB2}">
+      <thm15:themeFamily xmlns:thm15="http://schemas.microsoft.com/office/thememl/2012/main" name="Office Theme" id="{2E142A2C-CD16-42D6-873A-C26D2A0506FA}" vid="{1BDDFF52-6CD6-40A5-AB3C-68EB2F1E4D0A}"/>
+    </a:ext>
+  </a:extLst>
 </a:theme>
 </file>